--- a/results/pg_m3p_updown_slide.pptx
+++ b/results/pg_m3p_updown_slide.pptx
@@ -5,12 +5,12 @@
     <p:sldMasterId id="2147483648" r:id="rId1"/>
   </p:sldMasterIdLst>
   <p:sldIdLst>
-    <p:sldId id="256" r:id="rId7"/>
-    <p:sldId id="257" r:id="rId8"/>
-    <p:sldId id="258" r:id="rId9"/>
-    <p:sldId id="259" r:id="rId10"/>
+    <p:sldId id="256" r:id="rId2"/>
+    <p:sldId id="257" r:id="rId3"/>
+    <p:sldId id="258" r:id="rId4"/>
+    <p:sldId id="259" r:id="rId5"/>
   </p:sldIdLst>
-  <p:sldSz cx="12191695" cy="6858000" type="screen4x3"/>
+  <p:sldSz cx="12192000" cy="6858000"/>
   <p:notesSz cx="6858000" cy="9144000"/>
   <p:defaultTextStyle>
     <a:defPPr>
@@ -107,6 +107,22 @@
       </a:defRPr>
     </a:lvl9pPr>
   </p:defaultTextStyle>
+  <p:extLst>
+    <p:ext uri="{EFAFB233-063F-42B5-8137-9DF3F51BA10A}">
+      <p15:sldGuideLst xmlns:p15="http://schemas.microsoft.com/office/powerpoint/2012/main">
+        <p15:guide id="1" orient="horz" pos="2160">
+          <p15:clr>
+            <a:srgbClr val="A4A3A4"/>
+          </p15:clr>
+        </p15:guide>
+        <p15:guide id="2" pos="2880">
+          <p15:clr>
+            <a:srgbClr val="A4A3A4"/>
+          </p15:clr>
+        </p15:guide>
+      </p15:sldGuideLst>
+    </p:ext>
+  </p:extLst>
 </p:presentation>
 </file>
 
@@ -148,10 +164,9 @@
           <a:lstStyle/>
           <a:p>
             <a:r>
-              <a:rPr lang="en-US" smtClean="0"/>
+              <a:rPr lang="en-US"/>
               <a:t>Click to edit Master title style</a:t>
             </a:r>
-            <a:endParaRPr lang="en-US"/>
           </a:p>
         </p:txBody>
       </p:sp>
@@ -267,10 +282,9 @@
           </a:lstStyle>
           <a:p>
             <a:r>
-              <a:rPr lang="en-US" smtClean="0"/>
+              <a:rPr lang="en-US"/>
               <a:t>Click to edit Master subtitle style</a:t>
             </a:r>
-            <a:endParaRPr lang="en-US"/>
           </a:p>
         </p:txBody>
       </p:sp>
@@ -291,7 +305,7 @@
           <a:p>
             <a:fld id="{5BCAD085-E8A6-8845-BD4E-CB4CCA059FC4}" type="datetimeFigureOut">
               <a:rPr lang="en-US" smtClean="0"/>
-              <a:t>1/27/13</a:t>
+              <a:t>8/13/2026</a:t>
             </a:fld>
             <a:endParaRPr lang="en-US"/>
           </a:p>
@@ -385,10 +399,9 @@
           <a:lstStyle/>
           <a:p>
             <a:r>
-              <a:rPr lang="en-US" smtClean="0"/>
+              <a:rPr lang="en-US"/>
               <a:t>Click to edit Master title style</a:t>
             </a:r>
-            <a:endParaRPr lang="en-US"/>
           </a:p>
         </p:txBody>
       </p:sp>
@@ -409,38 +422,37 @@
           <a:p>
             <a:pPr lvl="0"/>
             <a:r>
-              <a:rPr lang="en-US" smtClean="0"/>
+              <a:rPr lang="en-US"/>
               <a:t>Click to edit Master text styles</a:t>
             </a:r>
           </a:p>
           <a:p>
             <a:pPr lvl="1"/>
             <a:r>
-              <a:rPr lang="en-US" smtClean="0"/>
+              <a:rPr lang="en-US"/>
               <a:t>Second level</a:t>
             </a:r>
           </a:p>
           <a:p>
             <a:pPr lvl="2"/>
             <a:r>
-              <a:rPr lang="en-US" smtClean="0"/>
+              <a:rPr lang="en-US"/>
               <a:t>Third level</a:t>
             </a:r>
           </a:p>
           <a:p>
             <a:pPr lvl="3"/>
             <a:r>
-              <a:rPr lang="en-US" smtClean="0"/>
+              <a:rPr lang="en-US"/>
               <a:t>Fourth level</a:t>
             </a:r>
           </a:p>
           <a:p>
             <a:pPr lvl="4"/>
             <a:r>
-              <a:rPr lang="en-US" smtClean="0"/>
+              <a:rPr lang="en-US"/>
               <a:t>Fifth level</a:t>
             </a:r>
-            <a:endParaRPr lang="en-US"/>
           </a:p>
         </p:txBody>
       </p:sp>
@@ -461,7 +473,7 @@
           <a:p>
             <a:fld id="{5BCAD085-E8A6-8845-BD4E-CB4CCA059FC4}" type="datetimeFigureOut">
               <a:rPr lang="en-US" smtClean="0"/>
-              <a:t>1/27/13</a:t>
+              <a:t>8/13/2026</a:t>
             </a:fld>
             <a:endParaRPr lang="en-US"/>
           </a:p>
@@ -560,10 +572,9 @@
           <a:lstStyle/>
           <a:p>
             <a:r>
-              <a:rPr lang="en-US" smtClean="0"/>
+              <a:rPr lang="en-US"/>
               <a:t>Click to edit Master title style</a:t>
             </a:r>
-            <a:endParaRPr lang="en-US"/>
           </a:p>
         </p:txBody>
       </p:sp>
@@ -589,38 +600,37 @@
           <a:p>
             <a:pPr lvl="0"/>
             <a:r>
-              <a:rPr lang="en-US" smtClean="0"/>
+              <a:rPr lang="en-US"/>
               <a:t>Click to edit Master text styles</a:t>
             </a:r>
           </a:p>
           <a:p>
             <a:pPr lvl="1"/>
             <a:r>
-              <a:rPr lang="en-US" smtClean="0"/>
+              <a:rPr lang="en-US"/>
               <a:t>Second level</a:t>
             </a:r>
           </a:p>
           <a:p>
             <a:pPr lvl="2"/>
             <a:r>
-              <a:rPr lang="en-US" smtClean="0"/>
+              <a:rPr lang="en-US"/>
               <a:t>Third level</a:t>
             </a:r>
           </a:p>
           <a:p>
             <a:pPr lvl="3"/>
             <a:r>
-              <a:rPr lang="en-US" smtClean="0"/>
+              <a:rPr lang="en-US"/>
               <a:t>Fourth level</a:t>
             </a:r>
           </a:p>
           <a:p>
             <a:pPr lvl="4"/>
             <a:r>
-              <a:rPr lang="en-US" smtClean="0"/>
+              <a:rPr lang="en-US"/>
               <a:t>Fifth level</a:t>
             </a:r>
-            <a:endParaRPr lang="en-US"/>
           </a:p>
         </p:txBody>
       </p:sp>
@@ -641,7 +651,7 @@
           <a:p>
             <a:fld id="{5BCAD085-E8A6-8845-BD4E-CB4CCA059FC4}" type="datetimeFigureOut">
               <a:rPr lang="en-US" smtClean="0"/>
-              <a:t>1/27/13</a:t>
+              <a:t>8/13/2026</a:t>
             </a:fld>
             <a:endParaRPr lang="en-US"/>
           </a:p>
@@ -735,10 +745,9 @@
           <a:lstStyle/>
           <a:p>
             <a:r>
-              <a:rPr lang="en-US" smtClean="0"/>
+              <a:rPr lang="en-US"/>
               <a:t>Click to edit Master title style</a:t>
             </a:r>
-            <a:endParaRPr lang="en-US"/>
           </a:p>
         </p:txBody>
       </p:sp>
@@ -759,38 +768,37 @@
           <a:p>
             <a:pPr lvl="0"/>
             <a:r>
-              <a:rPr lang="en-US" smtClean="0"/>
+              <a:rPr lang="en-US"/>
               <a:t>Click to edit Master text styles</a:t>
             </a:r>
           </a:p>
           <a:p>
             <a:pPr lvl="1"/>
             <a:r>
-              <a:rPr lang="en-US" smtClean="0"/>
+              <a:rPr lang="en-US"/>
               <a:t>Second level</a:t>
             </a:r>
           </a:p>
           <a:p>
             <a:pPr lvl="2"/>
             <a:r>
-              <a:rPr lang="en-US" smtClean="0"/>
+              <a:rPr lang="en-US"/>
               <a:t>Third level</a:t>
             </a:r>
           </a:p>
           <a:p>
             <a:pPr lvl="3"/>
             <a:r>
-              <a:rPr lang="en-US" smtClean="0"/>
+              <a:rPr lang="en-US"/>
               <a:t>Fourth level</a:t>
             </a:r>
           </a:p>
           <a:p>
             <a:pPr lvl="4"/>
             <a:r>
-              <a:rPr lang="en-US" smtClean="0"/>
+              <a:rPr lang="en-US"/>
               <a:t>Fifth level</a:t>
             </a:r>
-            <a:endParaRPr lang="en-US"/>
           </a:p>
         </p:txBody>
       </p:sp>
@@ -811,7 +819,7 @@
           <a:p>
             <a:fld id="{5BCAD085-E8A6-8845-BD4E-CB4CCA059FC4}" type="datetimeFigureOut">
               <a:rPr lang="en-US" smtClean="0"/>
-              <a:t>1/27/13</a:t>
+              <a:t>8/13/2026</a:t>
             </a:fld>
             <a:endParaRPr lang="en-US"/>
           </a:p>
@@ -914,10 +922,9 @@
           </a:lstStyle>
           <a:p>
             <a:r>
-              <a:rPr lang="en-US" smtClean="0"/>
+              <a:rPr lang="en-US"/>
               <a:t>Click to edit Master title style</a:t>
             </a:r>
-            <a:endParaRPr lang="en-US"/>
           </a:p>
         </p:txBody>
       </p:sp>
@@ -1034,7 +1041,7 @@
           <a:p>
             <a:pPr lvl="0"/>
             <a:r>
-              <a:rPr lang="en-US" smtClean="0"/>
+              <a:rPr lang="en-US"/>
               <a:t>Click to edit Master text styles</a:t>
             </a:r>
           </a:p>
@@ -1057,7 +1064,7 @@
           <a:p>
             <a:fld id="{5BCAD085-E8A6-8845-BD4E-CB4CCA059FC4}" type="datetimeFigureOut">
               <a:rPr lang="en-US" smtClean="0"/>
-              <a:t>1/27/13</a:t>
+              <a:t>8/13/2026</a:t>
             </a:fld>
             <a:endParaRPr lang="en-US"/>
           </a:p>
@@ -1151,10 +1158,9 @@
           <a:lstStyle/>
           <a:p>
             <a:r>
-              <a:rPr lang="en-US" smtClean="0"/>
+              <a:rPr lang="en-US"/>
               <a:t>Click to edit Master title style</a:t>
             </a:r>
-            <a:endParaRPr lang="en-US"/>
           </a:p>
         </p:txBody>
       </p:sp>
@@ -1208,38 +1214,37 @@
           <a:p>
             <a:pPr lvl="0"/>
             <a:r>
-              <a:rPr lang="en-US" smtClean="0"/>
+              <a:rPr lang="en-US"/>
               <a:t>Click to edit Master text styles</a:t>
             </a:r>
           </a:p>
           <a:p>
             <a:pPr lvl="1"/>
             <a:r>
-              <a:rPr lang="en-US" smtClean="0"/>
+              <a:rPr lang="en-US"/>
               <a:t>Second level</a:t>
             </a:r>
           </a:p>
           <a:p>
             <a:pPr lvl="2"/>
             <a:r>
-              <a:rPr lang="en-US" smtClean="0"/>
+              <a:rPr lang="en-US"/>
               <a:t>Third level</a:t>
             </a:r>
           </a:p>
           <a:p>
             <a:pPr lvl="3"/>
             <a:r>
-              <a:rPr lang="en-US" smtClean="0"/>
+              <a:rPr lang="en-US"/>
               <a:t>Fourth level</a:t>
             </a:r>
           </a:p>
           <a:p>
             <a:pPr lvl="4"/>
             <a:r>
-              <a:rPr lang="en-US" smtClean="0"/>
+              <a:rPr lang="en-US"/>
               <a:t>Fifth level</a:t>
             </a:r>
-            <a:endParaRPr lang="en-US"/>
           </a:p>
         </p:txBody>
       </p:sp>
@@ -1293,38 +1298,37 @@
           <a:p>
             <a:pPr lvl="0"/>
             <a:r>
-              <a:rPr lang="en-US" smtClean="0"/>
+              <a:rPr lang="en-US"/>
               <a:t>Click to edit Master text styles</a:t>
             </a:r>
           </a:p>
           <a:p>
             <a:pPr lvl="1"/>
             <a:r>
-              <a:rPr lang="en-US" smtClean="0"/>
+              <a:rPr lang="en-US"/>
               <a:t>Second level</a:t>
             </a:r>
           </a:p>
           <a:p>
             <a:pPr lvl="2"/>
             <a:r>
-              <a:rPr lang="en-US" smtClean="0"/>
+              <a:rPr lang="en-US"/>
               <a:t>Third level</a:t>
             </a:r>
           </a:p>
           <a:p>
             <a:pPr lvl="3"/>
             <a:r>
-              <a:rPr lang="en-US" smtClean="0"/>
+              <a:rPr lang="en-US"/>
               <a:t>Fourth level</a:t>
             </a:r>
           </a:p>
           <a:p>
             <a:pPr lvl="4"/>
             <a:r>
-              <a:rPr lang="en-US" smtClean="0"/>
+              <a:rPr lang="en-US"/>
               <a:t>Fifth level</a:t>
             </a:r>
-            <a:endParaRPr lang="en-US"/>
           </a:p>
         </p:txBody>
       </p:sp>
@@ -1345,7 +1349,7 @@
           <a:p>
             <a:fld id="{5BCAD085-E8A6-8845-BD4E-CB4CCA059FC4}" type="datetimeFigureOut">
               <a:rPr lang="en-US" smtClean="0"/>
-              <a:t>1/27/13</a:t>
+              <a:t>8/13/2026</a:t>
             </a:fld>
             <a:endParaRPr lang="en-US"/>
           </a:p>
@@ -1443,10 +1447,9 @@
           </a:lstStyle>
           <a:p>
             <a:r>
-              <a:rPr lang="en-US" smtClean="0"/>
+              <a:rPr lang="en-US"/>
               <a:t>Click to edit Master title style</a:t>
             </a:r>
-            <a:endParaRPr lang="en-US"/>
           </a:p>
         </p:txBody>
       </p:sp>
@@ -1509,7 +1512,7 @@
           <a:p>
             <a:pPr lvl="0"/>
             <a:r>
-              <a:rPr lang="en-US" smtClean="0"/>
+              <a:rPr lang="en-US"/>
               <a:t>Click to edit Master text styles</a:t>
             </a:r>
           </a:p>
@@ -1565,38 +1568,37 @@
           <a:p>
             <a:pPr lvl="0"/>
             <a:r>
-              <a:rPr lang="en-US" smtClean="0"/>
+              <a:rPr lang="en-US"/>
               <a:t>Click to edit Master text styles</a:t>
             </a:r>
           </a:p>
           <a:p>
             <a:pPr lvl="1"/>
             <a:r>
-              <a:rPr lang="en-US" smtClean="0"/>
+              <a:rPr lang="en-US"/>
               <a:t>Second level</a:t>
             </a:r>
           </a:p>
           <a:p>
             <a:pPr lvl="2"/>
             <a:r>
-              <a:rPr lang="en-US" smtClean="0"/>
+              <a:rPr lang="en-US"/>
               <a:t>Third level</a:t>
             </a:r>
           </a:p>
           <a:p>
             <a:pPr lvl="3"/>
             <a:r>
-              <a:rPr lang="en-US" smtClean="0"/>
+              <a:rPr lang="en-US"/>
               <a:t>Fourth level</a:t>
             </a:r>
           </a:p>
           <a:p>
             <a:pPr lvl="4"/>
             <a:r>
-              <a:rPr lang="en-US" smtClean="0"/>
+              <a:rPr lang="en-US"/>
               <a:t>Fifth level</a:t>
             </a:r>
-            <a:endParaRPr lang="en-US"/>
           </a:p>
         </p:txBody>
       </p:sp>
@@ -1659,7 +1661,7 @@
           <a:p>
             <a:pPr lvl="0"/>
             <a:r>
-              <a:rPr lang="en-US" smtClean="0"/>
+              <a:rPr lang="en-US"/>
               <a:t>Click to edit Master text styles</a:t>
             </a:r>
           </a:p>
@@ -1715,38 +1717,37 @@
           <a:p>
             <a:pPr lvl="0"/>
             <a:r>
-              <a:rPr lang="en-US" smtClean="0"/>
+              <a:rPr lang="en-US"/>
               <a:t>Click to edit Master text styles</a:t>
             </a:r>
           </a:p>
           <a:p>
             <a:pPr lvl="1"/>
             <a:r>
-              <a:rPr lang="en-US" smtClean="0"/>
+              <a:rPr lang="en-US"/>
               <a:t>Second level</a:t>
             </a:r>
           </a:p>
           <a:p>
             <a:pPr lvl="2"/>
             <a:r>
-              <a:rPr lang="en-US" smtClean="0"/>
+              <a:rPr lang="en-US"/>
               <a:t>Third level</a:t>
             </a:r>
           </a:p>
           <a:p>
             <a:pPr lvl="3"/>
             <a:r>
-              <a:rPr lang="en-US" smtClean="0"/>
+              <a:rPr lang="en-US"/>
               <a:t>Fourth level</a:t>
             </a:r>
           </a:p>
           <a:p>
             <a:pPr lvl="4"/>
             <a:r>
-              <a:rPr lang="en-US" smtClean="0"/>
+              <a:rPr lang="en-US"/>
               <a:t>Fifth level</a:t>
             </a:r>
-            <a:endParaRPr lang="en-US"/>
           </a:p>
         </p:txBody>
       </p:sp>
@@ -1767,7 +1768,7 @@
           <a:p>
             <a:fld id="{5BCAD085-E8A6-8845-BD4E-CB4CCA059FC4}" type="datetimeFigureOut">
               <a:rPr lang="en-US" smtClean="0"/>
-              <a:t>1/27/13</a:t>
+              <a:t>8/13/2026</a:t>
             </a:fld>
             <a:endParaRPr lang="en-US"/>
           </a:p>
@@ -1861,10 +1862,9 @@
           <a:lstStyle/>
           <a:p>
             <a:r>
-              <a:rPr lang="en-US" smtClean="0"/>
+              <a:rPr lang="en-US"/>
               <a:t>Click to edit Master title style</a:t>
             </a:r>
-            <a:endParaRPr lang="en-US"/>
           </a:p>
         </p:txBody>
       </p:sp>
@@ -1885,7 +1885,7 @@
           <a:p>
             <a:fld id="{5BCAD085-E8A6-8845-BD4E-CB4CCA059FC4}" type="datetimeFigureOut">
               <a:rPr lang="en-US" smtClean="0"/>
-              <a:t>1/27/13</a:t>
+              <a:t>8/13/2026</a:t>
             </a:fld>
             <a:endParaRPr lang="en-US"/>
           </a:p>
@@ -1980,7 +1980,7 @@
           <a:p>
             <a:fld id="{5BCAD085-E8A6-8845-BD4E-CB4CCA059FC4}" type="datetimeFigureOut">
               <a:rPr lang="en-US" smtClean="0"/>
-              <a:t>1/27/13</a:t>
+              <a:t>8/13/2026</a:t>
             </a:fld>
             <a:endParaRPr lang="en-US"/>
           </a:p>
@@ -2083,10 +2083,9 @@
           </a:lstStyle>
           <a:p>
             <a:r>
-              <a:rPr lang="en-US" smtClean="0"/>
+              <a:rPr lang="en-US"/>
               <a:t>Click to edit Master title style</a:t>
             </a:r>
-            <a:endParaRPr lang="en-US"/>
           </a:p>
         </p:txBody>
       </p:sp>
@@ -2140,38 +2139,37 @@
           <a:p>
             <a:pPr lvl="0"/>
             <a:r>
-              <a:rPr lang="en-US" smtClean="0"/>
+              <a:rPr lang="en-US"/>
               <a:t>Click to edit Master text styles</a:t>
             </a:r>
           </a:p>
           <a:p>
             <a:pPr lvl="1"/>
             <a:r>
-              <a:rPr lang="en-US" smtClean="0"/>
+              <a:rPr lang="en-US"/>
               <a:t>Second level</a:t>
             </a:r>
           </a:p>
           <a:p>
             <a:pPr lvl="2"/>
             <a:r>
-              <a:rPr lang="en-US" smtClean="0"/>
+              <a:rPr lang="en-US"/>
               <a:t>Third level</a:t>
             </a:r>
           </a:p>
           <a:p>
             <a:pPr lvl="3"/>
             <a:r>
-              <a:rPr lang="en-US" smtClean="0"/>
+              <a:rPr lang="en-US"/>
               <a:t>Fourth level</a:t>
             </a:r>
           </a:p>
           <a:p>
             <a:pPr lvl="4"/>
             <a:r>
-              <a:rPr lang="en-US" smtClean="0"/>
+              <a:rPr lang="en-US"/>
               <a:t>Fifth level</a:t>
             </a:r>
-            <a:endParaRPr lang="en-US"/>
           </a:p>
         </p:txBody>
       </p:sp>
@@ -2234,7 +2232,7 @@
           <a:p>
             <a:pPr lvl="0"/>
             <a:r>
-              <a:rPr lang="en-US" smtClean="0"/>
+              <a:rPr lang="en-US"/>
               <a:t>Click to edit Master text styles</a:t>
             </a:r>
           </a:p>
@@ -2257,7 +2255,7 @@
           <a:p>
             <a:fld id="{5BCAD085-E8A6-8845-BD4E-CB4CCA059FC4}" type="datetimeFigureOut">
               <a:rPr lang="en-US" smtClean="0"/>
-              <a:t>1/27/13</a:t>
+              <a:t>8/13/2026</a:t>
             </a:fld>
             <a:endParaRPr lang="en-US"/>
           </a:p>
@@ -2360,10 +2358,9 @@
           </a:lstStyle>
           <a:p>
             <a:r>
-              <a:rPr lang="en-US" smtClean="0"/>
+              <a:rPr lang="en-US"/>
               <a:t>Click to edit Master title style</a:t>
             </a:r>
-            <a:endParaRPr lang="en-US"/>
           </a:p>
         </p:txBody>
       </p:sp>
@@ -2487,7 +2484,7 @@
           <a:p>
             <a:pPr lvl="0"/>
             <a:r>
-              <a:rPr lang="en-US" smtClean="0"/>
+              <a:rPr lang="en-US"/>
               <a:t>Click to edit Master text styles</a:t>
             </a:r>
           </a:p>
@@ -2510,7 +2507,7 @@
           <a:p>
             <a:fld id="{5BCAD085-E8A6-8845-BD4E-CB4CCA059FC4}" type="datetimeFigureOut">
               <a:rPr lang="en-US" smtClean="0"/>
-              <a:t>1/27/13</a:t>
+              <a:t>8/13/2026</a:t>
             </a:fld>
             <a:endParaRPr lang="en-US"/>
           </a:p>
@@ -2619,10 +2616,9 @@
           <a:lstStyle/>
           <a:p>
             <a:r>
-              <a:rPr lang="en-US" smtClean="0"/>
+              <a:rPr lang="en-US"/>
               <a:t>Click to edit Master title style</a:t>
             </a:r>
-            <a:endParaRPr lang="en-US"/>
           </a:p>
         </p:txBody>
       </p:sp>
@@ -2653,38 +2649,37 @@
           <a:p>
             <a:pPr lvl="0"/>
             <a:r>
-              <a:rPr lang="en-US" smtClean="0"/>
+              <a:rPr lang="en-US"/>
               <a:t>Click to edit Master text styles</a:t>
             </a:r>
           </a:p>
           <a:p>
             <a:pPr lvl="1"/>
             <a:r>
-              <a:rPr lang="en-US" smtClean="0"/>
+              <a:rPr lang="en-US"/>
               <a:t>Second level</a:t>
             </a:r>
           </a:p>
           <a:p>
             <a:pPr lvl="2"/>
             <a:r>
-              <a:rPr lang="en-US" smtClean="0"/>
+              <a:rPr lang="en-US"/>
               <a:t>Third level</a:t>
             </a:r>
           </a:p>
           <a:p>
             <a:pPr lvl="3"/>
             <a:r>
-              <a:rPr lang="en-US" smtClean="0"/>
+              <a:rPr lang="en-US"/>
               <a:t>Fourth level</a:t>
             </a:r>
           </a:p>
           <a:p>
             <a:pPr lvl="4"/>
             <a:r>
-              <a:rPr lang="en-US" smtClean="0"/>
+              <a:rPr lang="en-US"/>
               <a:t>Fifth level</a:t>
             </a:r>
-            <a:endParaRPr lang="en-US"/>
           </a:p>
         </p:txBody>
       </p:sp>
@@ -2723,7 +2718,7 @@
           <a:p>
             <a:fld id="{5BCAD085-E8A6-8845-BD4E-CB4CCA059FC4}" type="datetimeFigureOut">
               <a:rPr lang="en-US" smtClean="0"/>
-              <a:t>1/27/13</a:t>
+              <a:t>8/13/2026</a:t>
             </a:fld>
             <a:endParaRPr lang="en-US"/>
           </a:p>
@@ -3082,7 +3077,7 @@
 </file>
 
 <file path=ppt/slides/slide1.xml><?xml version="1.0" encoding="utf-8"?>
-<p:sld xmlns:a="http://schemas.openxmlformats.org/drawingml/2006/main" xmlns:p="http://schemas.openxmlformats.org/presentationml/2006/main" xmlns:r="http://schemas.openxmlformats.org/officeDocument/2006/relationships">
+<p:sld xmlns:a="http://schemas.openxmlformats.org/drawingml/2006/main" xmlns:r="http://schemas.openxmlformats.org/officeDocument/2006/relationships" xmlns:p="http://schemas.openxmlformats.org/presentationml/2006/main">
   <p:cSld>
     <p:spTree>
       <p:nvGrpSpPr>
@@ -3090,7 +3085,14 @@
         <p:cNvGrpSpPr/>
         <p:nvPr/>
       </p:nvGrpSpPr>
-      <p:grpSpPr/>
+      <p:grpSpPr>
+        <a:xfrm>
+          <a:off x="0" y="0"/>
+          <a:ext cx="0" cy="0"/>
+          <a:chOff x="0" y="0"/>
+          <a:chExt cx="0" cy="0"/>
+        </a:xfrm>
+      </p:grpSpPr>
       <p:sp>
         <p:nvSpPr>
           <p:cNvPr id="2" name="Rectangle 1"/>
@@ -3128,10 +3130,11 @@
           </a:fontRef>
         </p:style>
         <p:txBody>
-          <a:bodyPr rtlCol="0" anchor="ctr" wrap="none"/>
+          <a:bodyPr wrap="none" rtlCol="0" anchor="ctr"/>
           <a:lstStyle/>
           <a:p>
             <a:pPr algn="ctr"/>
+            <a:endParaRPr/>
           </a:p>
         </p:txBody>
       </p:sp>
@@ -3172,10 +3175,11 @@
           </a:fontRef>
         </p:style>
         <p:txBody>
-          <a:bodyPr rtlCol="0" anchor="ctr" wrap="none"/>
+          <a:bodyPr wrap="none" rtlCol="0" anchor="ctr"/>
           <a:lstStyle/>
           <a:p>
             <a:pPr algn="ctr"/>
+            <a:endParaRPr/>
           </a:p>
         </p:txBody>
       </p:sp>
@@ -3216,10 +3220,11 @@
           </a:fontRef>
         </p:style>
         <p:txBody>
-          <a:bodyPr rtlCol="0" anchor="ctr" wrap="none"/>
+          <a:bodyPr wrap="none" rtlCol="0" anchor="ctr"/>
           <a:lstStyle/>
           <a:p>
             <a:pPr algn="ctr"/>
+            <a:endParaRPr/>
           </a:p>
         </p:txBody>
       </p:sp>
@@ -3240,7 +3245,7 @@
           <a:noFill/>
         </p:spPr>
         <p:txBody>
-          <a:bodyPr wrap="square" anchor="t" lIns="0" rIns="0" tIns="0" bIns="0">
+          <a:bodyPr wrap="square" lIns="0" tIns="0" rIns="0" bIns="0" anchor="t">
             <a:spAutoFit/>
           </a:bodyPr>
           <a:lstStyle/>
@@ -3282,7 +3287,7 @@
           <a:noFill/>
         </p:spPr>
         <p:txBody>
-          <a:bodyPr wrap="square" anchor="t" lIns="0" rIns="0" tIns="0" bIns="0">
+          <a:bodyPr wrap="square" lIns="0" tIns="0" rIns="0" bIns="0" anchor="t">
             <a:spAutoFit/>
           </a:bodyPr>
           <a:lstStyle/>
@@ -3348,10 +3353,11 @@
           </a:fontRef>
         </p:style>
         <p:txBody>
-          <a:bodyPr rtlCol="0" anchor="ctr" wrap="none"/>
+          <a:bodyPr wrap="none" rtlCol="0" anchor="ctr"/>
           <a:lstStyle/>
           <a:p>
             <a:pPr algn="ctr"/>
+            <a:endParaRPr/>
           </a:p>
         </p:txBody>
       </p:sp>
@@ -3394,10 +3400,11 @@
           </a:fontRef>
         </p:style>
         <p:txBody>
-          <a:bodyPr rtlCol="0" anchor="ctr" wrap="none"/>
+          <a:bodyPr wrap="none" rtlCol="0" anchor="ctr"/>
           <a:lstStyle/>
           <a:p>
             <a:pPr algn="ctr"/>
+            <a:endParaRPr/>
           </a:p>
         </p:txBody>
       </p:sp>
@@ -3438,10 +3445,11 @@
           </a:fontRef>
         </p:style>
         <p:txBody>
-          <a:bodyPr rtlCol="0" anchor="ctr" wrap="none"/>
+          <a:bodyPr wrap="none" rtlCol="0" anchor="ctr"/>
           <a:lstStyle/>
           <a:p>
             <a:pPr algn="ctr"/>
+            <a:endParaRPr/>
           </a:p>
         </p:txBody>
       </p:sp>
@@ -3462,7 +3470,7 @@
           <a:noFill/>
         </p:spPr>
         <p:txBody>
-          <a:bodyPr wrap="square" anchor="ctr" lIns="0" rIns="0" tIns="0" bIns="0">
+          <a:bodyPr wrap="square" lIns="0" tIns="0" rIns="0" bIns="0" anchor="ctr">
             <a:spAutoFit/>
           </a:bodyPr>
           <a:lstStyle/>
@@ -6226,6 +6234,7 @@
           <a:lstStyle/>
           <a:p>
             <a:pPr algn="ctr"/>
+            <a:endParaRPr/>
           </a:p>
         </p:txBody>
       </p:sp>
@@ -6272,6 +6281,7 @@
           <a:lstStyle/>
           <a:p>
             <a:pPr algn="ctr"/>
+            <a:endParaRPr/>
           </a:p>
         </p:txBody>
       </p:sp>
@@ -6318,6 +6328,7 @@
           <a:lstStyle/>
           <a:p>
             <a:pPr algn="ctr"/>
+            <a:endParaRPr/>
           </a:p>
         </p:txBody>
       </p:sp>
@@ -6364,6 +6375,7 @@
           <a:lstStyle/>
           <a:p>
             <a:pPr algn="ctr"/>
+            <a:endParaRPr/>
           </a:p>
         </p:txBody>
       </p:sp>
@@ -6410,6 +6422,7 @@
           <a:lstStyle/>
           <a:p>
             <a:pPr algn="ctr"/>
+            <a:endParaRPr/>
           </a:p>
         </p:txBody>
       </p:sp>
@@ -6456,6 +6469,7 @@
           <a:lstStyle/>
           <a:p>
             <a:pPr algn="ctr"/>
+            <a:endParaRPr/>
           </a:p>
         </p:txBody>
       </p:sp>
@@ -6502,6 +6516,7 @@
           <a:lstStyle/>
           <a:p>
             <a:pPr algn="ctr"/>
+            <a:endParaRPr/>
           </a:p>
         </p:txBody>
       </p:sp>
@@ -6548,6 +6563,7 @@
           <a:lstStyle/>
           <a:p>
             <a:pPr algn="ctr"/>
+            <a:endParaRPr/>
           </a:p>
         </p:txBody>
       </p:sp>
@@ -6594,6 +6610,7 @@
           <a:lstStyle/>
           <a:p>
             <a:pPr algn="ctr"/>
+            <a:endParaRPr/>
           </a:p>
         </p:txBody>
       </p:sp>
@@ -6640,6 +6657,7 @@
           <a:lstStyle/>
           <a:p>
             <a:pPr algn="ctr"/>
+            <a:endParaRPr/>
           </a:p>
         </p:txBody>
       </p:sp>
@@ -6686,6 +6704,7 @@
           <a:lstStyle/>
           <a:p>
             <a:pPr algn="ctr"/>
+            <a:endParaRPr/>
           </a:p>
         </p:txBody>
       </p:sp>
@@ -6732,6 +6751,7 @@
           <a:lstStyle/>
           <a:p>
             <a:pPr algn="ctr"/>
+            <a:endParaRPr/>
           </a:p>
         </p:txBody>
       </p:sp>
@@ -6778,6 +6798,7 @@
           <a:lstStyle/>
           <a:p>
             <a:pPr algn="ctr"/>
+            <a:endParaRPr/>
           </a:p>
         </p:txBody>
       </p:sp>
@@ -6824,6 +6845,7 @@
           <a:lstStyle/>
           <a:p>
             <a:pPr algn="ctr"/>
+            <a:endParaRPr/>
           </a:p>
         </p:txBody>
       </p:sp>
@@ -6870,6 +6892,7 @@
           <a:lstStyle/>
           <a:p>
             <a:pPr algn="ctr"/>
+            <a:endParaRPr/>
           </a:p>
         </p:txBody>
       </p:sp>
@@ -6916,6 +6939,7 @@
           <a:lstStyle/>
           <a:p>
             <a:pPr algn="ctr"/>
+            <a:endParaRPr/>
           </a:p>
         </p:txBody>
       </p:sp>
@@ -6962,6 +6986,7 @@
           <a:lstStyle/>
           <a:p>
             <a:pPr algn="ctr"/>
+            <a:endParaRPr/>
           </a:p>
         </p:txBody>
       </p:sp>
@@ -7008,6 +7033,7 @@
           <a:lstStyle/>
           <a:p>
             <a:pPr algn="ctr"/>
+            <a:endParaRPr/>
           </a:p>
         </p:txBody>
       </p:sp>
@@ -7054,6 +7080,7 @@
           <a:lstStyle/>
           <a:p>
             <a:pPr algn="ctr"/>
+            <a:endParaRPr/>
           </a:p>
         </p:txBody>
       </p:sp>
@@ -7100,6 +7127,7 @@
           <a:lstStyle/>
           <a:p>
             <a:pPr algn="ctr"/>
+            <a:endParaRPr/>
           </a:p>
         </p:txBody>
       </p:sp>
@@ -7216,6 +7244,7 @@
           <a:lstStyle/>
           <a:p>
             <a:pPr algn="ctr"/>
+            <a:endParaRPr/>
           </a:p>
         </p:txBody>
       </p:sp>
@@ -7332,6 +7361,7 @@
           <a:lstStyle/>
           <a:p>
             <a:pPr algn="ctr"/>
+            <a:endParaRPr/>
           </a:p>
         </p:txBody>
       </p:sp>
@@ -7378,6 +7408,7 @@
           <a:lstStyle/>
           <a:p>
             <a:pPr algn="ctr"/>
+            <a:endParaRPr/>
           </a:p>
         </p:txBody>
       </p:sp>
@@ -7424,6 +7455,7 @@
           <a:lstStyle/>
           <a:p>
             <a:pPr algn="ctr"/>
+            <a:endParaRPr/>
           </a:p>
         </p:txBody>
       </p:sp>
@@ -7470,6 +7502,7 @@
           <a:lstStyle/>
           <a:p>
             <a:pPr algn="ctr"/>
+            <a:endParaRPr/>
           </a:p>
         </p:txBody>
       </p:sp>
@@ -7516,6 +7549,7 @@
           <a:lstStyle/>
           <a:p>
             <a:pPr algn="ctr"/>
+            <a:endParaRPr/>
           </a:p>
         </p:txBody>
       </p:sp>
@@ -7562,6 +7596,7 @@
           <a:lstStyle/>
           <a:p>
             <a:pPr algn="ctr"/>
+            <a:endParaRPr/>
           </a:p>
         </p:txBody>
       </p:sp>
@@ -7608,6 +7643,7 @@
           <a:lstStyle/>
           <a:p>
             <a:pPr algn="ctr"/>
+            <a:endParaRPr/>
           </a:p>
         </p:txBody>
       </p:sp>
@@ -7654,6 +7690,7 @@
           <a:lstStyle/>
           <a:p>
             <a:pPr algn="ctr"/>
+            <a:endParaRPr/>
           </a:p>
         </p:txBody>
       </p:sp>
@@ -7700,6 +7737,7 @@
           <a:lstStyle/>
           <a:p>
             <a:pPr algn="ctr"/>
+            <a:endParaRPr/>
           </a:p>
         </p:txBody>
       </p:sp>
@@ -7746,6 +7784,7 @@
           <a:lstStyle/>
           <a:p>
             <a:pPr algn="ctr"/>
+            <a:endParaRPr/>
           </a:p>
         </p:txBody>
       </p:sp>
@@ -7792,6 +7831,7 @@
           <a:lstStyle/>
           <a:p>
             <a:pPr algn="ctr"/>
+            <a:endParaRPr/>
           </a:p>
         </p:txBody>
       </p:sp>
@@ -7838,6 +7878,7 @@
           <a:lstStyle/>
           <a:p>
             <a:pPr algn="ctr"/>
+            <a:endParaRPr/>
           </a:p>
         </p:txBody>
       </p:sp>
@@ -7884,6 +7925,7 @@
           <a:lstStyle/>
           <a:p>
             <a:pPr algn="ctr"/>
+            <a:endParaRPr/>
           </a:p>
         </p:txBody>
       </p:sp>
@@ -7930,6 +7972,7 @@
           <a:lstStyle/>
           <a:p>
             <a:pPr algn="ctr"/>
+            <a:endParaRPr/>
           </a:p>
         </p:txBody>
       </p:sp>
@@ -7976,6 +8019,7 @@
           <a:lstStyle/>
           <a:p>
             <a:pPr algn="ctr"/>
+            <a:endParaRPr/>
           </a:p>
         </p:txBody>
       </p:sp>
@@ -8022,6 +8066,7 @@
           <a:lstStyle/>
           <a:p>
             <a:pPr algn="ctr"/>
+            <a:endParaRPr/>
           </a:p>
         </p:txBody>
       </p:sp>
@@ -8068,6 +8113,7 @@
           <a:lstStyle/>
           <a:p>
             <a:pPr algn="ctr"/>
+            <a:endParaRPr/>
           </a:p>
         </p:txBody>
       </p:sp>
@@ -8114,6 +8160,7 @@
           <a:lstStyle/>
           <a:p>
             <a:pPr algn="ctr"/>
+            <a:endParaRPr/>
           </a:p>
         </p:txBody>
       </p:sp>
@@ -8160,6 +8207,7 @@
           <a:lstStyle/>
           <a:p>
             <a:pPr algn="ctr"/>
+            <a:endParaRPr/>
           </a:p>
         </p:txBody>
       </p:sp>
@@ -8206,6 +8254,7 @@
           <a:lstStyle/>
           <a:p>
             <a:pPr algn="ctr"/>
+            <a:endParaRPr/>
           </a:p>
         </p:txBody>
       </p:sp>
@@ -8252,6 +8301,7 @@
           <a:lstStyle/>
           <a:p>
             <a:pPr algn="ctr"/>
+            <a:endParaRPr/>
           </a:p>
         </p:txBody>
       </p:sp>
@@ -8298,6 +8348,7 @@
           <a:lstStyle/>
           <a:p>
             <a:pPr algn="ctr"/>
+            <a:endParaRPr/>
           </a:p>
         </p:txBody>
       </p:sp>
@@ -8344,6 +8395,7 @@
           <a:lstStyle/>
           <a:p>
             <a:pPr algn="ctr"/>
+            <a:endParaRPr/>
           </a:p>
         </p:txBody>
       </p:sp>
@@ -8390,6 +8442,7 @@
           <a:lstStyle/>
           <a:p>
             <a:pPr algn="ctr"/>
+            <a:endParaRPr/>
           </a:p>
         </p:txBody>
       </p:sp>
@@ -8436,6 +8489,7 @@
           <a:lstStyle/>
           <a:p>
             <a:pPr algn="ctr"/>
+            <a:endParaRPr/>
           </a:p>
         </p:txBody>
       </p:sp>
@@ -8482,6 +8536,7 @@
           <a:lstStyle/>
           <a:p>
             <a:pPr algn="ctr"/>
+            <a:endParaRPr/>
           </a:p>
         </p:txBody>
       </p:sp>
@@ -8528,6 +8583,7 @@
           <a:lstStyle/>
           <a:p>
             <a:pPr algn="ctr"/>
+            <a:endParaRPr/>
           </a:p>
         </p:txBody>
       </p:sp>
@@ -8572,6 +8628,7 @@
           <a:lstStyle/>
           <a:p>
             <a:pPr algn="ctr"/>
+            <a:endParaRPr/>
           </a:p>
         </p:txBody>
       </p:sp>
@@ -8592,7 +8649,7 @@
           <a:noFill/>
         </p:spPr>
         <p:txBody>
-          <a:bodyPr wrap="square" anchor="t" lIns="0" rIns="0" tIns="0" bIns="0">
+          <a:bodyPr wrap="square" lIns="0" tIns="0" rIns="0" bIns="0" anchor="t">
             <a:spAutoFit/>
           </a:bodyPr>
           <a:lstStyle/>
@@ -8634,7 +8691,7 @@
           <a:noFill/>
         </p:spPr>
         <p:txBody>
-          <a:bodyPr wrap="square" anchor="t" lIns="0" rIns="0" tIns="0" bIns="0">
+          <a:bodyPr wrap="square" lIns="0" tIns="0" rIns="0" bIns="0" anchor="t">
             <a:spAutoFit/>
           </a:bodyPr>
           <a:lstStyle/>
@@ -8695,7 +8752,7 @@
           <a:noFill/>
         </p:spPr>
         <p:txBody>
-          <a:bodyPr wrap="square" anchor="t" lIns="0" rIns="0" tIns="0" bIns="0">
+          <a:bodyPr wrap="square" lIns="0" tIns="0" rIns="0" bIns="0" anchor="t">
             <a:spAutoFit/>
           </a:bodyPr>
           <a:lstStyle/>
@@ -8894,10 +8951,11 @@
           </a:fontRef>
         </p:style>
         <p:txBody>
-          <a:bodyPr rtlCol="0" anchor="ctr" wrap="none"/>
+          <a:bodyPr wrap="none" rtlCol="0" anchor="ctr"/>
           <a:lstStyle/>
           <a:p>
             <a:pPr algn="ctr"/>
+            <a:endParaRPr/>
           </a:p>
         </p:txBody>
       </p:sp>
@@ -8940,10 +8998,11 @@
           </a:fontRef>
         </p:style>
         <p:txBody>
-          <a:bodyPr rtlCol="0" anchor="ctr" wrap="none"/>
+          <a:bodyPr wrap="none" rtlCol="0" anchor="ctr"/>
           <a:lstStyle/>
           <a:p>
             <a:pPr algn="ctr"/>
+            <a:endParaRPr/>
           </a:p>
         </p:txBody>
       </p:sp>
@@ -8984,10 +9043,11 @@
           </a:fontRef>
         </p:style>
         <p:txBody>
-          <a:bodyPr rtlCol="0" anchor="ctr" wrap="none"/>
+          <a:bodyPr wrap="none" rtlCol="0" anchor="ctr"/>
           <a:lstStyle/>
           <a:p>
             <a:pPr algn="ctr"/>
+            <a:endParaRPr/>
           </a:p>
         </p:txBody>
       </p:sp>
@@ -9008,7 +9068,7 @@
           <a:noFill/>
         </p:spPr>
         <p:txBody>
-          <a:bodyPr wrap="square" anchor="ctr" lIns="0" rIns="0" tIns="0" bIns="0">
+          <a:bodyPr wrap="square" lIns="0" tIns="0" rIns="0" bIns="0" anchor="ctr">
             <a:spAutoFit/>
           </a:bodyPr>
           <a:lstStyle/>
@@ -9922,6 +9982,7 @@
           <a:lstStyle/>
           <a:p>
             <a:pPr algn="ctr"/>
+            <a:endParaRPr/>
           </a:p>
         </p:txBody>
       </p:sp>
@@ -9942,7 +10003,7 @@
           <a:noFill/>
         </p:spPr>
         <p:txBody>
-          <a:bodyPr wrap="square" anchor="t" lIns="0" rIns="0" tIns="0" bIns="0">
+          <a:bodyPr wrap="square" lIns="0" tIns="0" rIns="0" bIns="0" anchor="t">
             <a:spAutoFit/>
           </a:bodyPr>
           <a:lstStyle/>
@@ -10010,6 +10071,7 @@
           <a:lstStyle/>
           <a:p>
             <a:pPr algn="ctr"/>
+            <a:endParaRPr/>
           </a:p>
         </p:txBody>
       </p:sp>
@@ -10030,7 +10092,7 @@
           <a:noFill/>
         </p:spPr>
         <p:txBody>
-          <a:bodyPr wrap="square" anchor="t" lIns="0" rIns="0" tIns="0" bIns="0">
+          <a:bodyPr wrap="square" lIns="0" tIns="0" rIns="0" bIns="0" anchor="t">
             <a:spAutoFit/>
           </a:bodyPr>
           <a:lstStyle/>
@@ -10098,6 +10160,7 @@
           <a:lstStyle/>
           <a:p>
             <a:pPr algn="ctr"/>
+            <a:endParaRPr/>
           </a:p>
         </p:txBody>
       </p:sp>
@@ -10118,7 +10181,7 @@
           <a:noFill/>
         </p:spPr>
         <p:txBody>
-          <a:bodyPr wrap="square" anchor="t" lIns="0" rIns="0" tIns="0" bIns="0">
+          <a:bodyPr wrap="square" lIns="0" tIns="0" rIns="0" bIns="0" anchor="t">
             <a:spAutoFit/>
           </a:bodyPr>
           <a:lstStyle/>
@@ -10186,6 +10249,7 @@
           <a:lstStyle/>
           <a:p>
             <a:pPr algn="ctr"/>
+            <a:endParaRPr/>
           </a:p>
         </p:txBody>
       </p:sp>
@@ -10206,7 +10270,7 @@
           <a:noFill/>
         </p:spPr>
         <p:txBody>
-          <a:bodyPr wrap="square" anchor="t" lIns="0" rIns="0" tIns="0" bIns="0">
+          <a:bodyPr wrap="square" lIns="0" tIns="0" rIns="0" bIns="0" anchor="t">
             <a:spAutoFit/>
           </a:bodyPr>
           <a:lstStyle/>
@@ -10274,6 +10338,7 @@
           <a:lstStyle/>
           <a:p>
             <a:pPr algn="ctr"/>
+            <a:endParaRPr/>
           </a:p>
         </p:txBody>
       </p:sp>
@@ -10294,7 +10359,7 @@
           <a:noFill/>
         </p:spPr>
         <p:txBody>
-          <a:bodyPr wrap="square" anchor="t" lIns="0" rIns="0" tIns="0" bIns="0">
+          <a:bodyPr wrap="square" lIns="0" tIns="0" rIns="0" bIns="0" anchor="t">
             <a:spAutoFit/>
           </a:bodyPr>
           <a:lstStyle/>
@@ -10362,6 +10427,7 @@
           <a:lstStyle/>
           <a:p>
             <a:pPr algn="ctr"/>
+            <a:endParaRPr/>
           </a:p>
         </p:txBody>
       </p:sp>
@@ -10382,7 +10448,7 @@
           <a:noFill/>
         </p:spPr>
         <p:txBody>
-          <a:bodyPr wrap="square" anchor="t" lIns="0" rIns="0" tIns="0" bIns="0">
+          <a:bodyPr wrap="square" lIns="0" tIns="0" rIns="0" bIns="0" anchor="t">
             <a:spAutoFit/>
           </a:bodyPr>
           <a:lstStyle/>
@@ -10450,6 +10516,7 @@
           <a:lstStyle/>
           <a:p>
             <a:pPr algn="ctr"/>
+            <a:endParaRPr/>
           </a:p>
         </p:txBody>
       </p:sp>
@@ -10470,7 +10537,7 @@
           <a:noFill/>
         </p:spPr>
         <p:txBody>
-          <a:bodyPr wrap="square" anchor="t" lIns="0" rIns="0" tIns="0" bIns="0">
+          <a:bodyPr wrap="square" lIns="0" tIns="0" rIns="0" bIns="0" anchor="t">
             <a:spAutoFit/>
           </a:bodyPr>
           <a:lstStyle/>
@@ -10538,6 +10605,7 @@
           <a:lstStyle/>
           <a:p>
             <a:pPr algn="ctr"/>
+            <a:endParaRPr/>
           </a:p>
         </p:txBody>
       </p:sp>
@@ -10558,7 +10626,7 @@
           <a:noFill/>
         </p:spPr>
         <p:txBody>
-          <a:bodyPr wrap="square" anchor="t" lIns="0" rIns="0" tIns="0" bIns="0">
+          <a:bodyPr wrap="square" lIns="0" tIns="0" rIns="0" bIns="0" anchor="t">
             <a:spAutoFit/>
           </a:bodyPr>
           <a:lstStyle/>
@@ -10626,6 +10694,7 @@
           <a:lstStyle/>
           <a:p>
             <a:pPr algn="ctr"/>
+            <a:endParaRPr/>
           </a:p>
         </p:txBody>
       </p:sp>
@@ -10646,7 +10715,7 @@
           <a:noFill/>
         </p:spPr>
         <p:txBody>
-          <a:bodyPr wrap="square" anchor="t" lIns="0" rIns="0" tIns="0" bIns="0">
+          <a:bodyPr wrap="square" lIns="0" tIns="0" rIns="0" bIns="0" anchor="t">
             <a:spAutoFit/>
           </a:bodyPr>
           <a:lstStyle/>
@@ -10714,6 +10783,7 @@
           <a:lstStyle/>
           <a:p>
             <a:pPr algn="ctr"/>
+            <a:endParaRPr/>
           </a:p>
         </p:txBody>
       </p:sp>
@@ -10734,7 +10804,7 @@
           <a:noFill/>
         </p:spPr>
         <p:txBody>
-          <a:bodyPr wrap="square" anchor="t" lIns="0" rIns="0" tIns="0" bIns="0">
+          <a:bodyPr wrap="square" lIns="0" tIns="0" rIns="0" bIns="0" anchor="t">
             <a:spAutoFit/>
           </a:bodyPr>
           <a:lstStyle/>
@@ -10802,6 +10872,7 @@
           <a:lstStyle/>
           <a:p>
             <a:pPr algn="ctr"/>
+            <a:endParaRPr/>
           </a:p>
         </p:txBody>
       </p:sp>
@@ -10822,7 +10893,7 @@
           <a:noFill/>
         </p:spPr>
         <p:txBody>
-          <a:bodyPr wrap="square" anchor="t" lIns="0" rIns="0" tIns="0" bIns="0">
+          <a:bodyPr wrap="square" lIns="0" tIns="0" rIns="0" bIns="0" anchor="t">
             <a:spAutoFit/>
           </a:bodyPr>
           <a:lstStyle/>
@@ -10890,6 +10961,7 @@
           <a:lstStyle/>
           <a:p>
             <a:pPr algn="ctr"/>
+            <a:endParaRPr/>
           </a:p>
         </p:txBody>
       </p:sp>
@@ -10910,7 +10982,7 @@
           <a:noFill/>
         </p:spPr>
         <p:txBody>
-          <a:bodyPr wrap="square" anchor="t" lIns="0" rIns="0" tIns="0" bIns="0">
+          <a:bodyPr wrap="square" lIns="0" tIns="0" rIns="0" bIns="0" anchor="t">
             <a:spAutoFit/>
           </a:bodyPr>
           <a:lstStyle/>
@@ -10976,6 +11048,7 @@
           <a:lstStyle/>
           <a:p>
             <a:pPr algn="ctr"/>
+            <a:endParaRPr/>
           </a:p>
         </p:txBody>
       </p:sp>
@@ -10996,7 +11069,7 @@
           <a:noFill/>
         </p:spPr>
         <p:txBody>
-          <a:bodyPr wrap="square" anchor="t" lIns="0" rIns="0" tIns="0" bIns="0">
+          <a:bodyPr wrap="square" lIns="0" tIns="0" rIns="0" bIns="0" anchor="t">
             <a:spAutoFit/>
           </a:bodyPr>
           <a:lstStyle/>
@@ -11038,7 +11111,7 @@
           <a:noFill/>
         </p:spPr>
         <p:txBody>
-          <a:bodyPr wrap="square" anchor="t" lIns="0" rIns="0" tIns="0" bIns="0">
+          <a:bodyPr wrap="square" lIns="0" tIns="0" rIns="0" bIns="0" anchor="t">
             <a:spAutoFit/>
           </a:bodyPr>
           <a:lstStyle/>
@@ -11080,7 +11153,7 @@
           <a:noFill/>
         </p:spPr>
         <p:txBody>
-          <a:bodyPr wrap="square" anchor="t" lIns="0" rIns="0" tIns="0" bIns="0">
+          <a:bodyPr wrap="square" lIns="0" tIns="0" rIns="0" bIns="0" anchor="t">
             <a:spAutoFit/>
           </a:bodyPr>
           <a:lstStyle/>
@@ -11122,7 +11195,7 @@
           <a:noFill/>
         </p:spPr>
         <p:txBody>
-          <a:bodyPr wrap="square" anchor="t" lIns="0" rIns="0" tIns="0" bIns="0">
+          <a:bodyPr wrap="square" lIns="0" tIns="0" rIns="0" bIns="0" anchor="t">
             <a:spAutoFit/>
           </a:bodyPr>
           <a:lstStyle/>
@@ -11164,7 +11237,7 @@
           <a:noFill/>
         </p:spPr>
         <p:txBody>
-          <a:bodyPr wrap="square" anchor="t" lIns="0" rIns="0" tIns="0" bIns="0">
+          <a:bodyPr wrap="square" lIns="0" tIns="0" rIns="0" bIns="0" anchor="t">
             <a:spAutoFit/>
           </a:bodyPr>
           <a:lstStyle/>
@@ -11206,7 +11279,7 @@
           <a:noFill/>
         </p:spPr>
         <p:txBody>
-          <a:bodyPr wrap="square" anchor="t" lIns="0" rIns="0" tIns="0" bIns="0">
+          <a:bodyPr wrap="square" lIns="0" tIns="0" rIns="0" bIns="0" anchor="t">
             <a:spAutoFit/>
           </a:bodyPr>
           <a:lstStyle/>
@@ -11267,7 +11340,7 @@
           <a:noFill/>
         </p:spPr>
         <p:txBody>
-          <a:bodyPr wrap="square" anchor="t" lIns="0" rIns="0" tIns="0" bIns="0">
+          <a:bodyPr wrap="square" lIns="0" tIns="0" rIns="0" bIns="0" anchor="t">
             <a:spAutoFit/>
           </a:bodyPr>
           <a:lstStyle/>
@@ -11428,10 +11501,11 @@
           </a:fontRef>
         </p:style>
         <p:txBody>
-          <a:bodyPr rtlCol="0" anchor="ctr" wrap="none"/>
+          <a:bodyPr wrap="none" rtlCol="0" anchor="ctr"/>
           <a:lstStyle/>
           <a:p>
             <a:pPr algn="ctr"/>
+            <a:endParaRPr/>
           </a:p>
         </p:txBody>
       </p:sp>
@@ -11474,10 +11548,11 @@
           </a:fontRef>
         </p:style>
         <p:txBody>
-          <a:bodyPr rtlCol="0" anchor="ctr" wrap="none"/>
+          <a:bodyPr wrap="none" rtlCol="0" anchor="ctr"/>
           <a:lstStyle/>
           <a:p>
             <a:pPr algn="ctr"/>
+            <a:endParaRPr/>
           </a:p>
         </p:txBody>
       </p:sp>
@@ -11518,10 +11593,11 @@
           </a:fontRef>
         </p:style>
         <p:txBody>
-          <a:bodyPr rtlCol="0" anchor="ctr" wrap="none"/>
+          <a:bodyPr wrap="none" rtlCol="0" anchor="ctr"/>
           <a:lstStyle/>
           <a:p>
             <a:pPr algn="ctr"/>
+            <a:endParaRPr/>
           </a:p>
         </p:txBody>
       </p:sp>
@@ -11542,7 +11618,7 @@
           <a:noFill/>
         </p:spPr>
         <p:txBody>
-          <a:bodyPr wrap="square" anchor="ctr" lIns="0" rIns="0" tIns="0" bIns="0">
+          <a:bodyPr wrap="square" lIns="0" tIns="0" rIns="0" bIns="0" anchor="ctr">
             <a:spAutoFit/>
           </a:bodyPr>
           <a:lstStyle/>
@@ -14198,6 +14274,7 @@
           <a:lstStyle/>
           <a:p>
             <a:pPr algn="ctr"/>
+            <a:endParaRPr/>
           </a:p>
         </p:txBody>
       </p:sp>
@@ -14242,6 +14319,7 @@
           <a:lstStyle/>
           <a:p>
             <a:pPr algn="ctr"/>
+            <a:endParaRPr/>
           </a:p>
         </p:txBody>
       </p:sp>
@@ -14286,6 +14364,7 @@
           <a:lstStyle/>
           <a:p>
             <a:pPr algn="ctr"/>
+            <a:endParaRPr/>
           </a:p>
         </p:txBody>
       </p:sp>
@@ -14330,6 +14409,7 @@
           <a:lstStyle/>
           <a:p>
             <a:pPr algn="ctr"/>
+            <a:endParaRPr/>
           </a:p>
         </p:txBody>
       </p:sp>
@@ -14374,6 +14454,7 @@
           <a:lstStyle/>
           <a:p>
             <a:pPr algn="ctr"/>
+            <a:endParaRPr/>
           </a:p>
         </p:txBody>
       </p:sp>
@@ -14418,6 +14499,7 @@
           <a:lstStyle/>
           <a:p>
             <a:pPr algn="ctr"/>
+            <a:endParaRPr/>
           </a:p>
         </p:txBody>
       </p:sp>
@@ -14462,6 +14544,7 @@
           <a:lstStyle/>
           <a:p>
             <a:pPr algn="ctr"/>
+            <a:endParaRPr/>
           </a:p>
         </p:txBody>
       </p:sp>
@@ -14506,6 +14589,7 @@
           <a:lstStyle/>
           <a:p>
             <a:pPr algn="ctr"/>
+            <a:endParaRPr/>
           </a:p>
         </p:txBody>
       </p:sp>
@@ -14550,6 +14634,7 @@
           <a:lstStyle/>
           <a:p>
             <a:pPr algn="ctr"/>
+            <a:endParaRPr/>
           </a:p>
         </p:txBody>
       </p:sp>
@@ -14594,6 +14679,7 @@
           <a:lstStyle/>
           <a:p>
             <a:pPr algn="ctr"/>
+            <a:endParaRPr/>
           </a:p>
         </p:txBody>
       </p:sp>
@@ -14638,6 +14724,7 @@
           <a:lstStyle/>
           <a:p>
             <a:pPr algn="ctr"/>
+            <a:endParaRPr/>
           </a:p>
         </p:txBody>
       </p:sp>
@@ -14682,6 +14769,7 @@
           <a:lstStyle/>
           <a:p>
             <a:pPr algn="ctr"/>
+            <a:endParaRPr/>
           </a:p>
         </p:txBody>
       </p:sp>
@@ -14726,6 +14814,7 @@
           <a:lstStyle/>
           <a:p>
             <a:pPr algn="ctr"/>
+            <a:endParaRPr/>
           </a:p>
         </p:txBody>
       </p:sp>
@@ -14770,6 +14859,7 @@
           <a:lstStyle/>
           <a:p>
             <a:pPr algn="ctr"/>
+            <a:endParaRPr/>
           </a:p>
         </p:txBody>
       </p:sp>
@@ -14814,6 +14904,7 @@
           <a:lstStyle/>
           <a:p>
             <a:pPr algn="ctr"/>
+            <a:endParaRPr/>
           </a:p>
         </p:txBody>
       </p:sp>
@@ -14858,6 +14949,7 @@
           <a:lstStyle/>
           <a:p>
             <a:pPr algn="ctr"/>
+            <a:endParaRPr/>
           </a:p>
         </p:txBody>
       </p:sp>
@@ -14902,6 +14994,7 @@
           <a:lstStyle/>
           <a:p>
             <a:pPr algn="ctr"/>
+            <a:endParaRPr/>
           </a:p>
         </p:txBody>
       </p:sp>
@@ -14946,6 +15039,7 @@
           <a:lstStyle/>
           <a:p>
             <a:pPr algn="ctr"/>
+            <a:endParaRPr/>
           </a:p>
         </p:txBody>
       </p:sp>
@@ -14990,6 +15084,7 @@
           <a:lstStyle/>
           <a:p>
             <a:pPr algn="ctr"/>
+            <a:endParaRPr/>
           </a:p>
         </p:txBody>
       </p:sp>
@@ -15034,6 +15129,7 @@
           <a:lstStyle/>
           <a:p>
             <a:pPr algn="ctr"/>
+            <a:endParaRPr/>
           </a:p>
         </p:txBody>
       </p:sp>
@@ -15078,6 +15174,7 @@
           <a:lstStyle/>
           <a:p>
             <a:pPr algn="ctr"/>
+            <a:endParaRPr/>
           </a:p>
         </p:txBody>
       </p:sp>
@@ -15122,6 +15219,7 @@
           <a:lstStyle/>
           <a:p>
             <a:pPr algn="ctr"/>
+            <a:endParaRPr/>
           </a:p>
         </p:txBody>
       </p:sp>
@@ -15166,6 +15264,7 @@
           <a:lstStyle/>
           <a:p>
             <a:pPr algn="ctr"/>
+            <a:endParaRPr/>
           </a:p>
         </p:txBody>
       </p:sp>
@@ -15210,6 +15309,7 @@
           <a:lstStyle/>
           <a:p>
             <a:pPr algn="ctr"/>
+            <a:endParaRPr/>
           </a:p>
         </p:txBody>
       </p:sp>
@@ -15254,6 +15354,7 @@
           <a:lstStyle/>
           <a:p>
             <a:pPr algn="ctr"/>
+            <a:endParaRPr/>
           </a:p>
         </p:txBody>
       </p:sp>
@@ -15298,6 +15399,7 @@
           <a:lstStyle/>
           <a:p>
             <a:pPr algn="ctr"/>
+            <a:endParaRPr/>
           </a:p>
         </p:txBody>
       </p:sp>
@@ -15342,6 +15444,7 @@
           <a:lstStyle/>
           <a:p>
             <a:pPr algn="ctr"/>
+            <a:endParaRPr/>
           </a:p>
         </p:txBody>
       </p:sp>
@@ -15386,6 +15489,7 @@
           <a:lstStyle/>
           <a:p>
             <a:pPr algn="ctr"/>
+            <a:endParaRPr/>
           </a:p>
         </p:txBody>
       </p:sp>
@@ -15430,6 +15534,7 @@
           <a:lstStyle/>
           <a:p>
             <a:pPr algn="ctr"/>
+            <a:endParaRPr/>
           </a:p>
         </p:txBody>
       </p:sp>
@@ -15474,6 +15579,7 @@
           <a:lstStyle/>
           <a:p>
             <a:pPr algn="ctr"/>
+            <a:endParaRPr/>
           </a:p>
         </p:txBody>
       </p:sp>
@@ -15518,6 +15624,7 @@
           <a:lstStyle/>
           <a:p>
             <a:pPr algn="ctr"/>
+            <a:endParaRPr/>
           </a:p>
         </p:txBody>
       </p:sp>
@@ -15562,6 +15669,7 @@
           <a:lstStyle/>
           <a:p>
             <a:pPr algn="ctr"/>
+            <a:endParaRPr/>
           </a:p>
         </p:txBody>
       </p:sp>
@@ -15606,6 +15714,7 @@
           <a:lstStyle/>
           <a:p>
             <a:pPr algn="ctr"/>
+            <a:endParaRPr/>
           </a:p>
         </p:txBody>
       </p:sp>
@@ -15650,6 +15759,7 @@
           <a:lstStyle/>
           <a:p>
             <a:pPr algn="ctr"/>
+            <a:endParaRPr/>
           </a:p>
         </p:txBody>
       </p:sp>
@@ -15694,6 +15804,7 @@
           <a:lstStyle/>
           <a:p>
             <a:pPr algn="ctr"/>
+            <a:endParaRPr/>
           </a:p>
         </p:txBody>
       </p:sp>
@@ -15738,6 +15849,7 @@
           <a:lstStyle/>
           <a:p>
             <a:pPr algn="ctr"/>
+            <a:endParaRPr/>
           </a:p>
         </p:txBody>
       </p:sp>
@@ -15782,6 +15894,7 @@
           <a:lstStyle/>
           <a:p>
             <a:pPr algn="ctr"/>
+            <a:endParaRPr/>
           </a:p>
         </p:txBody>
       </p:sp>
@@ -15826,6 +15939,7 @@
           <a:lstStyle/>
           <a:p>
             <a:pPr algn="ctr"/>
+            <a:endParaRPr/>
           </a:p>
         </p:txBody>
       </p:sp>
@@ -15870,6 +15984,7 @@
           <a:lstStyle/>
           <a:p>
             <a:pPr algn="ctr"/>
+            <a:endParaRPr/>
           </a:p>
         </p:txBody>
       </p:sp>
@@ -15914,6 +16029,7 @@
           <a:lstStyle/>
           <a:p>
             <a:pPr algn="ctr"/>
+            <a:endParaRPr/>
           </a:p>
         </p:txBody>
       </p:sp>
@@ -15958,6 +16074,7 @@
           <a:lstStyle/>
           <a:p>
             <a:pPr algn="ctr"/>
+            <a:endParaRPr/>
           </a:p>
         </p:txBody>
       </p:sp>
@@ -16002,6 +16119,7 @@
           <a:lstStyle/>
           <a:p>
             <a:pPr algn="ctr"/>
+            <a:endParaRPr/>
           </a:p>
         </p:txBody>
       </p:sp>
@@ -16046,6 +16164,7 @@
           <a:lstStyle/>
           <a:p>
             <a:pPr algn="ctr"/>
+            <a:endParaRPr/>
           </a:p>
         </p:txBody>
       </p:sp>
@@ -16090,6 +16209,7 @@
           <a:lstStyle/>
           <a:p>
             <a:pPr algn="ctr"/>
+            <a:endParaRPr/>
           </a:p>
         </p:txBody>
       </p:sp>
@@ -16134,6 +16254,7 @@
           <a:lstStyle/>
           <a:p>
             <a:pPr algn="ctr"/>
+            <a:endParaRPr/>
           </a:p>
         </p:txBody>
       </p:sp>
@@ -16178,6 +16299,7 @@
           <a:lstStyle/>
           <a:p>
             <a:pPr algn="ctr"/>
+            <a:endParaRPr/>
           </a:p>
         </p:txBody>
       </p:sp>
@@ -16362,6 +16484,7 @@
           <a:lstStyle/>
           <a:p>
             <a:pPr algn="ctr"/>
+            <a:endParaRPr/>
           </a:p>
         </p:txBody>
       </p:sp>
@@ -16382,7 +16505,7 @@
           <a:noFill/>
         </p:spPr>
         <p:txBody>
-          <a:bodyPr wrap="square" anchor="t" lIns="0" rIns="0" tIns="0" bIns="0">
+          <a:bodyPr wrap="square" lIns="0" tIns="0" rIns="0" bIns="0" anchor="t">
             <a:spAutoFit/>
           </a:bodyPr>
           <a:lstStyle/>
@@ -19057,6 +19180,7 @@
           <a:lstStyle/>
           <a:p>
             <a:pPr algn="ctr"/>
+            <a:endParaRPr/>
           </a:p>
         </p:txBody>
       </p:sp>
@@ -19101,6 +19225,7 @@
           <a:lstStyle/>
           <a:p>
             <a:pPr algn="ctr"/>
+            <a:endParaRPr/>
           </a:p>
         </p:txBody>
       </p:sp>
@@ -19145,6 +19270,7 @@
           <a:lstStyle/>
           <a:p>
             <a:pPr algn="ctr"/>
+            <a:endParaRPr/>
           </a:p>
         </p:txBody>
       </p:sp>
@@ -19189,6 +19315,7 @@
           <a:lstStyle/>
           <a:p>
             <a:pPr algn="ctr"/>
+            <a:endParaRPr/>
           </a:p>
         </p:txBody>
       </p:sp>
@@ -19233,6 +19360,7 @@
           <a:lstStyle/>
           <a:p>
             <a:pPr algn="ctr"/>
+            <a:endParaRPr/>
           </a:p>
         </p:txBody>
       </p:sp>
@@ -19277,6 +19405,7 @@
           <a:lstStyle/>
           <a:p>
             <a:pPr algn="ctr"/>
+            <a:endParaRPr/>
           </a:p>
         </p:txBody>
       </p:sp>
@@ -19321,6 +19450,7 @@
           <a:lstStyle/>
           <a:p>
             <a:pPr algn="ctr"/>
+            <a:endParaRPr/>
           </a:p>
         </p:txBody>
       </p:sp>
@@ -19365,6 +19495,7 @@
           <a:lstStyle/>
           <a:p>
             <a:pPr algn="ctr"/>
+            <a:endParaRPr/>
           </a:p>
         </p:txBody>
       </p:sp>
@@ -19409,6 +19540,7 @@
           <a:lstStyle/>
           <a:p>
             <a:pPr algn="ctr"/>
+            <a:endParaRPr/>
           </a:p>
         </p:txBody>
       </p:sp>
@@ -19453,6 +19585,7 @@
           <a:lstStyle/>
           <a:p>
             <a:pPr algn="ctr"/>
+            <a:endParaRPr/>
           </a:p>
         </p:txBody>
       </p:sp>
@@ -19497,6 +19630,7 @@
           <a:lstStyle/>
           <a:p>
             <a:pPr algn="ctr"/>
+            <a:endParaRPr/>
           </a:p>
         </p:txBody>
       </p:sp>
@@ -19541,6 +19675,7 @@
           <a:lstStyle/>
           <a:p>
             <a:pPr algn="ctr"/>
+            <a:endParaRPr/>
           </a:p>
         </p:txBody>
       </p:sp>
@@ -19585,6 +19720,7 @@
           <a:lstStyle/>
           <a:p>
             <a:pPr algn="ctr"/>
+            <a:endParaRPr/>
           </a:p>
         </p:txBody>
       </p:sp>
@@ -19629,6 +19765,7 @@
           <a:lstStyle/>
           <a:p>
             <a:pPr algn="ctr"/>
+            <a:endParaRPr/>
           </a:p>
         </p:txBody>
       </p:sp>
@@ -19673,6 +19810,7 @@
           <a:lstStyle/>
           <a:p>
             <a:pPr algn="ctr"/>
+            <a:endParaRPr/>
           </a:p>
         </p:txBody>
       </p:sp>
@@ -19717,6 +19855,7 @@
           <a:lstStyle/>
           <a:p>
             <a:pPr algn="ctr"/>
+            <a:endParaRPr/>
           </a:p>
         </p:txBody>
       </p:sp>
@@ -19761,6 +19900,7 @@
           <a:lstStyle/>
           <a:p>
             <a:pPr algn="ctr"/>
+            <a:endParaRPr/>
           </a:p>
         </p:txBody>
       </p:sp>
@@ -19805,6 +19945,7 @@
           <a:lstStyle/>
           <a:p>
             <a:pPr algn="ctr"/>
+            <a:endParaRPr/>
           </a:p>
         </p:txBody>
       </p:sp>
@@ -19849,6 +19990,7 @@
           <a:lstStyle/>
           <a:p>
             <a:pPr algn="ctr"/>
+            <a:endParaRPr/>
           </a:p>
         </p:txBody>
       </p:sp>
@@ -19893,6 +20035,7 @@
           <a:lstStyle/>
           <a:p>
             <a:pPr algn="ctr"/>
+            <a:endParaRPr/>
           </a:p>
         </p:txBody>
       </p:sp>
@@ -19937,6 +20080,7 @@
           <a:lstStyle/>
           <a:p>
             <a:pPr algn="ctr"/>
+            <a:endParaRPr/>
           </a:p>
         </p:txBody>
       </p:sp>
@@ -19981,6 +20125,7 @@
           <a:lstStyle/>
           <a:p>
             <a:pPr algn="ctr"/>
+            <a:endParaRPr/>
           </a:p>
         </p:txBody>
       </p:sp>
@@ -20025,6 +20170,7 @@
           <a:lstStyle/>
           <a:p>
             <a:pPr algn="ctr"/>
+            <a:endParaRPr/>
           </a:p>
         </p:txBody>
       </p:sp>
@@ -20069,6 +20215,7 @@
           <a:lstStyle/>
           <a:p>
             <a:pPr algn="ctr"/>
+            <a:endParaRPr/>
           </a:p>
         </p:txBody>
       </p:sp>
@@ -20113,6 +20260,7 @@
           <a:lstStyle/>
           <a:p>
             <a:pPr algn="ctr"/>
+            <a:endParaRPr/>
           </a:p>
         </p:txBody>
       </p:sp>
@@ -20157,6 +20305,7 @@
           <a:lstStyle/>
           <a:p>
             <a:pPr algn="ctr"/>
+            <a:endParaRPr/>
           </a:p>
         </p:txBody>
       </p:sp>
@@ -20201,6 +20350,7 @@
           <a:lstStyle/>
           <a:p>
             <a:pPr algn="ctr"/>
+            <a:endParaRPr/>
           </a:p>
         </p:txBody>
       </p:sp>
@@ -20245,6 +20395,7 @@
           <a:lstStyle/>
           <a:p>
             <a:pPr algn="ctr"/>
+            <a:endParaRPr/>
           </a:p>
         </p:txBody>
       </p:sp>
@@ -20289,6 +20440,7 @@
           <a:lstStyle/>
           <a:p>
             <a:pPr algn="ctr"/>
+            <a:endParaRPr/>
           </a:p>
         </p:txBody>
       </p:sp>
@@ -20333,6 +20485,7 @@
           <a:lstStyle/>
           <a:p>
             <a:pPr algn="ctr"/>
+            <a:endParaRPr/>
           </a:p>
         </p:txBody>
       </p:sp>
@@ -20377,6 +20530,7 @@
           <a:lstStyle/>
           <a:p>
             <a:pPr algn="ctr"/>
+            <a:endParaRPr/>
           </a:p>
         </p:txBody>
       </p:sp>
@@ -20421,6 +20575,7 @@
           <a:lstStyle/>
           <a:p>
             <a:pPr algn="ctr"/>
+            <a:endParaRPr/>
           </a:p>
         </p:txBody>
       </p:sp>
@@ -20465,6 +20620,7 @@
           <a:lstStyle/>
           <a:p>
             <a:pPr algn="ctr"/>
+            <a:endParaRPr/>
           </a:p>
         </p:txBody>
       </p:sp>
@@ -20509,6 +20665,7 @@
           <a:lstStyle/>
           <a:p>
             <a:pPr algn="ctr"/>
+            <a:endParaRPr/>
           </a:p>
         </p:txBody>
       </p:sp>
@@ -20553,6 +20710,7 @@
           <a:lstStyle/>
           <a:p>
             <a:pPr algn="ctr"/>
+            <a:endParaRPr/>
           </a:p>
         </p:txBody>
       </p:sp>
@@ -20597,6 +20755,7 @@
           <a:lstStyle/>
           <a:p>
             <a:pPr algn="ctr"/>
+            <a:endParaRPr/>
           </a:p>
         </p:txBody>
       </p:sp>
@@ -20641,6 +20800,7 @@
           <a:lstStyle/>
           <a:p>
             <a:pPr algn="ctr"/>
+            <a:endParaRPr/>
           </a:p>
         </p:txBody>
       </p:sp>
@@ -20685,6 +20845,7 @@
           <a:lstStyle/>
           <a:p>
             <a:pPr algn="ctr"/>
+            <a:endParaRPr/>
           </a:p>
         </p:txBody>
       </p:sp>
@@ -20729,6 +20890,7 @@
           <a:lstStyle/>
           <a:p>
             <a:pPr algn="ctr"/>
+            <a:endParaRPr/>
           </a:p>
         </p:txBody>
       </p:sp>
@@ -20773,6 +20935,7 @@
           <a:lstStyle/>
           <a:p>
             <a:pPr algn="ctr"/>
+            <a:endParaRPr/>
           </a:p>
         </p:txBody>
       </p:sp>
@@ -20817,6 +20980,7 @@
           <a:lstStyle/>
           <a:p>
             <a:pPr algn="ctr"/>
+            <a:endParaRPr/>
           </a:p>
         </p:txBody>
       </p:sp>
@@ -20861,6 +21025,7 @@
           <a:lstStyle/>
           <a:p>
             <a:pPr algn="ctr"/>
+            <a:endParaRPr/>
           </a:p>
         </p:txBody>
       </p:sp>
@@ -20905,6 +21070,7 @@
           <a:lstStyle/>
           <a:p>
             <a:pPr algn="ctr"/>
+            <a:endParaRPr/>
           </a:p>
         </p:txBody>
       </p:sp>
@@ -20949,6 +21115,7 @@
           <a:lstStyle/>
           <a:p>
             <a:pPr algn="ctr"/>
+            <a:endParaRPr/>
           </a:p>
         </p:txBody>
       </p:sp>
@@ -20993,6 +21160,7 @@
           <a:lstStyle/>
           <a:p>
             <a:pPr algn="ctr"/>
+            <a:endParaRPr/>
           </a:p>
         </p:txBody>
       </p:sp>
@@ -21037,6 +21205,7 @@
           <a:lstStyle/>
           <a:p>
             <a:pPr algn="ctr"/>
+            <a:endParaRPr/>
           </a:p>
         </p:txBody>
       </p:sp>
@@ -21221,6 +21390,7 @@
           <a:lstStyle/>
           <a:p>
             <a:pPr algn="ctr"/>
+            <a:endParaRPr/>
           </a:p>
         </p:txBody>
       </p:sp>
@@ -21241,7 +21411,7 @@
           <a:noFill/>
         </p:spPr>
         <p:txBody>
-          <a:bodyPr wrap="square" anchor="t" lIns="0" rIns="0" tIns="0" bIns="0">
+          <a:bodyPr wrap="square" lIns="0" tIns="0" rIns="0" bIns="0" anchor="t">
             <a:spAutoFit/>
           </a:bodyPr>
           <a:lstStyle/>
@@ -21302,7 +21472,7 @@
           <a:noFill/>
         </p:spPr>
         <p:txBody>
-          <a:bodyPr wrap="square" anchor="t" lIns="0" rIns="0" tIns="0" bIns="0">
+          <a:bodyPr wrap="square" lIns="0" tIns="0" rIns="0" bIns="0" anchor="t">
             <a:spAutoFit/>
           </a:bodyPr>
           <a:lstStyle/>
@@ -21382,7 +21552,7 @@
           <a:noFill/>
         </p:spPr>
         <p:txBody>
-          <a:bodyPr wrap="square" anchor="t" lIns="0" rIns="0" tIns="0" bIns="0">
+          <a:bodyPr wrap="square" lIns="0" tIns="0" rIns="0" bIns="0" anchor="t">
             <a:spAutoFit/>
           </a:bodyPr>
           <a:lstStyle/>
@@ -21486,10 +21656,11 @@
           </a:fontRef>
         </p:style>
         <p:txBody>
-          <a:bodyPr rtlCol="0" anchor="ctr" wrap="none"/>
+          <a:bodyPr wrap="none" rtlCol="0" anchor="ctr"/>
           <a:lstStyle/>
           <a:p>
             <a:pPr algn="ctr"/>
+            <a:endParaRPr/>
           </a:p>
         </p:txBody>
       </p:sp>
@@ -21530,10 +21701,11 @@
           </a:fontRef>
         </p:style>
         <p:txBody>
-          <a:bodyPr rtlCol="0" anchor="ctr" wrap="none"/>
+          <a:bodyPr wrap="none" rtlCol="0" anchor="ctr"/>
           <a:lstStyle/>
           <a:p>
             <a:pPr algn="ctr"/>
+            <a:endParaRPr/>
           </a:p>
         </p:txBody>
       </p:sp>
@@ -21554,7 +21726,7 @@
           <a:noFill/>
         </p:spPr>
         <p:txBody>
-          <a:bodyPr wrap="square" anchor="t" lIns="0" rIns="0" tIns="0" bIns="0">
+          <a:bodyPr wrap="square" lIns="0" tIns="0" rIns="0" bIns="0" anchor="t">
             <a:spAutoFit/>
           </a:bodyPr>
           <a:lstStyle/>
@@ -21615,7 +21787,7 @@
           <a:noFill/>
         </p:spPr>
         <p:txBody>
-          <a:bodyPr wrap="square" anchor="t" lIns="0" rIns="0" tIns="0" bIns="0">
+          <a:bodyPr wrap="square" lIns="0" tIns="0" rIns="0" bIns="0" anchor="t">
             <a:spAutoFit/>
           </a:bodyPr>
           <a:lstStyle/>
@@ -21668,7 +21840,7 @@
 </file>
 
 <file path=ppt/slides/slide2.xml><?xml version="1.0" encoding="utf-8"?>
-<p:sld xmlns:a="http://schemas.openxmlformats.org/drawingml/2006/main" xmlns:p="http://schemas.openxmlformats.org/presentationml/2006/main" xmlns:r="http://schemas.openxmlformats.org/officeDocument/2006/relationships">
+<p:sld xmlns:a="http://schemas.openxmlformats.org/drawingml/2006/main" xmlns:r="http://schemas.openxmlformats.org/officeDocument/2006/relationships" xmlns:p="http://schemas.openxmlformats.org/presentationml/2006/main">
   <p:cSld>
     <p:spTree>
       <p:nvGrpSpPr>
@@ -21676,7 +21848,14 @@
         <p:cNvGrpSpPr/>
         <p:nvPr/>
       </p:nvGrpSpPr>
-      <p:grpSpPr/>
+      <p:grpSpPr>
+        <a:xfrm>
+          <a:off x="0" y="0"/>
+          <a:ext cx="0" cy="0"/>
+          <a:chOff x="0" y="0"/>
+          <a:chExt cx="0" cy="0"/>
+        </a:xfrm>
+      </p:grpSpPr>
       <p:sp>
         <p:nvSpPr>
           <p:cNvPr id="2" name="Rectangle 1"/>
@@ -21714,10 +21893,11 @@
           </a:fontRef>
         </p:style>
         <p:txBody>
-          <a:bodyPr rtlCol="0" anchor="ctr" wrap="none"/>
+          <a:bodyPr wrap="none" rtlCol="0" anchor="ctr"/>
           <a:lstStyle/>
           <a:p>
             <a:pPr algn="ctr"/>
+            <a:endParaRPr/>
           </a:p>
         </p:txBody>
       </p:sp>
@@ -21758,10 +21938,11 @@
           </a:fontRef>
         </p:style>
         <p:txBody>
-          <a:bodyPr rtlCol="0" anchor="ctr" wrap="none"/>
+          <a:bodyPr wrap="none" rtlCol="0" anchor="ctr"/>
           <a:lstStyle/>
           <a:p>
             <a:pPr algn="ctr"/>
+            <a:endParaRPr/>
           </a:p>
         </p:txBody>
       </p:sp>
@@ -21802,10 +21983,11 @@
           </a:fontRef>
         </p:style>
         <p:txBody>
-          <a:bodyPr rtlCol="0" anchor="ctr" wrap="none"/>
+          <a:bodyPr wrap="none" rtlCol="0" anchor="ctr"/>
           <a:lstStyle/>
           <a:p>
             <a:pPr algn="ctr"/>
+            <a:endParaRPr/>
           </a:p>
         </p:txBody>
       </p:sp>
@@ -21826,7 +22008,7 @@
           <a:noFill/>
         </p:spPr>
         <p:txBody>
-          <a:bodyPr wrap="square" anchor="t" lIns="0" rIns="0" tIns="0" bIns="0">
+          <a:bodyPr wrap="square" lIns="0" tIns="0" rIns="0" bIns="0" anchor="t">
             <a:spAutoFit/>
           </a:bodyPr>
           <a:lstStyle/>
@@ -21868,7 +22050,7 @@
           <a:noFill/>
         </p:spPr>
         <p:txBody>
-          <a:bodyPr wrap="square" anchor="t" lIns="0" rIns="0" tIns="0" bIns="0">
+          <a:bodyPr wrap="square" lIns="0" tIns="0" rIns="0" bIns="0" anchor="t">
             <a:spAutoFit/>
           </a:bodyPr>
           <a:lstStyle/>
@@ -21934,10 +22116,11 @@
           </a:fontRef>
         </p:style>
         <p:txBody>
-          <a:bodyPr rtlCol="0" anchor="ctr" wrap="none"/>
+          <a:bodyPr wrap="none" rtlCol="0" anchor="ctr"/>
           <a:lstStyle/>
           <a:p>
             <a:pPr algn="ctr"/>
+            <a:endParaRPr/>
           </a:p>
         </p:txBody>
       </p:sp>
@@ -21980,10 +22163,11 @@
           </a:fontRef>
         </p:style>
         <p:txBody>
-          <a:bodyPr rtlCol="0" anchor="ctr" wrap="none"/>
+          <a:bodyPr wrap="none" rtlCol="0" anchor="ctr"/>
           <a:lstStyle/>
           <a:p>
             <a:pPr algn="ctr"/>
+            <a:endParaRPr/>
           </a:p>
         </p:txBody>
       </p:sp>
@@ -22024,10 +22208,11 @@
           </a:fontRef>
         </p:style>
         <p:txBody>
-          <a:bodyPr rtlCol="0" anchor="ctr" wrap="none"/>
+          <a:bodyPr wrap="none" rtlCol="0" anchor="ctr"/>
           <a:lstStyle/>
           <a:p>
             <a:pPr algn="ctr"/>
+            <a:endParaRPr/>
           </a:p>
         </p:txBody>
       </p:sp>
@@ -22048,7 +22233,7 @@
           <a:noFill/>
         </p:spPr>
         <p:txBody>
-          <a:bodyPr wrap="square" anchor="ctr" lIns="0" rIns="0" tIns="0" bIns="0">
+          <a:bodyPr wrap="square" lIns="0" tIns="0" rIns="0" bIns="0" anchor="ctr">
             <a:spAutoFit/>
           </a:bodyPr>
           <a:lstStyle/>
@@ -22112,10 +22297,11 @@
           </a:fontRef>
         </p:style>
         <p:txBody>
-          <a:bodyPr rtlCol="0" anchor="ctr" wrap="none"/>
+          <a:bodyPr wrap="none" rtlCol="0" anchor="ctr"/>
           <a:lstStyle/>
           <a:p>
             <a:pPr algn="ctr"/>
+            <a:endParaRPr/>
           </a:p>
         </p:txBody>
       </p:sp>
@@ -22136,7 +22322,7 @@
           <a:noFill/>
         </p:spPr>
         <p:txBody>
-          <a:bodyPr wrap="square" anchor="t" lIns="0" rIns="0" tIns="0" bIns="0">
+          <a:bodyPr wrap="square" lIns="0" tIns="0" rIns="0" bIns="0" anchor="t">
             <a:spAutoFit/>
           </a:bodyPr>
           <a:lstStyle/>
@@ -25072,6 +25258,7 @@
           <a:lstStyle/>
           <a:p>
             <a:pPr algn="ctr"/>
+            <a:endParaRPr/>
           </a:p>
         </p:txBody>
       </p:sp>
@@ -25116,6 +25303,7 @@
           <a:lstStyle/>
           <a:p>
             <a:pPr algn="ctr"/>
+            <a:endParaRPr/>
           </a:p>
         </p:txBody>
       </p:sp>
@@ -25160,6 +25348,7 @@
           <a:lstStyle/>
           <a:p>
             <a:pPr algn="ctr"/>
+            <a:endParaRPr/>
           </a:p>
         </p:txBody>
       </p:sp>
@@ -25204,6 +25393,7 @@
           <a:lstStyle/>
           <a:p>
             <a:pPr algn="ctr"/>
+            <a:endParaRPr/>
           </a:p>
         </p:txBody>
       </p:sp>
@@ -25248,6 +25438,7 @@
           <a:lstStyle/>
           <a:p>
             <a:pPr algn="ctr"/>
+            <a:endParaRPr/>
           </a:p>
         </p:txBody>
       </p:sp>
@@ -25292,6 +25483,7 @@
           <a:lstStyle/>
           <a:p>
             <a:pPr algn="ctr"/>
+            <a:endParaRPr/>
           </a:p>
         </p:txBody>
       </p:sp>
@@ -25336,6 +25528,7 @@
           <a:lstStyle/>
           <a:p>
             <a:pPr algn="ctr"/>
+            <a:endParaRPr/>
           </a:p>
         </p:txBody>
       </p:sp>
@@ -25380,6 +25573,7 @@
           <a:lstStyle/>
           <a:p>
             <a:pPr algn="ctr"/>
+            <a:endParaRPr/>
           </a:p>
         </p:txBody>
       </p:sp>
@@ -25424,6 +25618,7 @@
           <a:lstStyle/>
           <a:p>
             <a:pPr algn="ctr"/>
+            <a:endParaRPr/>
           </a:p>
         </p:txBody>
       </p:sp>
@@ -25468,6 +25663,7 @@
           <a:lstStyle/>
           <a:p>
             <a:pPr algn="ctr"/>
+            <a:endParaRPr/>
           </a:p>
         </p:txBody>
       </p:sp>
@@ -25512,6 +25708,7 @@
           <a:lstStyle/>
           <a:p>
             <a:pPr algn="ctr"/>
+            <a:endParaRPr/>
           </a:p>
         </p:txBody>
       </p:sp>
@@ -25556,6 +25753,7 @@
           <a:lstStyle/>
           <a:p>
             <a:pPr algn="ctr"/>
+            <a:endParaRPr/>
           </a:p>
         </p:txBody>
       </p:sp>
@@ -25600,6 +25798,7 @@
           <a:lstStyle/>
           <a:p>
             <a:pPr algn="ctr"/>
+            <a:endParaRPr/>
           </a:p>
         </p:txBody>
       </p:sp>
@@ -25644,6 +25843,7 @@
           <a:lstStyle/>
           <a:p>
             <a:pPr algn="ctr"/>
+            <a:endParaRPr/>
           </a:p>
         </p:txBody>
       </p:sp>
@@ -25688,6 +25888,7 @@
           <a:lstStyle/>
           <a:p>
             <a:pPr algn="ctr"/>
+            <a:endParaRPr/>
           </a:p>
         </p:txBody>
       </p:sp>
@@ -25732,6 +25933,7 @@
           <a:lstStyle/>
           <a:p>
             <a:pPr algn="ctr"/>
+            <a:endParaRPr/>
           </a:p>
         </p:txBody>
       </p:sp>
@@ -25776,6 +25978,7 @@
           <a:lstStyle/>
           <a:p>
             <a:pPr algn="ctr"/>
+            <a:endParaRPr/>
           </a:p>
         </p:txBody>
       </p:sp>
@@ -25820,6 +26023,7 @@
           <a:lstStyle/>
           <a:p>
             <a:pPr algn="ctr"/>
+            <a:endParaRPr/>
           </a:p>
         </p:txBody>
       </p:sp>
@@ -25864,6 +26068,7 @@
           <a:lstStyle/>
           <a:p>
             <a:pPr algn="ctr"/>
+            <a:endParaRPr/>
           </a:p>
         </p:txBody>
       </p:sp>
@@ -25908,6 +26113,7 @@
           <a:lstStyle/>
           <a:p>
             <a:pPr algn="ctr"/>
+            <a:endParaRPr/>
           </a:p>
         </p:txBody>
       </p:sp>
@@ -25952,6 +26158,7 @@
           <a:lstStyle/>
           <a:p>
             <a:pPr algn="ctr"/>
+            <a:endParaRPr/>
           </a:p>
         </p:txBody>
       </p:sp>
@@ -25996,6 +26203,7 @@
           <a:lstStyle/>
           <a:p>
             <a:pPr algn="ctr"/>
+            <a:endParaRPr/>
           </a:p>
         </p:txBody>
       </p:sp>
@@ -26040,6 +26248,7 @@
           <a:lstStyle/>
           <a:p>
             <a:pPr algn="ctr"/>
+            <a:endParaRPr/>
           </a:p>
         </p:txBody>
       </p:sp>
@@ -26084,6 +26293,7 @@
           <a:lstStyle/>
           <a:p>
             <a:pPr algn="ctr"/>
+            <a:endParaRPr/>
           </a:p>
         </p:txBody>
       </p:sp>
@@ -26128,6 +26338,7 @@
           <a:lstStyle/>
           <a:p>
             <a:pPr algn="ctr"/>
+            <a:endParaRPr/>
           </a:p>
         </p:txBody>
       </p:sp>
@@ -26172,6 +26383,7 @@
           <a:lstStyle/>
           <a:p>
             <a:pPr algn="ctr"/>
+            <a:endParaRPr/>
           </a:p>
         </p:txBody>
       </p:sp>
@@ -26216,6 +26428,7 @@
           <a:lstStyle/>
           <a:p>
             <a:pPr algn="ctr"/>
+            <a:endParaRPr/>
           </a:p>
         </p:txBody>
       </p:sp>
@@ -26260,6 +26473,7 @@
           <a:lstStyle/>
           <a:p>
             <a:pPr algn="ctr"/>
+            <a:endParaRPr/>
           </a:p>
         </p:txBody>
       </p:sp>
@@ -26304,6 +26518,7 @@
           <a:lstStyle/>
           <a:p>
             <a:pPr algn="ctr"/>
+            <a:endParaRPr/>
           </a:p>
         </p:txBody>
       </p:sp>
@@ -26348,6 +26563,7 @@
           <a:lstStyle/>
           <a:p>
             <a:pPr algn="ctr"/>
+            <a:endParaRPr/>
           </a:p>
         </p:txBody>
       </p:sp>
@@ -26392,6 +26608,7 @@
           <a:lstStyle/>
           <a:p>
             <a:pPr algn="ctr"/>
+            <a:endParaRPr/>
           </a:p>
         </p:txBody>
       </p:sp>
@@ -26436,6 +26653,7 @@
           <a:lstStyle/>
           <a:p>
             <a:pPr algn="ctr"/>
+            <a:endParaRPr/>
           </a:p>
         </p:txBody>
       </p:sp>
@@ -26480,6 +26698,7 @@
           <a:lstStyle/>
           <a:p>
             <a:pPr algn="ctr"/>
+            <a:endParaRPr/>
           </a:p>
         </p:txBody>
       </p:sp>
@@ -26524,6 +26743,7 @@
           <a:lstStyle/>
           <a:p>
             <a:pPr algn="ctr"/>
+            <a:endParaRPr/>
           </a:p>
         </p:txBody>
       </p:sp>
@@ -26568,6 +26788,7 @@
           <a:lstStyle/>
           <a:p>
             <a:pPr algn="ctr"/>
+            <a:endParaRPr/>
           </a:p>
         </p:txBody>
       </p:sp>
@@ -26612,6 +26833,7 @@
           <a:lstStyle/>
           <a:p>
             <a:pPr algn="ctr"/>
+            <a:endParaRPr/>
           </a:p>
         </p:txBody>
       </p:sp>
@@ -26656,6 +26878,7 @@
           <a:lstStyle/>
           <a:p>
             <a:pPr algn="ctr"/>
+            <a:endParaRPr/>
           </a:p>
         </p:txBody>
       </p:sp>
@@ -26700,6 +26923,7 @@
           <a:lstStyle/>
           <a:p>
             <a:pPr algn="ctr"/>
+            <a:endParaRPr/>
           </a:p>
         </p:txBody>
       </p:sp>
@@ -26744,6 +26968,7 @@
           <a:lstStyle/>
           <a:p>
             <a:pPr algn="ctr"/>
+            <a:endParaRPr/>
           </a:p>
         </p:txBody>
       </p:sp>
@@ -26788,6 +27013,7 @@
           <a:lstStyle/>
           <a:p>
             <a:pPr algn="ctr"/>
+            <a:endParaRPr/>
           </a:p>
         </p:txBody>
       </p:sp>
@@ -26832,6 +27058,7 @@
           <a:lstStyle/>
           <a:p>
             <a:pPr algn="ctr"/>
+            <a:endParaRPr/>
           </a:p>
         </p:txBody>
       </p:sp>
@@ -26876,6 +27103,7 @@
           <a:lstStyle/>
           <a:p>
             <a:pPr algn="ctr"/>
+            <a:endParaRPr/>
           </a:p>
         </p:txBody>
       </p:sp>
@@ -26920,6 +27148,7 @@
           <a:lstStyle/>
           <a:p>
             <a:pPr algn="ctr"/>
+            <a:endParaRPr/>
           </a:p>
         </p:txBody>
       </p:sp>
@@ -26964,6 +27193,7 @@
           <a:lstStyle/>
           <a:p>
             <a:pPr algn="ctr"/>
+            <a:endParaRPr/>
           </a:p>
         </p:txBody>
       </p:sp>
@@ -27008,6 +27238,7 @@
           <a:lstStyle/>
           <a:p>
             <a:pPr algn="ctr"/>
+            <a:endParaRPr/>
           </a:p>
         </p:txBody>
       </p:sp>
@@ -27052,6 +27283,7 @@
           <a:lstStyle/>
           <a:p>
             <a:pPr algn="ctr"/>
+            <a:endParaRPr/>
           </a:p>
         </p:txBody>
       </p:sp>
@@ -27096,6 +27328,7 @@
           <a:lstStyle/>
           <a:p>
             <a:pPr algn="ctr"/>
+            <a:endParaRPr/>
           </a:p>
         </p:txBody>
       </p:sp>
@@ -27140,6 +27373,7 @@
           <a:lstStyle/>
           <a:p>
             <a:pPr algn="ctr"/>
+            <a:endParaRPr/>
           </a:p>
         </p:txBody>
       </p:sp>
@@ -27160,7 +27394,7 @@
           <a:noFill/>
         </p:spPr>
         <p:txBody>
-          <a:bodyPr wrap="square" anchor="t" lIns="0" rIns="0" tIns="0" bIns="0">
+          <a:bodyPr wrap="square" lIns="0" tIns="0" rIns="0" bIns="0" anchor="t">
             <a:spAutoFit/>
           </a:bodyPr>
           <a:lstStyle/>
@@ -27202,7 +27436,7 @@
           <a:noFill/>
         </p:spPr>
         <p:txBody>
-          <a:bodyPr wrap="square" anchor="t" lIns="0" rIns="0" tIns="0" bIns="0">
+          <a:bodyPr wrap="square" lIns="0" tIns="0" rIns="0" bIns="0" anchor="t">
             <a:spAutoFit/>
           </a:bodyPr>
           <a:lstStyle/>
@@ -27266,10 +27500,11 @@
           </a:fontRef>
         </p:style>
         <p:txBody>
-          <a:bodyPr rtlCol="0" anchor="ctr" wrap="none"/>
+          <a:bodyPr wrap="none" rtlCol="0" anchor="ctr"/>
           <a:lstStyle/>
           <a:p>
             <a:pPr algn="ctr"/>
+            <a:endParaRPr/>
           </a:p>
         </p:txBody>
       </p:sp>
@@ -27290,7 +27525,7 @@
           <a:noFill/>
         </p:spPr>
         <p:txBody>
-          <a:bodyPr wrap="square" anchor="t" lIns="0" rIns="0" tIns="0" bIns="0">
+          <a:bodyPr wrap="square" lIns="0" tIns="0" rIns="0" bIns="0" anchor="t">
             <a:spAutoFit/>
           </a:bodyPr>
           <a:lstStyle/>
@@ -30052,6 +30287,7 @@
           <a:lstStyle/>
           <a:p>
             <a:pPr algn="ctr"/>
+            <a:endParaRPr/>
           </a:p>
         </p:txBody>
       </p:sp>
@@ -30096,6 +30332,7 @@
           <a:lstStyle/>
           <a:p>
             <a:pPr algn="ctr"/>
+            <a:endParaRPr/>
           </a:p>
         </p:txBody>
       </p:sp>
@@ -30140,6 +30377,7 @@
           <a:lstStyle/>
           <a:p>
             <a:pPr algn="ctr"/>
+            <a:endParaRPr/>
           </a:p>
         </p:txBody>
       </p:sp>
@@ -30186,6 +30424,7 @@
           <a:lstStyle/>
           <a:p>
             <a:pPr algn="ctr"/>
+            <a:endParaRPr/>
           </a:p>
         </p:txBody>
       </p:sp>
@@ -30232,6 +30471,7 @@
           <a:lstStyle/>
           <a:p>
             <a:pPr algn="ctr"/>
+            <a:endParaRPr/>
           </a:p>
         </p:txBody>
       </p:sp>
@@ -30276,6 +30516,7 @@
           <a:lstStyle/>
           <a:p>
             <a:pPr algn="ctr"/>
+            <a:endParaRPr/>
           </a:p>
         </p:txBody>
       </p:sp>
@@ -30320,6 +30561,7 @@
           <a:lstStyle/>
           <a:p>
             <a:pPr algn="ctr"/>
+            <a:endParaRPr/>
           </a:p>
         </p:txBody>
       </p:sp>
@@ -30364,6 +30606,7 @@
           <a:lstStyle/>
           <a:p>
             <a:pPr algn="ctr"/>
+            <a:endParaRPr/>
           </a:p>
         </p:txBody>
       </p:sp>
@@ -30408,6 +30651,7 @@
           <a:lstStyle/>
           <a:p>
             <a:pPr algn="ctr"/>
+            <a:endParaRPr/>
           </a:p>
         </p:txBody>
       </p:sp>
@@ -30452,6 +30696,7 @@
           <a:lstStyle/>
           <a:p>
             <a:pPr algn="ctr"/>
+            <a:endParaRPr/>
           </a:p>
         </p:txBody>
       </p:sp>
@@ -30496,6 +30741,7 @@
           <a:lstStyle/>
           <a:p>
             <a:pPr algn="ctr"/>
+            <a:endParaRPr/>
           </a:p>
         </p:txBody>
       </p:sp>
@@ -30542,6 +30788,7 @@
           <a:lstStyle/>
           <a:p>
             <a:pPr algn="ctr"/>
+            <a:endParaRPr/>
           </a:p>
         </p:txBody>
       </p:sp>
@@ -30588,6 +30835,7 @@
           <a:lstStyle/>
           <a:p>
             <a:pPr algn="ctr"/>
+            <a:endParaRPr/>
           </a:p>
         </p:txBody>
       </p:sp>
@@ -30632,6 +30880,7 @@
           <a:lstStyle/>
           <a:p>
             <a:pPr algn="ctr"/>
+            <a:endParaRPr/>
           </a:p>
         </p:txBody>
       </p:sp>
@@ -30676,6 +30925,7 @@
           <a:lstStyle/>
           <a:p>
             <a:pPr algn="ctr"/>
+            <a:endParaRPr/>
           </a:p>
         </p:txBody>
       </p:sp>
@@ -30720,6 +30970,7 @@
           <a:lstStyle/>
           <a:p>
             <a:pPr algn="ctr"/>
+            <a:endParaRPr/>
           </a:p>
         </p:txBody>
       </p:sp>
@@ -30766,6 +31017,7 @@
           <a:lstStyle/>
           <a:p>
             <a:pPr algn="ctr"/>
+            <a:endParaRPr/>
           </a:p>
         </p:txBody>
       </p:sp>
@@ -30812,6 +31064,7 @@
           <a:lstStyle/>
           <a:p>
             <a:pPr algn="ctr"/>
+            <a:endParaRPr/>
           </a:p>
         </p:txBody>
       </p:sp>
@@ -30858,6 +31111,7 @@
           <a:lstStyle/>
           <a:p>
             <a:pPr algn="ctr"/>
+            <a:endParaRPr/>
           </a:p>
         </p:txBody>
       </p:sp>
@@ -30904,6 +31158,7 @@
           <a:lstStyle/>
           <a:p>
             <a:pPr algn="ctr"/>
+            <a:endParaRPr/>
           </a:p>
         </p:txBody>
       </p:sp>
@@ -30950,6 +31205,7 @@
           <a:lstStyle/>
           <a:p>
             <a:pPr algn="ctr"/>
+            <a:endParaRPr/>
           </a:p>
         </p:txBody>
       </p:sp>
@@ -30996,6 +31252,7 @@
           <a:lstStyle/>
           <a:p>
             <a:pPr algn="ctr"/>
+            <a:endParaRPr/>
           </a:p>
         </p:txBody>
       </p:sp>
@@ -31040,6 +31297,7 @@
           <a:lstStyle/>
           <a:p>
             <a:pPr algn="ctr"/>
+            <a:endParaRPr/>
           </a:p>
         </p:txBody>
       </p:sp>
@@ -31084,6 +31342,7 @@
           <a:lstStyle/>
           <a:p>
             <a:pPr algn="ctr"/>
+            <a:endParaRPr/>
           </a:p>
         </p:txBody>
       </p:sp>
@@ -31128,6 +31387,7 @@
           <a:lstStyle/>
           <a:p>
             <a:pPr algn="ctr"/>
+            <a:endParaRPr/>
           </a:p>
         </p:txBody>
       </p:sp>
@@ -31174,6 +31434,7 @@
           <a:lstStyle/>
           <a:p>
             <a:pPr algn="ctr"/>
+            <a:endParaRPr/>
           </a:p>
         </p:txBody>
       </p:sp>
@@ -31220,6 +31481,7 @@
           <a:lstStyle/>
           <a:p>
             <a:pPr algn="ctr"/>
+            <a:endParaRPr/>
           </a:p>
         </p:txBody>
       </p:sp>
@@ -31264,6 +31526,7 @@
           <a:lstStyle/>
           <a:p>
             <a:pPr algn="ctr"/>
+            <a:endParaRPr/>
           </a:p>
         </p:txBody>
       </p:sp>
@@ -31308,6 +31571,7 @@
           <a:lstStyle/>
           <a:p>
             <a:pPr algn="ctr"/>
+            <a:endParaRPr/>
           </a:p>
         </p:txBody>
       </p:sp>
@@ -31352,6 +31616,7 @@
           <a:lstStyle/>
           <a:p>
             <a:pPr algn="ctr"/>
+            <a:endParaRPr/>
           </a:p>
         </p:txBody>
       </p:sp>
@@ -31398,6 +31663,7 @@
           <a:lstStyle/>
           <a:p>
             <a:pPr algn="ctr"/>
+            <a:endParaRPr/>
           </a:p>
         </p:txBody>
       </p:sp>
@@ -31444,6 +31710,7 @@
           <a:lstStyle/>
           <a:p>
             <a:pPr algn="ctr"/>
+            <a:endParaRPr/>
           </a:p>
         </p:txBody>
       </p:sp>
@@ -31490,6 +31757,7 @@
           <a:lstStyle/>
           <a:p>
             <a:pPr algn="ctr"/>
+            <a:endParaRPr/>
           </a:p>
         </p:txBody>
       </p:sp>
@@ -31536,6 +31804,7 @@
           <a:lstStyle/>
           <a:p>
             <a:pPr algn="ctr"/>
+            <a:endParaRPr/>
           </a:p>
         </p:txBody>
       </p:sp>
@@ -31582,6 +31851,7 @@
           <a:lstStyle/>
           <a:p>
             <a:pPr algn="ctr"/>
+            <a:endParaRPr/>
           </a:p>
         </p:txBody>
       </p:sp>
@@ -31628,6 +31898,7 @@
           <a:lstStyle/>
           <a:p>
             <a:pPr algn="ctr"/>
+            <a:endParaRPr/>
           </a:p>
         </p:txBody>
       </p:sp>
@@ -31674,6 +31945,7 @@
           <a:lstStyle/>
           <a:p>
             <a:pPr algn="ctr"/>
+            <a:endParaRPr/>
           </a:p>
         </p:txBody>
       </p:sp>
@@ -31720,6 +31992,7 @@
           <a:lstStyle/>
           <a:p>
             <a:pPr algn="ctr"/>
+            <a:endParaRPr/>
           </a:p>
         </p:txBody>
       </p:sp>
@@ -31764,6 +32037,7 @@
           <a:lstStyle/>
           <a:p>
             <a:pPr algn="ctr"/>
+            <a:endParaRPr/>
           </a:p>
         </p:txBody>
       </p:sp>
@@ -31808,6 +32082,7 @@
           <a:lstStyle/>
           <a:p>
             <a:pPr algn="ctr"/>
+            <a:endParaRPr/>
           </a:p>
         </p:txBody>
       </p:sp>
@@ -31852,6 +32127,7 @@
           <a:lstStyle/>
           <a:p>
             <a:pPr algn="ctr"/>
+            <a:endParaRPr/>
           </a:p>
         </p:txBody>
       </p:sp>
@@ -31898,6 +32174,7 @@
           <a:lstStyle/>
           <a:p>
             <a:pPr algn="ctr"/>
+            <a:endParaRPr/>
           </a:p>
         </p:txBody>
       </p:sp>
@@ -31944,6 +32221,7 @@
           <a:lstStyle/>
           <a:p>
             <a:pPr algn="ctr"/>
+            <a:endParaRPr/>
           </a:p>
         </p:txBody>
       </p:sp>
@@ -31988,6 +32266,7 @@
           <a:lstStyle/>
           <a:p>
             <a:pPr algn="ctr"/>
+            <a:endParaRPr/>
           </a:p>
         </p:txBody>
       </p:sp>
@@ -32032,6 +32311,7 @@
           <a:lstStyle/>
           <a:p>
             <a:pPr algn="ctr"/>
+            <a:endParaRPr/>
           </a:p>
         </p:txBody>
       </p:sp>
@@ -32076,6 +32356,7 @@
           <a:lstStyle/>
           <a:p>
             <a:pPr algn="ctr"/>
+            <a:endParaRPr/>
           </a:p>
         </p:txBody>
       </p:sp>
@@ -32236,7 +32517,7 @@
           <a:noFill/>
         </p:spPr>
         <p:txBody>
-          <a:bodyPr wrap="square" anchor="t" lIns="0" rIns="0" tIns="0" bIns="0">
+          <a:bodyPr wrap="square" lIns="0" tIns="0" rIns="0" bIns="0" anchor="t">
             <a:spAutoFit/>
           </a:bodyPr>
           <a:lstStyle/>
@@ -32278,7 +32559,7 @@
           <a:noFill/>
         </p:spPr>
         <p:txBody>
-          <a:bodyPr wrap="square" anchor="t" lIns="0" rIns="0" tIns="0" bIns="0">
+          <a:bodyPr wrap="square" lIns="0" tIns="0" rIns="0" bIns="0" anchor="t">
             <a:spAutoFit/>
           </a:bodyPr>
           <a:lstStyle/>
@@ -32342,10 +32623,11 @@
           </a:fontRef>
         </p:style>
         <p:txBody>
-          <a:bodyPr rtlCol="0" anchor="ctr" wrap="none"/>
+          <a:bodyPr wrap="none" rtlCol="0" anchor="ctr"/>
           <a:lstStyle/>
           <a:p>
             <a:pPr algn="ctr"/>
+            <a:endParaRPr/>
           </a:p>
         </p:txBody>
       </p:sp>
@@ -32366,7 +32648,7 @@
           <a:noFill/>
         </p:spPr>
         <p:txBody>
-          <a:bodyPr wrap="square" anchor="t" lIns="0" rIns="0" tIns="0" bIns="0">
+          <a:bodyPr wrap="square" lIns="0" tIns="0" rIns="0" bIns="0" anchor="t">
             <a:spAutoFit/>
           </a:bodyPr>
           <a:lstStyle/>
@@ -35128,6 +35410,7 @@
           <a:lstStyle/>
           <a:p>
             <a:pPr algn="ctr"/>
+            <a:endParaRPr/>
           </a:p>
         </p:txBody>
       </p:sp>
@@ -35172,6 +35455,7 @@
           <a:lstStyle/>
           <a:p>
             <a:pPr algn="ctr"/>
+            <a:endParaRPr/>
           </a:p>
         </p:txBody>
       </p:sp>
@@ -35216,6 +35500,7 @@
           <a:lstStyle/>
           <a:p>
             <a:pPr algn="ctr"/>
+            <a:endParaRPr/>
           </a:p>
         </p:txBody>
       </p:sp>
@@ -35260,6 +35545,7 @@
           <a:lstStyle/>
           <a:p>
             <a:pPr algn="ctr"/>
+            <a:endParaRPr/>
           </a:p>
         </p:txBody>
       </p:sp>
@@ -35304,6 +35590,7 @@
           <a:lstStyle/>
           <a:p>
             <a:pPr algn="ctr"/>
+            <a:endParaRPr/>
           </a:p>
         </p:txBody>
       </p:sp>
@@ -35348,6 +35635,7 @@
           <a:lstStyle/>
           <a:p>
             <a:pPr algn="ctr"/>
+            <a:endParaRPr/>
           </a:p>
         </p:txBody>
       </p:sp>
@@ -35392,6 +35680,7 @@
           <a:lstStyle/>
           <a:p>
             <a:pPr algn="ctr"/>
+            <a:endParaRPr/>
           </a:p>
         </p:txBody>
       </p:sp>
@@ -35436,6 +35725,7 @@
           <a:lstStyle/>
           <a:p>
             <a:pPr algn="ctr"/>
+            <a:endParaRPr/>
           </a:p>
         </p:txBody>
       </p:sp>
@@ -35480,6 +35770,7 @@
           <a:lstStyle/>
           <a:p>
             <a:pPr algn="ctr"/>
+            <a:endParaRPr/>
           </a:p>
         </p:txBody>
       </p:sp>
@@ -35524,6 +35815,7 @@
           <a:lstStyle/>
           <a:p>
             <a:pPr algn="ctr"/>
+            <a:endParaRPr/>
           </a:p>
         </p:txBody>
       </p:sp>
@@ -35568,6 +35860,7 @@
           <a:lstStyle/>
           <a:p>
             <a:pPr algn="ctr"/>
+            <a:endParaRPr/>
           </a:p>
         </p:txBody>
       </p:sp>
@@ -35612,6 +35905,7 @@
           <a:lstStyle/>
           <a:p>
             <a:pPr algn="ctr"/>
+            <a:endParaRPr/>
           </a:p>
         </p:txBody>
       </p:sp>
@@ -35656,6 +35950,7 @@
           <a:lstStyle/>
           <a:p>
             <a:pPr algn="ctr"/>
+            <a:endParaRPr/>
           </a:p>
         </p:txBody>
       </p:sp>
@@ -35700,6 +35995,7 @@
           <a:lstStyle/>
           <a:p>
             <a:pPr algn="ctr"/>
+            <a:endParaRPr/>
           </a:p>
         </p:txBody>
       </p:sp>
@@ -35744,6 +36040,7 @@
           <a:lstStyle/>
           <a:p>
             <a:pPr algn="ctr"/>
+            <a:endParaRPr/>
           </a:p>
         </p:txBody>
       </p:sp>
@@ -35788,6 +36085,7 @@
           <a:lstStyle/>
           <a:p>
             <a:pPr algn="ctr"/>
+            <a:endParaRPr/>
           </a:p>
         </p:txBody>
       </p:sp>
@@ -35832,6 +36130,7 @@
           <a:lstStyle/>
           <a:p>
             <a:pPr algn="ctr"/>
+            <a:endParaRPr/>
           </a:p>
         </p:txBody>
       </p:sp>
@@ -35876,6 +36175,7 @@
           <a:lstStyle/>
           <a:p>
             <a:pPr algn="ctr"/>
+            <a:endParaRPr/>
           </a:p>
         </p:txBody>
       </p:sp>
@@ -35920,6 +36220,7 @@
           <a:lstStyle/>
           <a:p>
             <a:pPr algn="ctr"/>
+            <a:endParaRPr/>
           </a:p>
         </p:txBody>
       </p:sp>
@@ -35964,6 +36265,7 @@
           <a:lstStyle/>
           <a:p>
             <a:pPr algn="ctr"/>
+            <a:endParaRPr/>
           </a:p>
         </p:txBody>
       </p:sp>
@@ -36008,6 +36310,7 @@
           <a:lstStyle/>
           <a:p>
             <a:pPr algn="ctr"/>
+            <a:endParaRPr/>
           </a:p>
         </p:txBody>
       </p:sp>
@@ -36052,6 +36355,7 @@
           <a:lstStyle/>
           <a:p>
             <a:pPr algn="ctr"/>
+            <a:endParaRPr/>
           </a:p>
         </p:txBody>
       </p:sp>
@@ -36096,6 +36400,7 @@
           <a:lstStyle/>
           <a:p>
             <a:pPr algn="ctr"/>
+            <a:endParaRPr/>
           </a:p>
         </p:txBody>
       </p:sp>
@@ -36140,6 +36445,7 @@
           <a:lstStyle/>
           <a:p>
             <a:pPr algn="ctr"/>
+            <a:endParaRPr/>
           </a:p>
         </p:txBody>
       </p:sp>
@@ -36184,6 +36490,7 @@
           <a:lstStyle/>
           <a:p>
             <a:pPr algn="ctr"/>
+            <a:endParaRPr/>
           </a:p>
         </p:txBody>
       </p:sp>
@@ -36228,6 +36535,7 @@
           <a:lstStyle/>
           <a:p>
             <a:pPr algn="ctr"/>
+            <a:endParaRPr/>
           </a:p>
         </p:txBody>
       </p:sp>
@@ -36272,6 +36580,7 @@
           <a:lstStyle/>
           <a:p>
             <a:pPr algn="ctr"/>
+            <a:endParaRPr/>
           </a:p>
         </p:txBody>
       </p:sp>
@@ -36316,6 +36625,7 @@
           <a:lstStyle/>
           <a:p>
             <a:pPr algn="ctr"/>
+            <a:endParaRPr/>
           </a:p>
         </p:txBody>
       </p:sp>
@@ -36360,6 +36670,7 @@
           <a:lstStyle/>
           <a:p>
             <a:pPr algn="ctr"/>
+            <a:endParaRPr/>
           </a:p>
         </p:txBody>
       </p:sp>
@@ -36404,6 +36715,7 @@
           <a:lstStyle/>
           <a:p>
             <a:pPr algn="ctr"/>
+            <a:endParaRPr/>
           </a:p>
         </p:txBody>
       </p:sp>
@@ -36448,6 +36760,7 @@
           <a:lstStyle/>
           <a:p>
             <a:pPr algn="ctr"/>
+            <a:endParaRPr/>
           </a:p>
         </p:txBody>
       </p:sp>
@@ -36492,6 +36805,7 @@
           <a:lstStyle/>
           <a:p>
             <a:pPr algn="ctr"/>
+            <a:endParaRPr/>
           </a:p>
         </p:txBody>
       </p:sp>
@@ -36536,6 +36850,7 @@
           <a:lstStyle/>
           <a:p>
             <a:pPr algn="ctr"/>
+            <a:endParaRPr/>
           </a:p>
         </p:txBody>
       </p:sp>
@@ -36580,6 +36895,7 @@
           <a:lstStyle/>
           <a:p>
             <a:pPr algn="ctr"/>
+            <a:endParaRPr/>
           </a:p>
         </p:txBody>
       </p:sp>
@@ -36624,6 +36940,7 @@
           <a:lstStyle/>
           <a:p>
             <a:pPr algn="ctr"/>
+            <a:endParaRPr/>
           </a:p>
         </p:txBody>
       </p:sp>
@@ -36668,6 +36985,7 @@
           <a:lstStyle/>
           <a:p>
             <a:pPr algn="ctr"/>
+            <a:endParaRPr/>
           </a:p>
         </p:txBody>
       </p:sp>
@@ -36712,6 +37030,7 @@
           <a:lstStyle/>
           <a:p>
             <a:pPr algn="ctr"/>
+            <a:endParaRPr/>
           </a:p>
         </p:txBody>
       </p:sp>
@@ -36756,6 +37075,7 @@
           <a:lstStyle/>
           <a:p>
             <a:pPr algn="ctr"/>
+            <a:endParaRPr/>
           </a:p>
         </p:txBody>
       </p:sp>
@@ -36800,6 +37120,7 @@
           <a:lstStyle/>
           <a:p>
             <a:pPr algn="ctr"/>
+            <a:endParaRPr/>
           </a:p>
         </p:txBody>
       </p:sp>
@@ -36844,6 +37165,7 @@
           <a:lstStyle/>
           <a:p>
             <a:pPr algn="ctr"/>
+            <a:endParaRPr/>
           </a:p>
         </p:txBody>
       </p:sp>
@@ -36888,6 +37210,7 @@
           <a:lstStyle/>
           <a:p>
             <a:pPr algn="ctr"/>
+            <a:endParaRPr/>
           </a:p>
         </p:txBody>
       </p:sp>
@@ -36932,6 +37255,7 @@
           <a:lstStyle/>
           <a:p>
             <a:pPr algn="ctr"/>
+            <a:endParaRPr/>
           </a:p>
         </p:txBody>
       </p:sp>
@@ -36976,6 +37300,7 @@
           <a:lstStyle/>
           <a:p>
             <a:pPr algn="ctr"/>
+            <a:endParaRPr/>
           </a:p>
         </p:txBody>
       </p:sp>
@@ -37020,6 +37345,7 @@
           <a:lstStyle/>
           <a:p>
             <a:pPr algn="ctr"/>
+            <a:endParaRPr/>
           </a:p>
         </p:txBody>
       </p:sp>
@@ -37064,6 +37390,7 @@
           <a:lstStyle/>
           <a:p>
             <a:pPr algn="ctr"/>
+            <a:endParaRPr/>
           </a:p>
         </p:txBody>
       </p:sp>
@@ -37108,6 +37435,7 @@
           <a:lstStyle/>
           <a:p>
             <a:pPr algn="ctr"/>
+            <a:endParaRPr/>
           </a:p>
         </p:txBody>
       </p:sp>
@@ -37292,6 +37620,7 @@
           <a:lstStyle/>
           <a:p>
             <a:pPr algn="ctr"/>
+            <a:endParaRPr/>
           </a:p>
         </p:txBody>
       </p:sp>
@@ -37312,7 +37641,7 @@
           <a:noFill/>
         </p:spPr>
         <p:txBody>
-          <a:bodyPr wrap="square" anchor="t" lIns="0" rIns="0" tIns="0" bIns="0">
+          <a:bodyPr wrap="square" lIns="0" tIns="0" rIns="0" bIns="0" anchor="t">
             <a:spAutoFit/>
           </a:bodyPr>
           <a:lstStyle/>
@@ -37354,7 +37683,7 @@
           <a:noFill/>
         </p:spPr>
         <p:txBody>
-          <a:bodyPr wrap="square" anchor="t" lIns="0" rIns="0" tIns="0" bIns="0">
+          <a:bodyPr wrap="square" lIns="0" tIns="0" rIns="0" bIns="0" anchor="t">
             <a:spAutoFit/>
           </a:bodyPr>
           <a:lstStyle/>
@@ -37418,10 +37747,11 @@
           </a:fontRef>
         </p:style>
         <p:txBody>
-          <a:bodyPr rtlCol="0" anchor="ctr" wrap="none"/>
+          <a:bodyPr wrap="none" rtlCol="0" anchor="ctr"/>
           <a:lstStyle/>
           <a:p>
             <a:pPr algn="ctr"/>
+            <a:endParaRPr/>
           </a:p>
         </p:txBody>
       </p:sp>
@@ -37442,7 +37772,7 @@
           <a:noFill/>
         </p:spPr>
         <p:txBody>
-          <a:bodyPr wrap="square" anchor="t" lIns="0" rIns="0" tIns="0" bIns="0">
+          <a:bodyPr wrap="square" lIns="0" tIns="0" rIns="0" bIns="0" anchor="t">
             <a:spAutoFit/>
           </a:bodyPr>
           <a:lstStyle/>
@@ -40204,6 +40534,7 @@
           <a:lstStyle/>
           <a:p>
             <a:pPr algn="ctr"/>
+            <a:endParaRPr/>
           </a:p>
         </p:txBody>
       </p:sp>
@@ -40248,6 +40579,7 @@
           <a:lstStyle/>
           <a:p>
             <a:pPr algn="ctr"/>
+            <a:endParaRPr/>
           </a:p>
         </p:txBody>
       </p:sp>
@@ -40292,6 +40624,7 @@
           <a:lstStyle/>
           <a:p>
             <a:pPr algn="ctr"/>
+            <a:endParaRPr/>
           </a:p>
         </p:txBody>
       </p:sp>
@@ -40336,6 +40669,7 @@
           <a:lstStyle/>
           <a:p>
             <a:pPr algn="ctr"/>
+            <a:endParaRPr/>
           </a:p>
         </p:txBody>
       </p:sp>
@@ -40380,6 +40714,7 @@
           <a:lstStyle/>
           <a:p>
             <a:pPr algn="ctr"/>
+            <a:endParaRPr/>
           </a:p>
         </p:txBody>
       </p:sp>
@@ -40424,6 +40759,7 @@
           <a:lstStyle/>
           <a:p>
             <a:pPr algn="ctr"/>
+            <a:endParaRPr/>
           </a:p>
         </p:txBody>
       </p:sp>
@@ -40468,6 +40804,7 @@
           <a:lstStyle/>
           <a:p>
             <a:pPr algn="ctr"/>
+            <a:endParaRPr/>
           </a:p>
         </p:txBody>
       </p:sp>
@@ -40512,6 +40849,7 @@
           <a:lstStyle/>
           <a:p>
             <a:pPr algn="ctr"/>
+            <a:endParaRPr/>
           </a:p>
         </p:txBody>
       </p:sp>
@@ -40556,6 +40894,7 @@
           <a:lstStyle/>
           <a:p>
             <a:pPr algn="ctr"/>
+            <a:endParaRPr/>
           </a:p>
         </p:txBody>
       </p:sp>
@@ -40600,6 +40939,7 @@
           <a:lstStyle/>
           <a:p>
             <a:pPr algn="ctr"/>
+            <a:endParaRPr/>
           </a:p>
         </p:txBody>
       </p:sp>
@@ -40644,6 +40984,7 @@
           <a:lstStyle/>
           <a:p>
             <a:pPr algn="ctr"/>
+            <a:endParaRPr/>
           </a:p>
         </p:txBody>
       </p:sp>
@@ -40688,6 +41029,7 @@
           <a:lstStyle/>
           <a:p>
             <a:pPr algn="ctr"/>
+            <a:endParaRPr/>
           </a:p>
         </p:txBody>
       </p:sp>
@@ -40732,6 +41074,7 @@
           <a:lstStyle/>
           <a:p>
             <a:pPr algn="ctr"/>
+            <a:endParaRPr/>
           </a:p>
         </p:txBody>
       </p:sp>
@@ -40776,6 +41119,7 @@
           <a:lstStyle/>
           <a:p>
             <a:pPr algn="ctr"/>
+            <a:endParaRPr/>
           </a:p>
         </p:txBody>
       </p:sp>
@@ -40820,6 +41164,7 @@
           <a:lstStyle/>
           <a:p>
             <a:pPr algn="ctr"/>
+            <a:endParaRPr/>
           </a:p>
         </p:txBody>
       </p:sp>
@@ -40864,6 +41209,7 @@
           <a:lstStyle/>
           <a:p>
             <a:pPr algn="ctr"/>
+            <a:endParaRPr/>
           </a:p>
         </p:txBody>
       </p:sp>
@@ -40908,6 +41254,7 @@
           <a:lstStyle/>
           <a:p>
             <a:pPr algn="ctr"/>
+            <a:endParaRPr/>
           </a:p>
         </p:txBody>
       </p:sp>
@@ -40952,6 +41299,7 @@
           <a:lstStyle/>
           <a:p>
             <a:pPr algn="ctr"/>
+            <a:endParaRPr/>
           </a:p>
         </p:txBody>
       </p:sp>
@@ -40996,6 +41344,7 @@
           <a:lstStyle/>
           <a:p>
             <a:pPr algn="ctr"/>
+            <a:endParaRPr/>
           </a:p>
         </p:txBody>
       </p:sp>
@@ -41040,6 +41389,7 @@
           <a:lstStyle/>
           <a:p>
             <a:pPr algn="ctr"/>
+            <a:endParaRPr/>
           </a:p>
         </p:txBody>
       </p:sp>
@@ -41084,6 +41434,7 @@
           <a:lstStyle/>
           <a:p>
             <a:pPr algn="ctr"/>
+            <a:endParaRPr/>
           </a:p>
         </p:txBody>
       </p:sp>
@@ -41128,6 +41479,7 @@
           <a:lstStyle/>
           <a:p>
             <a:pPr algn="ctr"/>
+            <a:endParaRPr/>
           </a:p>
         </p:txBody>
       </p:sp>
@@ -41172,6 +41524,7 @@
           <a:lstStyle/>
           <a:p>
             <a:pPr algn="ctr"/>
+            <a:endParaRPr/>
           </a:p>
         </p:txBody>
       </p:sp>
@@ -41216,6 +41569,7 @@
           <a:lstStyle/>
           <a:p>
             <a:pPr algn="ctr"/>
+            <a:endParaRPr/>
           </a:p>
         </p:txBody>
       </p:sp>
@@ -41260,6 +41614,7 @@
           <a:lstStyle/>
           <a:p>
             <a:pPr algn="ctr"/>
+            <a:endParaRPr/>
           </a:p>
         </p:txBody>
       </p:sp>
@@ -41304,6 +41659,7 @@
           <a:lstStyle/>
           <a:p>
             <a:pPr algn="ctr"/>
+            <a:endParaRPr/>
           </a:p>
         </p:txBody>
       </p:sp>
@@ -41348,6 +41704,7 @@
           <a:lstStyle/>
           <a:p>
             <a:pPr algn="ctr"/>
+            <a:endParaRPr/>
           </a:p>
         </p:txBody>
       </p:sp>
@@ -41392,6 +41749,7 @@
           <a:lstStyle/>
           <a:p>
             <a:pPr algn="ctr"/>
+            <a:endParaRPr/>
           </a:p>
         </p:txBody>
       </p:sp>
@@ -41436,6 +41794,7 @@
           <a:lstStyle/>
           <a:p>
             <a:pPr algn="ctr"/>
+            <a:endParaRPr/>
           </a:p>
         </p:txBody>
       </p:sp>
@@ -41480,6 +41839,7 @@
           <a:lstStyle/>
           <a:p>
             <a:pPr algn="ctr"/>
+            <a:endParaRPr/>
           </a:p>
         </p:txBody>
       </p:sp>
@@ -41524,6 +41884,7 @@
           <a:lstStyle/>
           <a:p>
             <a:pPr algn="ctr"/>
+            <a:endParaRPr/>
           </a:p>
         </p:txBody>
       </p:sp>
@@ -41568,6 +41929,7 @@
           <a:lstStyle/>
           <a:p>
             <a:pPr algn="ctr"/>
+            <a:endParaRPr/>
           </a:p>
         </p:txBody>
       </p:sp>
@@ -41612,6 +41974,7 @@
           <a:lstStyle/>
           <a:p>
             <a:pPr algn="ctr"/>
+            <a:endParaRPr/>
           </a:p>
         </p:txBody>
       </p:sp>
@@ -41656,6 +42019,7 @@
           <a:lstStyle/>
           <a:p>
             <a:pPr algn="ctr"/>
+            <a:endParaRPr/>
           </a:p>
         </p:txBody>
       </p:sp>
@@ -41700,6 +42064,7 @@
           <a:lstStyle/>
           <a:p>
             <a:pPr algn="ctr"/>
+            <a:endParaRPr/>
           </a:p>
         </p:txBody>
       </p:sp>
@@ -41744,6 +42109,7 @@
           <a:lstStyle/>
           <a:p>
             <a:pPr algn="ctr"/>
+            <a:endParaRPr/>
           </a:p>
         </p:txBody>
       </p:sp>
@@ -41788,6 +42154,7 @@
           <a:lstStyle/>
           <a:p>
             <a:pPr algn="ctr"/>
+            <a:endParaRPr/>
           </a:p>
         </p:txBody>
       </p:sp>
@@ -41832,6 +42199,7 @@
           <a:lstStyle/>
           <a:p>
             <a:pPr algn="ctr"/>
+            <a:endParaRPr/>
           </a:p>
         </p:txBody>
       </p:sp>
@@ -41876,6 +42244,7 @@
           <a:lstStyle/>
           <a:p>
             <a:pPr algn="ctr"/>
+            <a:endParaRPr/>
           </a:p>
         </p:txBody>
       </p:sp>
@@ -41920,6 +42289,7 @@
           <a:lstStyle/>
           <a:p>
             <a:pPr algn="ctr"/>
+            <a:endParaRPr/>
           </a:p>
         </p:txBody>
       </p:sp>
@@ -41964,6 +42334,7 @@
           <a:lstStyle/>
           <a:p>
             <a:pPr algn="ctr"/>
+            <a:endParaRPr/>
           </a:p>
         </p:txBody>
       </p:sp>
@@ -42008,6 +42379,7 @@
           <a:lstStyle/>
           <a:p>
             <a:pPr algn="ctr"/>
+            <a:endParaRPr/>
           </a:p>
         </p:txBody>
       </p:sp>
@@ -42052,6 +42424,7 @@
           <a:lstStyle/>
           <a:p>
             <a:pPr algn="ctr"/>
+            <a:endParaRPr/>
           </a:p>
         </p:txBody>
       </p:sp>
@@ -42096,6 +42469,7 @@
           <a:lstStyle/>
           <a:p>
             <a:pPr algn="ctr"/>
+            <a:endParaRPr/>
           </a:p>
         </p:txBody>
       </p:sp>
@@ -42140,6 +42514,7 @@
           <a:lstStyle/>
           <a:p>
             <a:pPr algn="ctr"/>
+            <a:endParaRPr/>
           </a:p>
         </p:txBody>
       </p:sp>
@@ -42184,6 +42559,7 @@
           <a:lstStyle/>
           <a:p>
             <a:pPr algn="ctr"/>
+            <a:endParaRPr/>
           </a:p>
         </p:txBody>
       </p:sp>
@@ -42368,6 +42744,7 @@
           <a:lstStyle/>
           <a:p>
             <a:pPr algn="ctr"/>
+            <a:endParaRPr/>
           </a:p>
         </p:txBody>
       </p:sp>
@@ -42388,7 +42765,7 @@
           <a:noFill/>
         </p:spPr>
         <p:txBody>
-          <a:bodyPr wrap="square" anchor="t" lIns="0" rIns="0" tIns="0" bIns="0">
+          <a:bodyPr wrap="square" lIns="0" tIns="0" rIns="0" bIns="0" anchor="t">
             <a:spAutoFit/>
           </a:bodyPr>
           <a:lstStyle/>
@@ -42430,7 +42807,7 @@
           <a:noFill/>
         </p:spPr>
         <p:txBody>
-          <a:bodyPr wrap="square" anchor="t" lIns="0" rIns="0" tIns="0" bIns="0">
+          <a:bodyPr wrap="square" lIns="0" tIns="0" rIns="0" bIns="0" anchor="t">
             <a:spAutoFit/>
           </a:bodyPr>
           <a:lstStyle/>
@@ -42492,10 +42869,11 @@
           </a:fontRef>
         </p:style>
         <p:txBody>
-          <a:bodyPr rtlCol="0" anchor="ctr" wrap="none"/>
+          <a:bodyPr wrap="none" rtlCol="0" anchor="ctr"/>
           <a:lstStyle/>
           <a:p>
             <a:pPr algn="ctr"/>
+            <a:endParaRPr/>
           </a:p>
         </p:txBody>
       </p:sp>
@@ -42536,10 +42914,11 @@
           </a:fontRef>
         </p:style>
         <p:txBody>
-          <a:bodyPr rtlCol="0" anchor="ctr" wrap="none"/>
+          <a:bodyPr wrap="none" rtlCol="0" anchor="ctr"/>
           <a:lstStyle/>
           <a:p>
             <a:pPr algn="ctr"/>
+            <a:endParaRPr/>
           </a:p>
         </p:txBody>
       </p:sp>
@@ -42580,10 +42959,11 @@
           </a:fontRef>
         </p:style>
         <p:txBody>
-          <a:bodyPr rtlCol="0" anchor="ctr" wrap="none"/>
+          <a:bodyPr wrap="none" rtlCol="0" anchor="ctr"/>
           <a:lstStyle/>
           <a:p>
             <a:pPr algn="ctr"/>
+            <a:endParaRPr/>
           </a:p>
         </p:txBody>
       </p:sp>
@@ -42624,10 +43004,11 @@
           </a:fontRef>
         </p:style>
         <p:txBody>
-          <a:bodyPr rtlCol="0" anchor="ctr" wrap="none"/>
+          <a:bodyPr wrap="none" rtlCol="0" anchor="ctr"/>
           <a:lstStyle/>
           <a:p>
             <a:pPr algn="ctr"/>
+            <a:endParaRPr/>
           </a:p>
         </p:txBody>
       </p:sp>
@@ -42668,10 +43049,11 @@
           </a:fontRef>
         </p:style>
         <p:txBody>
-          <a:bodyPr rtlCol="0" anchor="ctr" wrap="none"/>
+          <a:bodyPr wrap="none" rtlCol="0" anchor="ctr"/>
           <a:lstStyle/>
           <a:p>
             <a:pPr algn="ctr"/>
+            <a:endParaRPr/>
           </a:p>
         </p:txBody>
       </p:sp>
@@ -42712,10 +43094,11 @@
           </a:fontRef>
         </p:style>
         <p:txBody>
-          <a:bodyPr rtlCol="0" anchor="ctr" wrap="none"/>
+          <a:bodyPr wrap="none" rtlCol="0" anchor="ctr"/>
           <a:lstStyle/>
           <a:p>
             <a:pPr algn="ctr"/>
+            <a:endParaRPr/>
           </a:p>
         </p:txBody>
       </p:sp>
@@ -42756,10 +43139,11 @@
           </a:fontRef>
         </p:style>
         <p:txBody>
-          <a:bodyPr rtlCol="0" anchor="ctr" wrap="none"/>
+          <a:bodyPr wrap="none" rtlCol="0" anchor="ctr"/>
           <a:lstStyle/>
           <a:p>
             <a:pPr algn="ctr"/>
+            <a:endParaRPr/>
           </a:p>
         </p:txBody>
       </p:sp>
@@ -42800,10 +43184,11 @@
           </a:fontRef>
         </p:style>
         <p:txBody>
-          <a:bodyPr rtlCol="0" anchor="ctr" wrap="none"/>
+          <a:bodyPr wrap="none" rtlCol="0" anchor="ctr"/>
           <a:lstStyle/>
           <a:p>
             <a:pPr algn="ctr"/>
+            <a:endParaRPr/>
           </a:p>
         </p:txBody>
       </p:sp>
@@ -42844,10 +43229,11 @@
           </a:fontRef>
         </p:style>
         <p:txBody>
-          <a:bodyPr rtlCol="0" anchor="ctr" wrap="none"/>
+          <a:bodyPr wrap="none" rtlCol="0" anchor="ctr"/>
           <a:lstStyle/>
           <a:p>
             <a:pPr algn="ctr"/>
+            <a:endParaRPr/>
           </a:p>
         </p:txBody>
       </p:sp>
@@ -42888,10 +43274,11 @@
           </a:fontRef>
         </p:style>
         <p:txBody>
-          <a:bodyPr rtlCol="0" anchor="ctr" wrap="none"/>
+          <a:bodyPr wrap="none" rtlCol="0" anchor="ctr"/>
           <a:lstStyle/>
           <a:p>
             <a:pPr algn="ctr"/>
+            <a:endParaRPr/>
           </a:p>
         </p:txBody>
       </p:sp>
@@ -42932,10 +43319,11 @@
           </a:fontRef>
         </p:style>
         <p:txBody>
-          <a:bodyPr rtlCol="0" anchor="ctr" wrap="none"/>
+          <a:bodyPr wrap="none" rtlCol="0" anchor="ctr"/>
           <a:lstStyle/>
           <a:p>
             <a:pPr algn="ctr"/>
+            <a:endParaRPr/>
           </a:p>
         </p:txBody>
       </p:sp>
@@ -42976,10 +43364,11 @@
           </a:fontRef>
         </p:style>
         <p:txBody>
-          <a:bodyPr rtlCol="0" anchor="ctr" wrap="none"/>
+          <a:bodyPr wrap="none" rtlCol="0" anchor="ctr"/>
           <a:lstStyle/>
           <a:p>
             <a:pPr algn="ctr"/>
+            <a:endParaRPr/>
           </a:p>
         </p:txBody>
       </p:sp>
@@ -43020,10 +43409,11 @@
           </a:fontRef>
         </p:style>
         <p:txBody>
-          <a:bodyPr rtlCol="0" anchor="ctr" wrap="none"/>
+          <a:bodyPr wrap="none" rtlCol="0" anchor="ctr"/>
           <a:lstStyle/>
           <a:p>
             <a:pPr algn="ctr"/>
+            <a:endParaRPr/>
           </a:p>
         </p:txBody>
       </p:sp>
@@ -43064,10 +43454,11 @@
           </a:fontRef>
         </p:style>
         <p:txBody>
-          <a:bodyPr rtlCol="0" anchor="ctr" wrap="none"/>
+          <a:bodyPr wrap="none" rtlCol="0" anchor="ctr"/>
           <a:lstStyle/>
           <a:p>
             <a:pPr algn="ctr"/>
+            <a:endParaRPr/>
           </a:p>
         </p:txBody>
       </p:sp>
@@ -43108,10 +43499,11 @@
           </a:fontRef>
         </p:style>
         <p:txBody>
-          <a:bodyPr rtlCol="0" anchor="ctr" wrap="none"/>
+          <a:bodyPr wrap="none" rtlCol="0" anchor="ctr"/>
           <a:lstStyle/>
           <a:p>
             <a:pPr algn="ctr"/>
+            <a:endParaRPr/>
           </a:p>
         </p:txBody>
       </p:sp>
@@ -43152,10 +43544,11 @@
           </a:fontRef>
         </p:style>
         <p:txBody>
-          <a:bodyPr rtlCol="0" anchor="ctr" wrap="none"/>
+          <a:bodyPr wrap="none" rtlCol="0" anchor="ctr"/>
           <a:lstStyle/>
           <a:p>
             <a:pPr algn="ctr"/>
+            <a:endParaRPr/>
           </a:p>
         </p:txBody>
       </p:sp>
@@ -43196,10 +43589,11 @@
           </a:fontRef>
         </p:style>
         <p:txBody>
-          <a:bodyPr rtlCol="0" anchor="ctr" wrap="none"/>
+          <a:bodyPr wrap="none" rtlCol="0" anchor="ctr"/>
           <a:lstStyle/>
           <a:p>
             <a:pPr algn="ctr"/>
+            <a:endParaRPr/>
           </a:p>
         </p:txBody>
       </p:sp>
@@ -43240,10 +43634,11 @@
           </a:fontRef>
         </p:style>
         <p:txBody>
-          <a:bodyPr rtlCol="0" anchor="ctr" wrap="none"/>
+          <a:bodyPr wrap="none" rtlCol="0" anchor="ctr"/>
           <a:lstStyle/>
           <a:p>
             <a:pPr algn="ctr"/>
+            <a:endParaRPr/>
           </a:p>
         </p:txBody>
       </p:sp>
@@ -43284,10 +43679,11 @@
           </a:fontRef>
         </p:style>
         <p:txBody>
-          <a:bodyPr rtlCol="0" anchor="ctr" wrap="none"/>
+          <a:bodyPr wrap="none" rtlCol="0" anchor="ctr"/>
           <a:lstStyle/>
           <a:p>
             <a:pPr algn="ctr"/>
+            <a:endParaRPr/>
           </a:p>
         </p:txBody>
       </p:sp>
@@ -43328,10 +43724,11 @@
           </a:fontRef>
         </p:style>
         <p:txBody>
-          <a:bodyPr rtlCol="0" anchor="ctr" wrap="none"/>
+          <a:bodyPr wrap="none" rtlCol="0" anchor="ctr"/>
           <a:lstStyle/>
           <a:p>
             <a:pPr algn="ctr"/>
+            <a:endParaRPr/>
           </a:p>
         </p:txBody>
       </p:sp>
@@ -43372,10 +43769,11 @@
           </a:fontRef>
         </p:style>
         <p:txBody>
-          <a:bodyPr rtlCol="0" anchor="ctr" wrap="none"/>
+          <a:bodyPr wrap="none" rtlCol="0" anchor="ctr"/>
           <a:lstStyle/>
           <a:p>
             <a:pPr algn="ctr"/>
+            <a:endParaRPr/>
           </a:p>
         </p:txBody>
       </p:sp>
@@ -43416,10 +43814,11 @@
           </a:fontRef>
         </p:style>
         <p:txBody>
-          <a:bodyPr rtlCol="0" anchor="ctr" wrap="none"/>
+          <a:bodyPr wrap="none" rtlCol="0" anchor="ctr"/>
           <a:lstStyle/>
           <a:p>
             <a:pPr algn="ctr"/>
+            <a:endParaRPr/>
           </a:p>
         </p:txBody>
       </p:sp>
@@ -43460,10 +43859,11 @@
           </a:fontRef>
         </p:style>
         <p:txBody>
-          <a:bodyPr rtlCol="0" anchor="ctr" wrap="none"/>
+          <a:bodyPr wrap="none" rtlCol="0" anchor="ctr"/>
           <a:lstStyle/>
           <a:p>
             <a:pPr algn="ctr"/>
+            <a:endParaRPr/>
           </a:p>
         </p:txBody>
       </p:sp>
@@ -43504,10 +43904,11 @@
           </a:fontRef>
         </p:style>
         <p:txBody>
-          <a:bodyPr rtlCol="0" anchor="ctr" wrap="none"/>
+          <a:bodyPr wrap="none" rtlCol="0" anchor="ctr"/>
           <a:lstStyle/>
           <a:p>
             <a:pPr algn="ctr"/>
+            <a:endParaRPr/>
           </a:p>
         </p:txBody>
       </p:sp>
@@ -43548,10 +43949,11 @@
           </a:fontRef>
         </p:style>
         <p:txBody>
-          <a:bodyPr rtlCol="0" anchor="ctr" wrap="none"/>
+          <a:bodyPr wrap="none" rtlCol="0" anchor="ctr"/>
           <a:lstStyle/>
           <a:p>
             <a:pPr algn="ctr"/>
+            <a:endParaRPr/>
           </a:p>
         </p:txBody>
       </p:sp>
@@ -43592,10 +43994,11 @@
           </a:fontRef>
         </p:style>
         <p:txBody>
-          <a:bodyPr rtlCol="0" anchor="ctr" wrap="none"/>
+          <a:bodyPr wrap="none" rtlCol="0" anchor="ctr"/>
           <a:lstStyle/>
           <a:p>
             <a:pPr algn="ctr"/>
+            <a:endParaRPr/>
           </a:p>
         </p:txBody>
       </p:sp>
@@ -43636,10 +44039,11 @@
           </a:fontRef>
         </p:style>
         <p:txBody>
-          <a:bodyPr rtlCol="0" anchor="ctr" wrap="none"/>
+          <a:bodyPr wrap="none" rtlCol="0" anchor="ctr"/>
           <a:lstStyle/>
           <a:p>
             <a:pPr algn="ctr"/>
+            <a:endParaRPr/>
           </a:p>
         </p:txBody>
       </p:sp>
@@ -43680,10 +44084,11 @@
           </a:fontRef>
         </p:style>
         <p:txBody>
-          <a:bodyPr rtlCol="0" anchor="ctr" wrap="none"/>
+          <a:bodyPr wrap="none" rtlCol="0" anchor="ctr"/>
           <a:lstStyle/>
           <a:p>
             <a:pPr algn="ctr"/>
+            <a:endParaRPr/>
           </a:p>
         </p:txBody>
       </p:sp>
@@ -43724,10 +44129,11 @@
           </a:fontRef>
         </p:style>
         <p:txBody>
-          <a:bodyPr rtlCol="0" anchor="ctr" wrap="none"/>
+          <a:bodyPr wrap="none" rtlCol="0" anchor="ctr"/>
           <a:lstStyle/>
           <a:p>
             <a:pPr algn="ctr"/>
+            <a:endParaRPr/>
           </a:p>
         </p:txBody>
       </p:sp>
@@ -43768,10 +44174,11 @@
           </a:fontRef>
         </p:style>
         <p:txBody>
-          <a:bodyPr rtlCol="0" anchor="ctr" wrap="none"/>
+          <a:bodyPr wrap="none" rtlCol="0" anchor="ctr"/>
           <a:lstStyle/>
           <a:p>
             <a:pPr algn="ctr"/>
+            <a:endParaRPr/>
           </a:p>
         </p:txBody>
       </p:sp>
@@ -43812,10 +44219,11 @@
           </a:fontRef>
         </p:style>
         <p:txBody>
-          <a:bodyPr rtlCol="0" anchor="ctr" wrap="none"/>
+          <a:bodyPr wrap="none" rtlCol="0" anchor="ctr"/>
           <a:lstStyle/>
           <a:p>
             <a:pPr algn="ctr"/>
+            <a:endParaRPr/>
           </a:p>
         </p:txBody>
       </p:sp>
@@ -43856,10 +44264,11 @@
           </a:fontRef>
         </p:style>
         <p:txBody>
-          <a:bodyPr rtlCol="0" anchor="ctr" wrap="none"/>
+          <a:bodyPr wrap="none" rtlCol="0" anchor="ctr"/>
           <a:lstStyle/>
           <a:p>
             <a:pPr algn="ctr"/>
+            <a:endParaRPr/>
           </a:p>
         </p:txBody>
       </p:sp>
@@ -43900,10 +44309,11 @@
           </a:fontRef>
         </p:style>
         <p:txBody>
-          <a:bodyPr rtlCol="0" anchor="ctr" wrap="none"/>
+          <a:bodyPr wrap="none" rtlCol="0" anchor="ctr"/>
           <a:lstStyle/>
           <a:p>
             <a:pPr algn="ctr"/>
+            <a:endParaRPr/>
           </a:p>
         </p:txBody>
       </p:sp>
@@ -43944,10 +44354,11 @@
           </a:fontRef>
         </p:style>
         <p:txBody>
-          <a:bodyPr rtlCol="0" anchor="ctr" wrap="none"/>
+          <a:bodyPr wrap="none" rtlCol="0" anchor="ctr"/>
           <a:lstStyle/>
           <a:p>
             <a:pPr algn="ctr"/>
+            <a:endParaRPr/>
           </a:p>
         </p:txBody>
       </p:sp>
@@ -43988,10 +44399,11 @@
           </a:fontRef>
         </p:style>
         <p:txBody>
-          <a:bodyPr rtlCol="0" anchor="ctr" wrap="none"/>
+          <a:bodyPr wrap="none" rtlCol="0" anchor="ctr"/>
           <a:lstStyle/>
           <a:p>
             <a:pPr algn="ctr"/>
+            <a:endParaRPr/>
           </a:p>
         </p:txBody>
       </p:sp>
@@ -44032,10 +44444,11 @@
           </a:fontRef>
         </p:style>
         <p:txBody>
-          <a:bodyPr rtlCol="0" anchor="ctr" wrap="none"/>
+          <a:bodyPr wrap="none" rtlCol="0" anchor="ctr"/>
           <a:lstStyle/>
           <a:p>
             <a:pPr algn="ctr"/>
+            <a:endParaRPr/>
           </a:p>
         </p:txBody>
       </p:sp>
@@ -44076,10 +44489,11 @@
           </a:fontRef>
         </p:style>
         <p:txBody>
-          <a:bodyPr rtlCol="0" anchor="ctr" wrap="none"/>
+          <a:bodyPr wrap="none" rtlCol="0" anchor="ctr"/>
           <a:lstStyle/>
           <a:p>
             <a:pPr algn="ctr"/>
+            <a:endParaRPr/>
           </a:p>
         </p:txBody>
       </p:sp>
@@ -44120,10 +44534,11 @@
           </a:fontRef>
         </p:style>
         <p:txBody>
-          <a:bodyPr rtlCol="0" anchor="ctr" wrap="none"/>
+          <a:bodyPr wrap="none" rtlCol="0" anchor="ctr"/>
           <a:lstStyle/>
           <a:p>
             <a:pPr algn="ctr"/>
+            <a:endParaRPr/>
           </a:p>
         </p:txBody>
       </p:sp>
@@ -44164,10 +44579,11 @@
           </a:fontRef>
         </p:style>
         <p:txBody>
-          <a:bodyPr rtlCol="0" anchor="ctr" wrap="none"/>
+          <a:bodyPr wrap="none" rtlCol="0" anchor="ctr"/>
           <a:lstStyle/>
           <a:p>
             <a:pPr algn="ctr"/>
+            <a:endParaRPr/>
           </a:p>
         </p:txBody>
       </p:sp>
@@ -44208,10 +44624,11 @@
           </a:fontRef>
         </p:style>
         <p:txBody>
-          <a:bodyPr rtlCol="0" anchor="ctr" wrap="none"/>
+          <a:bodyPr wrap="none" rtlCol="0" anchor="ctr"/>
           <a:lstStyle/>
           <a:p>
             <a:pPr algn="ctr"/>
+            <a:endParaRPr/>
           </a:p>
         </p:txBody>
       </p:sp>
@@ -44252,10 +44669,11 @@
           </a:fontRef>
         </p:style>
         <p:txBody>
-          <a:bodyPr rtlCol="0" anchor="ctr" wrap="none"/>
+          <a:bodyPr wrap="none" rtlCol="0" anchor="ctr"/>
           <a:lstStyle/>
           <a:p>
             <a:pPr algn="ctr"/>
+            <a:endParaRPr/>
           </a:p>
         </p:txBody>
       </p:sp>
@@ -44311,7 +44729,7 @@
           <a:noFill/>
         </p:spPr>
         <p:txBody>
-          <a:bodyPr wrap="square" anchor="t" lIns="0" rIns="0" tIns="0" bIns="0">
+          <a:bodyPr wrap="square" lIns="0" tIns="0" rIns="0" bIns="0" anchor="t">
             <a:spAutoFit/>
           </a:bodyPr>
           <a:lstStyle/>
@@ -44388,7 +44806,7 @@
           <a:noFill/>
         </p:spPr>
         <p:txBody>
-          <a:bodyPr wrap="square" anchor="t" lIns="0" rIns="0" tIns="0" bIns="0">
+          <a:bodyPr wrap="square" lIns="0" tIns="0" rIns="0" bIns="0" anchor="t">
             <a:spAutoFit/>
           </a:bodyPr>
           <a:lstStyle/>
@@ -44465,7 +44883,7 @@
           <a:noFill/>
         </p:spPr>
         <p:txBody>
-          <a:bodyPr wrap="square" anchor="t" lIns="0" rIns="0" tIns="0" bIns="0">
+          <a:bodyPr wrap="square" lIns="0" tIns="0" rIns="0" bIns="0" anchor="t">
             <a:spAutoFit/>
           </a:bodyPr>
           <a:lstStyle/>
@@ -44542,7 +44960,7 @@
           <a:noFill/>
         </p:spPr>
         <p:txBody>
-          <a:bodyPr wrap="square" anchor="t" lIns="0" rIns="0" tIns="0" bIns="0">
+          <a:bodyPr wrap="square" lIns="0" tIns="0" rIns="0" bIns="0" anchor="t">
             <a:spAutoFit/>
           </a:bodyPr>
           <a:lstStyle/>
@@ -44619,7 +45037,7 @@
           <a:noFill/>
         </p:spPr>
         <p:txBody>
-          <a:bodyPr wrap="square" anchor="t" lIns="0" rIns="0" tIns="0" bIns="0">
+          <a:bodyPr wrap="square" lIns="0" tIns="0" rIns="0" bIns="0" anchor="t">
             <a:spAutoFit/>
           </a:bodyPr>
           <a:lstStyle/>
@@ -44661,7 +45079,7 @@
           <a:noFill/>
         </p:spPr>
         <p:txBody>
-          <a:bodyPr wrap="square" anchor="t" lIns="0" rIns="0" tIns="0" bIns="0">
+          <a:bodyPr wrap="square" lIns="0" tIns="0" rIns="0" bIns="0" anchor="t">
             <a:spAutoFit/>
           </a:bodyPr>
           <a:lstStyle/>
@@ -44727,10 +45145,11 @@
           </a:fontRef>
         </p:style>
         <p:txBody>
-          <a:bodyPr rtlCol="0" anchor="ctr" wrap="none"/>
+          <a:bodyPr wrap="none" rtlCol="0" anchor="ctr"/>
           <a:lstStyle/>
           <a:p>
             <a:pPr algn="ctr"/>
+            <a:endParaRPr/>
           </a:p>
         </p:txBody>
       </p:sp>
@@ -44773,10 +45192,11 @@
           </a:fontRef>
         </p:style>
         <p:txBody>
-          <a:bodyPr rtlCol="0" anchor="ctr" wrap="none"/>
+          <a:bodyPr wrap="none" rtlCol="0" anchor="ctr"/>
           <a:lstStyle/>
           <a:p>
             <a:pPr algn="ctr"/>
+            <a:endParaRPr/>
           </a:p>
         </p:txBody>
       </p:sp>
@@ -44817,10 +45237,11 @@
           </a:fontRef>
         </p:style>
         <p:txBody>
-          <a:bodyPr rtlCol="0" anchor="ctr" wrap="none"/>
+          <a:bodyPr wrap="none" rtlCol="0" anchor="ctr"/>
           <a:lstStyle/>
           <a:p>
             <a:pPr algn="ctr"/>
+            <a:endParaRPr/>
           </a:p>
         </p:txBody>
       </p:sp>
@@ -44841,7 +45262,7 @@
           <a:noFill/>
         </p:spPr>
         <p:txBody>
-          <a:bodyPr wrap="square" anchor="ctr" lIns="0" rIns="0" tIns="0" bIns="0">
+          <a:bodyPr wrap="square" lIns="0" tIns="0" rIns="0" bIns="0" anchor="ctr">
             <a:spAutoFit/>
           </a:bodyPr>
           <a:lstStyle/>
@@ -44903,10 +45324,11 @@
           </a:fontRef>
         </p:style>
         <p:txBody>
-          <a:bodyPr rtlCol="0" anchor="ctr" wrap="none"/>
+          <a:bodyPr wrap="none" rtlCol="0" anchor="ctr"/>
           <a:lstStyle/>
           <a:p>
             <a:pPr algn="ctr"/>
+            <a:endParaRPr/>
           </a:p>
         </p:txBody>
       </p:sp>
@@ -44927,7 +45349,7 @@
           <a:noFill/>
         </p:spPr>
         <p:txBody>
-          <a:bodyPr wrap="square" anchor="ctr" lIns="0" rIns="0" tIns="0" bIns="0">
+          <a:bodyPr wrap="square" lIns="0" tIns="0" rIns="0" bIns="0" anchor="ctr">
             <a:spAutoFit/>
           </a:bodyPr>
           <a:lstStyle/>
@@ -44969,7 +45391,7 @@
           <a:noFill/>
         </p:spPr>
         <p:txBody>
-          <a:bodyPr wrap="square" anchor="ctr" lIns="0" rIns="0" tIns="0" bIns="0">
+          <a:bodyPr wrap="square" lIns="0" tIns="0" rIns="0" bIns="0" anchor="ctr">
             <a:spAutoFit/>
           </a:bodyPr>
           <a:lstStyle/>
@@ -45011,7 +45433,7 @@
           <a:noFill/>
         </p:spPr>
         <p:txBody>
-          <a:bodyPr wrap="square" anchor="ctr" lIns="0" rIns="0" tIns="0" bIns="0">
+          <a:bodyPr wrap="square" lIns="0" tIns="0" rIns="0" bIns="0" anchor="ctr">
             <a:spAutoFit/>
           </a:bodyPr>
           <a:lstStyle/>
@@ -45053,7 +45475,7 @@
           <a:noFill/>
         </p:spPr>
         <p:txBody>
-          <a:bodyPr wrap="square" anchor="ctr" lIns="0" rIns="0" tIns="0" bIns="0">
+          <a:bodyPr wrap="square" lIns="0" tIns="0" rIns="0" bIns="0" anchor="ctr">
             <a:spAutoFit/>
           </a:bodyPr>
           <a:lstStyle/>
@@ -45095,7 +45517,7 @@
           <a:noFill/>
         </p:spPr>
         <p:txBody>
-          <a:bodyPr wrap="square" anchor="ctr" lIns="0" rIns="0" tIns="0" bIns="0">
+          <a:bodyPr wrap="square" lIns="0" tIns="0" rIns="0" bIns="0" anchor="ctr">
             <a:spAutoFit/>
           </a:bodyPr>
           <a:lstStyle/>
@@ -45137,7 +45559,7 @@
           <a:noFill/>
         </p:spPr>
         <p:txBody>
-          <a:bodyPr wrap="square" anchor="ctr" lIns="0" rIns="0" tIns="0" bIns="0">
+          <a:bodyPr wrap="square" lIns="0" tIns="0" rIns="0" bIns="0" anchor="ctr">
             <a:spAutoFit/>
           </a:bodyPr>
           <a:lstStyle/>
@@ -45179,7 +45601,7 @@
           <a:noFill/>
         </p:spPr>
         <p:txBody>
-          <a:bodyPr wrap="square" anchor="ctr" lIns="0" rIns="0" tIns="0" bIns="0">
+          <a:bodyPr wrap="square" lIns="0" tIns="0" rIns="0" bIns="0" anchor="ctr">
             <a:spAutoFit/>
           </a:bodyPr>
           <a:lstStyle/>
@@ -45221,7 +45643,7 @@
           <a:noFill/>
         </p:spPr>
         <p:txBody>
-          <a:bodyPr wrap="square" anchor="ctr" lIns="0" rIns="0" tIns="0" bIns="0">
+          <a:bodyPr wrap="square" lIns="0" tIns="0" rIns="0" bIns="0" anchor="ctr">
             <a:spAutoFit/>
           </a:bodyPr>
           <a:lstStyle/>
@@ -45283,10 +45705,11 @@
           </a:fontRef>
         </p:style>
         <p:txBody>
-          <a:bodyPr rtlCol="0" anchor="ctr" wrap="none"/>
+          <a:bodyPr wrap="none" rtlCol="0" anchor="ctr"/>
           <a:lstStyle/>
           <a:p>
             <a:pPr algn="ctr"/>
+            <a:endParaRPr/>
           </a:p>
         </p:txBody>
       </p:sp>
@@ -45307,7 +45730,7 @@
           <a:noFill/>
         </p:spPr>
         <p:txBody>
-          <a:bodyPr wrap="square" anchor="ctr" lIns="0" rIns="0" tIns="0" bIns="0">
+          <a:bodyPr wrap="square" lIns="0" tIns="0" rIns="0" bIns="0" anchor="ctr">
             <a:spAutoFit/>
           </a:bodyPr>
           <a:lstStyle/>
@@ -45349,7 +45772,7 @@
           <a:noFill/>
         </p:spPr>
         <p:txBody>
-          <a:bodyPr wrap="square" anchor="ctr" lIns="0" rIns="0" tIns="0" bIns="0">
+          <a:bodyPr wrap="square" lIns="0" tIns="0" rIns="0" bIns="0" anchor="ctr">
             <a:spAutoFit/>
           </a:bodyPr>
           <a:lstStyle/>
@@ -45391,7 +45814,7 @@
           <a:noFill/>
         </p:spPr>
         <p:txBody>
-          <a:bodyPr wrap="square" anchor="ctr" lIns="0" rIns="0" tIns="0" bIns="0">
+          <a:bodyPr wrap="square" lIns="0" tIns="0" rIns="0" bIns="0" anchor="ctr">
             <a:spAutoFit/>
           </a:bodyPr>
           <a:lstStyle/>
@@ -45433,7 +45856,7 @@
           <a:noFill/>
         </p:spPr>
         <p:txBody>
-          <a:bodyPr wrap="square" anchor="ctr" lIns="0" rIns="0" tIns="0" bIns="0">
+          <a:bodyPr wrap="square" lIns="0" tIns="0" rIns="0" bIns="0" anchor="ctr">
             <a:spAutoFit/>
           </a:bodyPr>
           <a:lstStyle/>
@@ -45475,7 +45898,7 @@
           <a:noFill/>
         </p:spPr>
         <p:txBody>
-          <a:bodyPr wrap="square" anchor="ctr" lIns="0" rIns="0" tIns="0" bIns="0">
+          <a:bodyPr wrap="square" lIns="0" tIns="0" rIns="0" bIns="0" anchor="ctr">
             <a:spAutoFit/>
           </a:bodyPr>
           <a:lstStyle/>
@@ -45517,7 +45940,7 @@
           <a:noFill/>
         </p:spPr>
         <p:txBody>
-          <a:bodyPr wrap="square" anchor="ctr" lIns="0" rIns="0" tIns="0" bIns="0">
+          <a:bodyPr wrap="square" lIns="0" tIns="0" rIns="0" bIns="0" anchor="ctr">
             <a:spAutoFit/>
           </a:bodyPr>
           <a:lstStyle/>
@@ -45559,7 +45982,7 @@
           <a:noFill/>
         </p:spPr>
         <p:txBody>
-          <a:bodyPr wrap="square" anchor="ctr" lIns="0" rIns="0" tIns="0" bIns="0">
+          <a:bodyPr wrap="square" lIns="0" tIns="0" rIns="0" bIns="0" anchor="ctr">
             <a:spAutoFit/>
           </a:bodyPr>
           <a:lstStyle/>
@@ -45601,7 +46024,7 @@
           <a:noFill/>
         </p:spPr>
         <p:txBody>
-          <a:bodyPr wrap="square" anchor="ctr" lIns="0" rIns="0" tIns="0" bIns="0">
+          <a:bodyPr wrap="square" lIns="0" tIns="0" rIns="0" bIns="0" anchor="ctr">
             <a:spAutoFit/>
           </a:bodyPr>
           <a:lstStyle/>
@@ -45698,10 +46121,11 @@
           </a:fontRef>
         </p:style>
         <p:txBody>
-          <a:bodyPr rtlCol="0" anchor="ctr" wrap="none"/>
+          <a:bodyPr wrap="none" rtlCol="0" anchor="ctr"/>
           <a:lstStyle/>
           <a:p>
             <a:pPr algn="ctr"/>
+            <a:endParaRPr/>
           </a:p>
         </p:txBody>
       </p:sp>
@@ -45722,7 +46146,7 @@
           <a:noFill/>
         </p:spPr>
         <p:txBody>
-          <a:bodyPr wrap="square" anchor="ctr" lIns="0" rIns="0" tIns="0" bIns="0">
+          <a:bodyPr wrap="square" lIns="0" tIns="0" rIns="0" bIns="0" anchor="ctr">
             <a:spAutoFit/>
           </a:bodyPr>
           <a:lstStyle/>
@@ -45764,7 +46188,7 @@
           <a:noFill/>
         </p:spPr>
         <p:txBody>
-          <a:bodyPr wrap="square" anchor="ctr" lIns="0" rIns="0" tIns="0" bIns="0">
+          <a:bodyPr wrap="square" lIns="0" tIns="0" rIns="0" bIns="0" anchor="ctr">
             <a:spAutoFit/>
           </a:bodyPr>
           <a:lstStyle/>
@@ -45806,7 +46230,7 @@
           <a:noFill/>
         </p:spPr>
         <p:txBody>
-          <a:bodyPr wrap="square" anchor="ctr" lIns="0" rIns="0" tIns="0" bIns="0">
+          <a:bodyPr wrap="square" lIns="0" tIns="0" rIns="0" bIns="0" anchor="ctr">
             <a:spAutoFit/>
           </a:bodyPr>
           <a:lstStyle/>
@@ -45848,7 +46272,7 @@
           <a:noFill/>
         </p:spPr>
         <p:txBody>
-          <a:bodyPr wrap="square" anchor="ctr" lIns="0" rIns="0" tIns="0" bIns="0">
+          <a:bodyPr wrap="square" lIns="0" tIns="0" rIns="0" bIns="0" anchor="ctr">
             <a:spAutoFit/>
           </a:bodyPr>
           <a:lstStyle/>
@@ -45890,7 +46314,7 @@
           <a:noFill/>
         </p:spPr>
         <p:txBody>
-          <a:bodyPr wrap="square" anchor="ctr" lIns="0" rIns="0" tIns="0" bIns="0">
+          <a:bodyPr wrap="square" lIns="0" tIns="0" rIns="0" bIns="0" anchor="ctr">
             <a:spAutoFit/>
           </a:bodyPr>
           <a:lstStyle/>
@@ -45932,7 +46356,7 @@
           <a:noFill/>
         </p:spPr>
         <p:txBody>
-          <a:bodyPr wrap="square" anchor="ctr" lIns="0" rIns="0" tIns="0" bIns="0">
+          <a:bodyPr wrap="square" lIns="0" tIns="0" rIns="0" bIns="0" anchor="ctr">
             <a:spAutoFit/>
           </a:bodyPr>
           <a:lstStyle/>
@@ -45974,7 +46398,7 @@
           <a:noFill/>
         </p:spPr>
         <p:txBody>
-          <a:bodyPr wrap="square" anchor="ctr" lIns="0" rIns="0" tIns="0" bIns="0">
+          <a:bodyPr wrap="square" lIns="0" tIns="0" rIns="0" bIns="0" anchor="ctr">
             <a:spAutoFit/>
           </a:bodyPr>
           <a:lstStyle/>
@@ -46016,7 +46440,7 @@
           <a:noFill/>
         </p:spPr>
         <p:txBody>
-          <a:bodyPr wrap="square" anchor="ctr" lIns="0" rIns="0" tIns="0" bIns="0">
+          <a:bodyPr wrap="square" lIns="0" tIns="0" rIns="0" bIns="0" anchor="ctr">
             <a:spAutoFit/>
           </a:bodyPr>
           <a:lstStyle/>
@@ -46113,10 +46537,11 @@
           </a:fontRef>
         </p:style>
         <p:txBody>
-          <a:bodyPr rtlCol="0" anchor="ctr" wrap="none"/>
+          <a:bodyPr wrap="none" rtlCol="0" anchor="ctr"/>
           <a:lstStyle/>
           <a:p>
             <a:pPr algn="ctr"/>
+            <a:endParaRPr/>
           </a:p>
         </p:txBody>
       </p:sp>
@@ -46137,7 +46562,7 @@
           <a:noFill/>
         </p:spPr>
         <p:txBody>
-          <a:bodyPr wrap="square" anchor="ctr" lIns="0" rIns="0" tIns="0" bIns="0">
+          <a:bodyPr wrap="square" lIns="0" tIns="0" rIns="0" bIns="0" anchor="ctr">
             <a:spAutoFit/>
           </a:bodyPr>
           <a:lstStyle/>
@@ -46179,7 +46604,7 @@
           <a:noFill/>
         </p:spPr>
         <p:txBody>
-          <a:bodyPr wrap="square" anchor="ctr" lIns="0" rIns="0" tIns="0" bIns="0">
+          <a:bodyPr wrap="square" lIns="0" tIns="0" rIns="0" bIns="0" anchor="ctr">
             <a:spAutoFit/>
           </a:bodyPr>
           <a:lstStyle/>
@@ -46221,7 +46646,7 @@
           <a:noFill/>
         </p:spPr>
         <p:txBody>
-          <a:bodyPr wrap="square" anchor="ctr" lIns="0" rIns="0" tIns="0" bIns="0">
+          <a:bodyPr wrap="square" lIns="0" tIns="0" rIns="0" bIns="0" anchor="ctr">
             <a:spAutoFit/>
           </a:bodyPr>
           <a:lstStyle/>
@@ -46263,7 +46688,7 @@
           <a:noFill/>
         </p:spPr>
         <p:txBody>
-          <a:bodyPr wrap="square" anchor="ctr" lIns="0" rIns="0" tIns="0" bIns="0">
+          <a:bodyPr wrap="square" lIns="0" tIns="0" rIns="0" bIns="0" anchor="ctr">
             <a:spAutoFit/>
           </a:bodyPr>
           <a:lstStyle/>
@@ -46305,7 +46730,7 @@
           <a:noFill/>
         </p:spPr>
         <p:txBody>
-          <a:bodyPr wrap="square" anchor="ctr" lIns="0" rIns="0" tIns="0" bIns="0">
+          <a:bodyPr wrap="square" lIns="0" tIns="0" rIns="0" bIns="0" anchor="ctr">
             <a:spAutoFit/>
           </a:bodyPr>
           <a:lstStyle/>
@@ -46347,7 +46772,7 @@
           <a:noFill/>
         </p:spPr>
         <p:txBody>
-          <a:bodyPr wrap="square" anchor="ctr" lIns="0" rIns="0" tIns="0" bIns="0">
+          <a:bodyPr wrap="square" lIns="0" tIns="0" rIns="0" bIns="0" anchor="ctr">
             <a:spAutoFit/>
           </a:bodyPr>
           <a:lstStyle/>
@@ -46389,7 +46814,7 @@
           <a:noFill/>
         </p:spPr>
         <p:txBody>
-          <a:bodyPr wrap="square" anchor="ctr" lIns="0" rIns="0" tIns="0" bIns="0">
+          <a:bodyPr wrap="square" lIns="0" tIns="0" rIns="0" bIns="0" anchor="ctr">
             <a:spAutoFit/>
           </a:bodyPr>
           <a:lstStyle/>
@@ -46431,7 +46856,7 @@
           <a:noFill/>
         </p:spPr>
         <p:txBody>
-          <a:bodyPr wrap="square" anchor="ctr" lIns="0" rIns="0" tIns="0" bIns="0">
+          <a:bodyPr wrap="square" lIns="0" tIns="0" rIns="0" bIns="0" anchor="ctr">
             <a:spAutoFit/>
           </a:bodyPr>
           <a:lstStyle/>
@@ -46528,10 +46953,11 @@
           </a:fontRef>
         </p:style>
         <p:txBody>
-          <a:bodyPr rtlCol="0" anchor="ctr" wrap="none"/>
+          <a:bodyPr wrap="none" rtlCol="0" anchor="ctr"/>
           <a:lstStyle/>
           <a:p>
             <a:pPr algn="ctr"/>
+            <a:endParaRPr/>
           </a:p>
         </p:txBody>
       </p:sp>
@@ -46552,7 +46978,7 @@
           <a:noFill/>
         </p:spPr>
         <p:txBody>
-          <a:bodyPr wrap="square" anchor="ctr" lIns="0" rIns="0" tIns="0" bIns="0">
+          <a:bodyPr wrap="square" lIns="0" tIns="0" rIns="0" bIns="0" anchor="ctr">
             <a:spAutoFit/>
           </a:bodyPr>
           <a:lstStyle/>
@@ -46594,7 +47020,7 @@
           <a:noFill/>
         </p:spPr>
         <p:txBody>
-          <a:bodyPr wrap="square" anchor="ctr" lIns="0" rIns="0" tIns="0" bIns="0">
+          <a:bodyPr wrap="square" lIns="0" tIns="0" rIns="0" bIns="0" anchor="ctr">
             <a:spAutoFit/>
           </a:bodyPr>
           <a:lstStyle/>
@@ -46636,7 +47062,7 @@
           <a:noFill/>
         </p:spPr>
         <p:txBody>
-          <a:bodyPr wrap="square" anchor="ctr" lIns="0" rIns="0" tIns="0" bIns="0">
+          <a:bodyPr wrap="square" lIns="0" tIns="0" rIns="0" bIns="0" anchor="ctr">
             <a:spAutoFit/>
           </a:bodyPr>
           <a:lstStyle/>
@@ -46678,7 +47104,7 @@
           <a:noFill/>
         </p:spPr>
         <p:txBody>
-          <a:bodyPr wrap="square" anchor="ctr" lIns="0" rIns="0" tIns="0" bIns="0">
+          <a:bodyPr wrap="square" lIns="0" tIns="0" rIns="0" bIns="0" anchor="ctr">
             <a:spAutoFit/>
           </a:bodyPr>
           <a:lstStyle/>
@@ -46720,7 +47146,7 @@
           <a:noFill/>
         </p:spPr>
         <p:txBody>
-          <a:bodyPr wrap="square" anchor="ctr" lIns="0" rIns="0" tIns="0" bIns="0">
+          <a:bodyPr wrap="square" lIns="0" tIns="0" rIns="0" bIns="0" anchor="ctr">
             <a:spAutoFit/>
           </a:bodyPr>
           <a:lstStyle/>
@@ -46762,7 +47188,7 @@
           <a:noFill/>
         </p:spPr>
         <p:txBody>
-          <a:bodyPr wrap="square" anchor="ctr" lIns="0" rIns="0" tIns="0" bIns="0">
+          <a:bodyPr wrap="square" lIns="0" tIns="0" rIns="0" bIns="0" anchor="ctr">
             <a:spAutoFit/>
           </a:bodyPr>
           <a:lstStyle/>
@@ -46804,7 +47230,7 @@
           <a:noFill/>
         </p:spPr>
         <p:txBody>
-          <a:bodyPr wrap="square" anchor="ctr" lIns="0" rIns="0" tIns="0" bIns="0">
+          <a:bodyPr wrap="square" lIns="0" tIns="0" rIns="0" bIns="0" anchor="ctr">
             <a:spAutoFit/>
           </a:bodyPr>
           <a:lstStyle/>
@@ -46846,7 +47272,7 @@
           <a:noFill/>
         </p:spPr>
         <p:txBody>
-          <a:bodyPr wrap="square" anchor="ctr" lIns="0" rIns="0" tIns="0" bIns="0">
+          <a:bodyPr wrap="square" lIns="0" tIns="0" rIns="0" bIns="0" anchor="ctr">
             <a:spAutoFit/>
           </a:bodyPr>
           <a:lstStyle/>
@@ -46943,10 +47369,11 @@
           </a:fontRef>
         </p:style>
         <p:txBody>
-          <a:bodyPr rtlCol="0" anchor="ctr" wrap="none"/>
+          <a:bodyPr wrap="none" rtlCol="0" anchor="ctr"/>
           <a:lstStyle/>
           <a:p>
             <a:pPr algn="ctr"/>
+            <a:endParaRPr/>
           </a:p>
         </p:txBody>
       </p:sp>
@@ -46987,10 +47414,11 @@
           </a:fontRef>
         </p:style>
         <p:txBody>
-          <a:bodyPr rtlCol="0" anchor="ctr" wrap="none"/>
+          <a:bodyPr wrap="none" rtlCol="0" anchor="ctr"/>
           <a:lstStyle/>
           <a:p>
             <a:pPr algn="ctr"/>
+            <a:endParaRPr/>
           </a:p>
         </p:txBody>
       </p:sp>
@@ -47011,7 +47439,7 @@
           <a:noFill/>
         </p:spPr>
         <p:txBody>
-          <a:bodyPr wrap="square" anchor="ctr" lIns="0" rIns="0" tIns="0" bIns="0">
+          <a:bodyPr wrap="square" lIns="0" tIns="0" rIns="0" bIns="0" anchor="ctr">
             <a:spAutoFit/>
           </a:bodyPr>
           <a:lstStyle/>
@@ -47053,7 +47481,7 @@
           <a:noFill/>
         </p:spPr>
         <p:txBody>
-          <a:bodyPr wrap="square" anchor="ctr" lIns="0" rIns="0" tIns="0" bIns="0">
+          <a:bodyPr wrap="square" lIns="0" tIns="0" rIns="0" bIns="0" anchor="ctr">
             <a:spAutoFit/>
           </a:bodyPr>
           <a:lstStyle/>
@@ -47095,7 +47523,7 @@
           <a:noFill/>
         </p:spPr>
         <p:txBody>
-          <a:bodyPr wrap="square" anchor="ctr" lIns="0" rIns="0" tIns="0" bIns="0">
+          <a:bodyPr wrap="square" lIns="0" tIns="0" rIns="0" bIns="0" anchor="ctr">
             <a:spAutoFit/>
           </a:bodyPr>
           <a:lstStyle/>
@@ -47137,7 +47565,7 @@
           <a:noFill/>
         </p:spPr>
         <p:txBody>
-          <a:bodyPr wrap="square" anchor="ctr" lIns="0" rIns="0" tIns="0" bIns="0">
+          <a:bodyPr wrap="square" lIns="0" tIns="0" rIns="0" bIns="0" anchor="ctr">
             <a:spAutoFit/>
           </a:bodyPr>
           <a:lstStyle/>
@@ -47179,7 +47607,7 @@
           <a:noFill/>
         </p:spPr>
         <p:txBody>
-          <a:bodyPr wrap="square" anchor="ctr" lIns="0" rIns="0" tIns="0" bIns="0">
+          <a:bodyPr wrap="square" lIns="0" tIns="0" rIns="0" bIns="0" anchor="ctr">
             <a:spAutoFit/>
           </a:bodyPr>
           <a:lstStyle/>
@@ -47221,7 +47649,7 @@
           <a:noFill/>
         </p:spPr>
         <p:txBody>
-          <a:bodyPr wrap="square" anchor="ctr" lIns="0" rIns="0" tIns="0" bIns="0">
+          <a:bodyPr wrap="square" lIns="0" tIns="0" rIns="0" bIns="0" anchor="ctr">
             <a:spAutoFit/>
           </a:bodyPr>
           <a:lstStyle/>
@@ -47263,7 +47691,7 @@
           <a:noFill/>
         </p:spPr>
         <p:txBody>
-          <a:bodyPr wrap="square" anchor="ctr" lIns="0" rIns="0" tIns="0" bIns="0">
+          <a:bodyPr wrap="square" lIns="0" tIns="0" rIns="0" bIns="0" anchor="ctr">
             <a:spAutoFit/>
           </a:bodyPr>
           <a:lstStyle/>
@@ -47305,7 +47733,7 @@
           <a:noFill/>
         </p:spPr>
         <p:txBody>
-          <a:bodyPr wrap="square" anchor="ctr" lIns="0" rIns="0" tIns="0" bIns="0">
+          <a:bodyPr wrap="square" lIns="0" tIns="0" rIns="0" bIns="0" anchor="ctr">
             <a:spAutoFit/>
           </a:bodyPr>
           <a:lstStyle/>
@@ -47402,10 +47830,11 @@
           </a:fontRef>
         </p:style>
         <p:txBody>
-          <a:bodyPr rtlCol="0" anchor="ctr" wrap="none"/>
+          <a:bodyPr wrap="none" rtlCol="0" anchor="ctr"/>
           <a:lstStyle/>
           <a:p>
             <a:pPr algn="ctr"/>
+            <a:endParaRPr/>
           </a:p>
         </p:txBody>
       </p:sp>
@@ -47426,7 +47855,7 @@
           <a:noFill/>
         </p:spPr>
         <p:txBody>
-          <a:bodyPr wrap="square" anchor="ctr" lIns="0" rIns="0" tIns="0" bIns="0">
+          <a:bodyPr wrap="square" lIns="0" tIns="0" rIns="0" bIns="0" anchor="ctr">
             <a:spAutoFit/>
           </a:bodyPr>
           <a:lstStyle/>
@@ -47468,7 +47897,7 @@
           <a:noFill/>
         </p:spPr>
         <p:txBody>
-          <a:bodyPr wrap="square" anchor="ctr" lIns="0" rIns="0" tIns="0" bIns="0">
+          <a:bodyPr wrap="square" lIns="0" tIns="0" rIns="0" bIns="0" anchor="ctr">
             <a:spAutoFit/>
           </a:bodyPr>
           <a:lstStyle/>
@@ -47510,7 +47939,7 @@
           <a:noFill/>
         </p:spPr>
         <p:txBody>
-          <a:bodyPr wrap="square" anchor="ctr" lIns="0" rIns="0" tIns="0" bIns="0">
+          <a:bodyPr wrap="square" lIns="0" tIns="0" rIns="0" bIns="0" anchor="ctr">
             <a:spAutoFit/>
           </a:bodyPr>
           <a:lstStyle/>
@@ -47552,7 +47981,7 @@
           <a:noFill/>
         </p:spPr>
         <p:txBody>
-          <a:bodyPr wrap="square" anchor="ctr" lIns="0" rIns="0" tIns="0" bIns="0">
+          <a:bodyPr wrap="square" lIns="0" tIns="0" rIns="0" bIns="0" anchor="ctr">
             <a:spAutoFit/>
           </a:bodyPr>
           <a:lstStyle/>
@@ -47594,7 +48023,7 @@
           <a:noFill/>
         </p:spPr>
         <p:txBody>
-          <a:bodyPr wrap="square" anchor="ctr" lIns="0" rIns="0" tIns="0" bIns="0">
+          <a:bodyPr wrap="square" lIns="0" tIns="0" rIns="0" bIns="0" anchor="ctr">
             <a:spAutoFit/>
           </a:bodyPr>
           <a:lstStyle/>
@@ -47636,7 +48065,7 @@
           <a:noFill/>
         </p:spPr>
         <p:txBody>
-          <a:bodyPr wrap="square" anchor="ctr" lIns="0" rIns="0" tIns="0" bIns="0">
+          <a:bodyPr wrap="square" lIns="0" tIns="0" rIns="0" bIns="0" anchor="ctr">
             <a:spAutoFit/>
           </a:bodyPr>
           <a:lstStyle/>
@@ -47678,7 +48107,7 @@
           <a:noFill/>
         </p:spPr>
         <p:txBody>
-          <a:bodyPr wrap="square" anchor="ctr" lIns="0" rIns="0" tIns="0" bIns="0">
+          <a:bodyPr wrap="square" lIns="0" tIns="0" rIns="0" bIns="0" anchor="ctr">
             <a:spAutoFit/>
           </a:bodyPr>
           <a:lstStyle/>
@@ -47720,7 +48149,7 @@
           <a:noFill/>
         </p:spPr>
         <p:txBody>
-          <a:bodyPr wrap="square" anchor="ctr" lIns="0" rIns="0" tIns="0" bIns="0">
+          <a:bodyPr wrap="square" lIns="0" tIns="0" rIns="0" bIns="0" anchor="ctr">
             <a:spAutoFit/>
           </a:bodyPr>
           <a:lstStyle/>
@@ -47817,10 +48246,11 @@
           </a:fontRef>
         </p:style>
         <p:txBody>
-          <a:bodyPr rtlCol="0" anchor="ctr" wrap="none"/>
+          <a:bodyPr wrap="none" rtlCol="0" anchor="ctr"/>
           <a:lstStyle/>
           <a:p>
             <a:pPr algn="ctr"/>
+            <a:endParaRPr/>
           </a:p>
         </p:txBody>
       </p:sp>
@@ -47865,10 +48295,11 @@
           </a:fontRef>
         </p:style>
         <p:txBody>
-          <a:bodyPr rtlCol="0" anchor="ctr" wrap="none"/>
+          <a:bodyPr wrap="none" rtlCol="0" anchor="ctr"/>
           <a:lstStyle/>
           <a:p>
             <a:pPr algn="ctr"/>
+            <a:endParaRPr/>
           </a:p>
         </p:txBody>
       </p:sp>
@@ -47911,10 +48342,11 @@
           </a:fontRef>
         </p:style>
         <p:txBody>
-          <a:bodyPr rtlCol="0" anchor="ctr" wrap="none"/>
+          <a:bodyPr wrap="none" rtlCol="0" anchor="ctr"/>
           <a:lstStyle/>
           <a:p>
             <a:pPr algn="ctr"/>
+            <a:endParaRPr/>
           </a:p>
         </p:txBody>
       </p:sp>
@@ -47955,10 +48387,11 @@
           </a:fontRef>
         </p:style>
         <p:txBody>
-          <a:bodyPr rtlCol="0" anchor="ctr" wrap="none"/>
+          <a:bodyPr wrap="none" rtlCol="0" anchor="ctr"/>
           <a:lstStyle/>
           <a:p>
             <a:pPr algn="ctr"/>
+            <a:endParaRPr/>
           </a:p>
         </p:txBody>
       </p:sp>
@@ -47979,7 +48412,7 @@
           <a:noFill/>
         </p:spPr>
         <p:txBody>
-          <a:bodyPr wrap="square" anchor="ctr" lIns="0" rIns="0" tIns="0" bIns="0">
+          <a:bodyPr wrap="square" lIns="0" tIns="0" rIns="0" bIns="0" anchor="ctr">
             <a:spAutoFit/>
           </a:bodyPr>
           <a:lstStyle/>
@@ -48013,7 +48446,7 @@
         <p:spPr>
           <a:xfrm>
             <a:off x="7955280" y="4133088"/>
-            <a:ext cx="3834079" cy="1463040"/>
+            <a:ext cx="3834079" cy="1095300"/>
           </a:xfrm>
           <a:prstGeom prst="rect">
             <a:avLst/>
@@ -48021,7 +48454,7 @@
           <a:noFill/>
         </p:spPr>
         <p:txBody>
-          <a:bodyPr wrap="square" anchor="t" lIns="0" rIns="0" tIns="0" bIns="0">
+          <a:bodyPr wrap="square" lIns="0" tIns="0" rIns="0" bIns="0" anchor="t">
             <a:spAutoFit/>
           </a:bodyPr>
           <a:lstStyle/>
@@ -48035,13 +48468,31 @@
               </a:spcAft>
             </a:pPr>
             <a:r>
-              <a:rPr sz="860" b="1">
+              <a:rPr sz="860" b="1" dirty="0">
                 <a:solidFill>
                   <a:srgbClr val="0B6BA8"/>
                 </a:solidFill>
                 <a:latin typeface="Microsoft YaHei"/>
               </a:rPr>
-              <a:t>XY 的「均衡」是牺牲换来的。</a:t>
+              <a:t>XY </a:t>
+            </a:r>
+            <a:r>
+              <a:rPr sz="860" b="1" dirty="0" err="1">
+                <a:solidFill>
+                  <a:srgbClr val="0B6BA8"/>
+                </a:solidFill>
+                <a:latin typeface="Microsoft YaHei"/>
+              </a:rPr>
+              <a:t>的「均衡」是牺牲换来的</a:t>
+            </a:r>
+            <a:r>
+              <a:rPr sz="860" b="1" dirty="0">
+                <a:solidFill>
+                  <a:srgbClr val="0B6BA8"/>
+                </a:solidFill>
+                <a:latin typeface="Microsoft YaHei"/>
+              </a:rPr>
+              <a:t>。</a:t>
             </a:r>
           </a:p>
           <a:p>
@@ -48054,13 +48505,112 @@
               </a:spcAft>
             </a:pPr>
             <a:r>
-              <a:rPr sz="819" b="0">
+              <a:rPr sz="819" b="0" dirty="0" err="1">
                 <a:solidFill>
                   <a:srgbClr val="5A6673"/>
                 </a:solidFill>
                 <a:latin typeface="Microsoft YaHei"/>
               </a:rPr>
-              <a:t>同一残图上 XY 必须丢掉 22/46 个好节点（整列 3、4 与整行 2、4）才有完整 L 形路径，剩下 24 个节点、552 对流量；M3′ 一个不丢。两者峰值不可直接比，只能各自比自己的割界。</a:t>
+              <a:t>同一残图上</a:t>
+            </a:r>
+            <a:r>
+              <a:rPr sz="819" b="0" dirty="0">
+                <a:solidFill>
+                  <a:srgbClr val="5A6673"/>
+                </a:solidFill>
+                <a:latin typeface="Microsoft YaHei"/>
+              </a:rPr>
+              <a:t> XY </a:t>
+            </a:r>
+            <a:r>
+              <a:rPr sz="819" b="0" dirty="0" err="1">
+                <a:solidFill>
+                  <a:srgbClr val="5A6673"/>
+                </a:solidFill>
+                <a:latin typeface="Microsoft YaHei"/>
+              </a:rPr>
+              <a:t>必须丢掉</a:t>
+            </a:r>
+            <a:r>
+              <a:rPr sz="819" b="0" dirty="0">
+                <a:solidFill>
+                  <a:srgbClr val="5A6673"/>
+                </a:solidFill>
+                <a:latin typeface="Microsoft YaHei"/>
+              </a:rPr>
+              <a:t> 22/46 </a:t>
+            </a:r>
+            <a:r>
+              <a:rPr sz="819" b="0" dirty="0" err="1">
+                <a:solidFill>
+                  <a:srgbClr val="5A6673"/>
+                </a:solidFill>
+                <a:latin typeface="Microsoft YaHei"/>
+              </a:rPr>
+              <a:t>个好节点（整列</a:t>
+            </a:r>
+            <a:r>
+              <a:rPr sz="819" b="0" dirty="0">
+                <a:solidFill>
+                  <a:srgbClr val="5A6673"/>
+                </a:solidFill>
+                <a:latin typeface="Microsoft YaHei"/>
+              </a:rPr>
+              <a:t> 3、4 </a:t>
+            </a:r>
+            <a:r>
+              <a:rPr sz="819" b="0" dirty="0" err="1">
+                <a:solidFill>
+                  <a:srgbClr val="5A6673"/>
+                </a:solidFill>
+                <a:latin typeface="Microsoft YaHei"/>
+              </a:rPr>
+              <a:t>与整行</a:t>
+            </a:r>
+            <a:r>
+              <a:rPr sz="819" b="0" dirty="0">
+                <a:solidFill>
+                  <a:srgbClr val="5A6673"/>
+                </a:solidFill>
+                <a:latin typeface="Microsoft YaHei"/>
+              </a:rPr>
+              <a:t> 2、4）才有完整 L </a:t>
+            </a:r>
+            <a:r>
+              <a:rPr sz="819" b="0" dirty="0" err="1">
+                <a:solidFill>
+                  <a:srgbClr val="5A6673"/>
+                </a:solidFill>
+                <a:latin typeface="Microsoft YaHei"/>
+              </a:rPr>
+              <a:t>形路径，剩下</a:t>
+            </a:r>
+            <a:r>
+              <a:rPr sz="819" b="0" dirty="0">
+                <a:solidFill>
+                  <a:srgbClr val="5A6673"/>
+                </a:solidFill>
+                <a:latin typeface="Microsoft YaHei"/>
+              </a:rPr>
+              <a:t> 24 个节点、552 对流量；M3′ </a:t>
+            </a:r>
+            <a:r>
+              <a:rPr sz="819" b="0" dirty="0" err="1">
+                <a:solidFill>
+                  <a:srgbClr val="5A6673"/>
+                </a:solidFill>
+                <a:latin typeface="Microsoft YaHei"/>
+              </a:rPr>
+              <a:t>一个不丢。两者峰值不可直接比，只能各自比自己的割界</a:t>
+            </a:r>
+            <a:r>
+              <a:rPr sz="819" b="0" dirty="0">
+                <a:solidFill>
+                  <a:srgbClr val="5A6673"/>
+                </a:solidFill>
+                <a:latin typeface="Microsoft YaHei"/>
+              </a:rPr>
+              <a:t>。</a:t>
             </a:r>
           </a:p>
           <a:p>
@@ -48073,13 +48623,31 @@
               </a:spcAft>
             </a:pPr>
             <a:r>
-              <a:rPr sz="860" b="1">
+              <a:rPr sz="860" b="1" dirty="0">
                 <a:solidFill>
                   <a:srgbClr val="C7000B"/>
                 </a:solidFill>
                 <a:latin typeface="Microsoft YaHei"/>
               </a:rPr>
-              <a:t>M3′ 的代价不是绕远，是选路集中。</a:t>
+              <a:t>M3′ </a:t>
+            </a:r>
+            <a:r>
+              <a:rPr sz="860" b="1" dirty="0" err="1">
+                <a:solidFill>
+                  <a:srgbClr val="C7000B"/>
+                </a:solidFill>
+                <a:latin typeface="Microsoft YaHei"/>
+              </a:rPr>
+              <a:t>的代价是选路集中</a:t>
+            </a:r>
+            <a:r>
+              <a:rPr sz="860" b="1" dirty="0">
+                <a:solidFill>
+                  <a:srgbClr val="C7000B"/>
+                </a:solidFill>
+                <a:latin typeface="Microsoft YaHei"/>
+              </a:rPr>
+              <a:t>。</a:t>
             </a:r>
           </a:p>
           <a:p>
@@ -48092,13 +48660,76 @@
               </a:spcAft>
             </a:pPr>
             <a:r>
-              <a:rPr sz="819" b="0">
+              <a:rPr sz="819" b="0" dirty="0" err="1">
                 <a:solidFill>
                   <a:srgbClr val="5A6673"/>
                 </a:solidFill>
                 <a:latin typeface="Microsoft YaHei"/>
               </a:rPr>
-              <a:t>无故障时 M3′ 与 XY 总跳数都是 10528、平均 4.67 跳 ⇒ 不均衡纯粹来自「同一最短路集合里怎么挑」，因此换选路就能免费改善。</a:t>
+              <a:t>无故障时</a:t>
+            </a:r>
+            <a:r>
+              <a:rPr sz="819" b="0" dirty="0">
+                <a:solidFill>
+                  <a:srgbClr val="5A6673"/>
+                </a:solidFill>
+                <a:latin typeface="Microsoft YaHei"/>
+              </a:rPr>
+              <a:t> M3′ 与 XY </a:t>
+            </a:r>
+            <a:r>
+              <a:rPr sz="819" b="0" dirty="0" err="1">
+                <a:solidFill>
+                  <a:srgbClr val="5A6673"/>
+                </a:solidFill>
+                <a:latin typeface="Microsoft YaHei"/>
+              </a:rPr>
+              <a:t>总跳数都是</a:t>
+            </a:r>
+            <a:r>
+              <a:rPr sz="819" b="0" dirty="0">
+                <a:solidFill>
+                  <a:srgbClr val="5A6673"/>
+                </a:solidFill>
+                <a:latin typeface="Microsoft YaHei"/>
+              </a:rPr>
+              <a:t> 10528、平均 4.67 跳 ⇒ </a:t>
+            </a:r>
+            <a:r>
+              <a:rPr sz="819" b="0" dirty="0" err="1">
+                <a:solidFill>
+                  <a:srgbClr val="5A6673"/>
+                </a:solidFill>
+                <a:latin typeface="Microsoft YaHei"/>
+              </a:rPr>
+              <a:t>不均衡纯粹来自「同一最短路集合里怎么挑</a:t>
+            </a:r>
+            <a:r>
+              <a:rPr sz="819" b="0" dirty="0">
+                <a:solidFill>
+                  <a:srgbClr val="5A6673"/>
+                </a:solidFill>
+                <a:latin typeface="Microsoft YaHei"/>
+              </a:rPr>
+              <a:t>」，</a:t>
+            </a:r>
+            <a:r>
+              <a:rPr sz="819" b="0" dirty="0" err="1">
+                <a:solidFill>
+                  <a:srgbClr val="5A6673"/>
+                </a:solidFill>
+                <a:latin typeface="Microsoft YaHei"/>
+              </a:rPr>
+              <a:t>因此换选路就能免费改善</a:t>
+            </a:r>
+            <a:r>
+              <a:rPr sz="819" b="0" dirty="0">
+                <a:solidFill>
+                  <a:srgbClr val="5A6673"/>
+                </a:solidFill>
+                <a:latin typeface="Microsoft YaHei"/>
+              </a:rPr>
+              <a:t>。</a:t>
             </a:r>
           </a:p>
         </p:txBody>
@@ -48144,10 +48775,11 @@
           </a:fontRef>
         </p:style>
         <p:txBody>
-          <a:bodyPr rtlCol="0" anchor="ctr" wrap="none"/>
+          <a:bodyPr wrap="none" rtlCol="0" anchor="ctr"/>
           <a:lstStyle/>
           <a:p>
             <a:pPr algn="ctr"/>
+            <a:endParaRPr/>
           </a:p>
         </p:txBody>
       </p:sp>
@@ -48188,10 +48820,11 @@
           </a:fontRef>
         </p:style>
         <p:txBody>
-          <a:bodyPr rtlCol="0" anchor="ctr" wrap="none"/>
+          <a:bodyPr wrap="none" rtlCol="0" anchor="ctr"/>
           <a:lstStyle/>
           <a:p>
             <a:pPr algn="ctr"/>
+            <a:endParaRPr/>
           </a:p>
         </p:txBody>
       </p:sp>
@@ -48204,7 +48837,7 @@
         <p:spPr>
           <a:xfrm>
             <a:off x="438912" y="5815583"/>
-            <a:ext cx="5577840" cy="786384"/>
+            <a:ext cx="5577840" cy="468846"/>
           </a:xfrm>
           <a:prstGeom prst="rect">
             <a:avLst/>
@@ -48212,7 +48845,7 @@
           <a:noFill/>
         </p:spPr>
         <p:txBody>
-          <a:bodyPr wrap="square" anchor="t" lIns="0" rIns="0" tIns="0" bIns="0">
+          <a:bodyPr wrap="square" lIns="0" tIns="0" rIns="0" bIns="0" anchor="t">
             <a:spAutoFit/>
           </a:bodyPr>
           <a:lstStyle/>
@@ -48226,13 +48859,31 @@
               </a:spcAft>
             </a:pPr>
             <a:r>
-              <a:rPr sz="940" b="1">
+              <a:rPr sz="940" b="1" dirty="0">
                 <a:solidFill>
                   <a:srgbClr val="1E7F4F"/>
                 </a:solidFill>
                 <a:latin typeface="Microsoft YaHei"/>
               </a:rPr>
-              <a:t>定理 1 实测校核（44 场景 ≤4 router / ≤8 link）</a:t>
+              <a:t>实测校核（44 </a:t>
+            </a:r>
+            <a:r>
+              <a:rPr sz="940" b="1" dirty="0" err="1">
+                <a:solidFill>
+                  <a:srgbClr val="1E7F4F"/>
+                </a:solidFill>
+                <a:latin typeface="Microsoft YaHei"/>
+              </a:rPr>
+              <a:t>场景</a:t>
+            </a:r>
+            <a:r>
+              <a:rPr sz="940" b="1" dirty="0">
+                <a:solidFill>
+                  <a:srgbClr val="1E7F4F"/>
+                </a:solidFill>
+                <a:latin typeface="Microsoft YaHei"/>
+              </a:rPr>
+              <a:t> ≤4 router / ≤8 link）</a:t>
             </a:r>
           </a:p>
           <a:p>
@@ -48245,13 +48896,157 @@
               </a:spcAft>
             </a:pPr>
             <a:r>
-              <a:rPr sz="819" b="0">
+              <a:rPr sz="819" b="0" dirty="0">
                 <a:solidFill>
                   <a:srgbClr val="1F2933"/>
                 </a:solidFill>
                 <a:latin typeface="Microsoft YaHei"/>
               </a:rPr>
-              <a:t>41 个残图连通的场景全部零牺牲、CDG 成环 0 例、反例 0 个；余下 3 个场景残图本身断开（分别孤立 1/2/1 个好节点），牺牲量等于信息论下界。同批场景 XY 零牺牲 0/44。</a:t>
+              <a:t>41 </a:t>
+            </a:r>
+            <a:r>
+              <a:rPr sz="819" b="0" dirty="0" err="1">
+                <a:solidFill>
+                  <a:srgbClr val="1F2933"/>
+                </a:solidFill>
+                <a:latin typeface="Microsoft YaHei"/>
+              </a:rPr>
+              <a:t>个残图连通的场景全部零牺牲、CDG</a:t>
+            </a:r>
+            <a:r>
+              <a:rPr sz="819" b="0" dirty="0">
+                <a:solidFill>
+                  <a:srgbClr val="1F2933"/>
+                </a:solidFill>
+                <a:latin typeface="Microsoft YaHei"/>
+              </a:rPr>
+              <a:t> </a:t>
+            </a:r>
+            <a:r>
+              <a:rPr sz="819" b="0" dirty="0" err="1">
+                <a:solidFill>
+                  <a:srgbClr val="1F2933"/>
+                </a:solidFill>
+                <a:latin typeface="Microsoft YaHei"/>
+              </a:rPr>
+              <a:t>成环</a:t>
+            </a:r>
+            <a:r>
+              <a:rPr sz="819" b="0" dirty="0">
+                <a:solidFill>
+                  <a:srgbClr val="1F2933"/>
+                </a:solidFill>
+                <a:latin typeface="Microsoft YaHei"/>
+              </a:rPr>
+              <a:t> 0 </a:t>
+            </a:r>
+            <a:r>
+              <a:rPr sz="819" b="0" dirty="0" err="1">
+                <a:solidFill>
+                  <a:srgbClr val="1F2933"/>
+                </a:solidFill>
+                <a:latin typeface="Microsoft YaHei"/>
+              </a:rPr>
+              <a:t>例、反例</a:t>
+            </a:r>
+            <a:r>
+              <a:rPr sz="819" b="0" dirty="0">
+                <a:solidFill>
+                  <a:srgbClr val="1F2933"/>
+                </a:solidFill>
+                <a:latin typeface="Microsoft YaHei"/>
+              </a:rPr>
+              <a:t> 0 </a:t>
+            </a:r>
+            <a:r>
+              <a:rPr sz="819" b="0" dirty="0" err="1">
+                <a:solidFill>
+                  <a:srgbClr val="1F2933"/>
+                </a:solidFill>
+                <a:latin typeface="Microsoft YaHei"/>
+              </a:rPr>
+              <a:t>个；余下</a:t>
+            </a:r>
+            <a:r>
+              <a:rPr sz="819" b="0" dirty="0">
+                <a:solidFill>
+                  <a:srgbClr val="1F2933"/>
+                </a:solidFill>
+                <a:latin typeface="Microsoft YaHei"/>
+              </a:rPr>
+              <a:t> 3 </a:t>
+            </a:r>
+            <a:r>
+              <a:rPr sz="819" b="0" dirty="0" err="1">
+                <a:solidFill>
+                  <a:srgbClr val="1F2933"/>
+                </a:solidFill>
+                <a:latin typeface="Microsoft YaHei"/>
+              </a:rPr>
+              <a:t>个场景残图本身断开（分别孤立</a:t>
+            </a:r>
+            <a:r>
+              <a:rPr sz="819" b="0" dirty="0">
+                <a:solidFill>
+                  <a:srgbClr val="1F2933"/>
+                </a:solidFill>
+                <a:latin typeface="Microsoft YaHei"/>
+              </a:rPr>
+              <a:t> 1/2/1 </a:t>
+            </a:r>
+            <a:r>
+              <a:rPr sz="819" b="0" dirty="0" err="1">
+                <a:solidFill>
+                  <a:srgbClr val="1F2933"/>
+                </a:solidFill>
+                <a:latin typeface="Microsoft YaHei"/>
+              </a:rPr>
+              <a:t>个好节点</a:t>
+            </a:r>
+            <a:r>
+              <a:rPr sz="819" b="0" dirty="0">
+                <a:solidFill>
+                  <a:srgbClr val="1F2933"/>
+                </a:solidFill>
+                <a:latin typeface="Microsoft YaHei"/>
+              </a:rPr>
+              <a:t>），</a:t>
+            </a:r>
+            <a:r>
+              <a:rPr sz="819" b="0" dirty="0" err="1">
+                <a:solidFill>
+                  <a:srgbClr val="1F2933"/>
+                </a:solidFill>
+                <a:latin typeface="Microsoft YaHei"/>
+              </a:rPr>
+              <a:t>牺牲量等于信息论下界。同批场景</a:t>
+            </a:r>
+            <a:r>
+              <a:rPr sz="819" b="0" dirty="0">
+                <a:solidFill>
+                  <a:srgbClr val="1F2933"/>
+                </a:solidFill>
+                <a:latin typeface="Microsoft YaHei"/>
+              </a:rPr>
+              <a:t> XY </a:t>
+            </a:r>
+            <a:r>
+              <a:rPr lang="zh-CN" altLang="en-US" sz="819" dirty="0">
+                <a:solidFill>
+                  <a:srgbClr val="1F2933"/>
+                </a:solidFill>
+                <a:latin typeface="Microsoft YaHei"/>
+              </a:rPr>
+              <a:t>每个场景都牺牲</a:t>
+            </a:r>
+            <a:r>
+              <a:rPr sz="819" b="0" dirty="0">
+                <a:solidFill>
+                  <a:srgbClr val="1F2933"/>
+                </a:solidFill>
+                <a:latin typeface="Microsoft YaHei"/>
+              </a:rPr>
+              <a:t> 0/44。</a:t>
             </a:r>
           </a:p>
         </p:txBody>
@@ -48265,7 +49060,7 @@
         <p:spPr>
           <a:xfrm>
             <a:off x="6217920" y="5815583"/>
-            <a:ext cx="3017520" cy="786384"/>
+            <a:ext cx="3017520" cy="468846"/>
           </a:xfrm>
           <a:prstGeom prst="rect">
             <a:avLst/>
@@ -48273,7 +49068,7 @@
           <a:noFill/>
         </p:spPr>
         <p:txBody>
-          <a:bodyPr wrap="square" anchor="t" lIns="0" rIns="0" tIns="0" bIns="0">
+          <a:bodyPr wrap="square" lIns="0" tIns="0" rIns="0" bIns="0" anchor="t">
             <a:spAutoFit/>
           </a:bodyPr>
           <a:lstStyle/>
@@ -48287,14 +49082,29 @@
               </a:spcAft>
             </a:pPr>
             <a:r>
-              <a:rPr sz="940" b="1">
+              <a:rPr lang="zh-CN" altLang="en-US" sz="940" b="1" dirty="0">
                 <a:solidFill>
                   <a:srgbClr val="1E7F4F"/>
                 </a:solidFill>
                 <a:latin typeface="Microsoft YaHei"/>
               </a:rPr>
-              <a:t>定理 2（极大性）</a:t>
+              <a:t>转向集</a:t>
             </a:r>
+            <a:r>
+              <a:rPr sz="940" b="1" dirty="0" err="1">
+                <a:solidFill>
+                  <a:srgbClr val="1E7F4F"/>
+                </a:solidFill>
+                <a:latin typeface="Microsoft YaHei"/>
+              </a:rPr>
+              <a:t>极大性</a:t>
+            </a:r>
+            <a:endParaRPr sz="940" b="1" dirty="0">
+              <a:solidFill>
+                <a:srgbClr val="1E7F4F"/>
+              </a:solidFill>
+              <a:latin typeface="Microsoft YaHei"/>
+            </a:endParaRPr>
           </a:p>
           <a:p>
             <a:pPr algn="l">
@@ -48306,13 +49116,94 @@
               </a:spcAft>
             </a:pPr>
             <a:r>
-              <a:rPr sz="819" b="0">
+              <a:rPr sz="819" b="0" dirty="0" err="1">
                 <a:solidFill>
                   <a:srgbClr val="1F2933"/>
                 </a:solidFill>
                 <a:latin typeface="Microsoft YaHei"/>
               </a:rPr>
-              <a:t>任一被禁的 down→up 一旦放开必成环；实测 48 个根 × 3360 条禁令逐条测试，可加入 0 条。</a:t>
+              <a:t>任一被禁的</a:t>
+            </a:r>
+            <a:r>
+              <a:rPr sz="819" b="0" dirty="0">
+                <a:solidFill>
+                  <a:srgbClr val="1F2933"/>
+                </a:solidFill>
+                <a:latin typeface="Microsoft YaHei"/>
+              </a:rPr>
+              <a:t> </a:t>
+            </a:r>
+            <a:r>
+              <a:rPr sz="819" b="0" dirty="0" err="1">
+                <a:solidFill>
+                  <a:srgbClr val="1F2933"/>
+                </a:solidFill>
+                <a:latin typeface="Microsoft YaHei"/>
+              </a:rPr>
+              <a:t>down→up</a:t>
+            </a:r>
+            <a:r>
+              <a:rPr sz="819" b="0" dirty="0">
+                <a:solidFill>
+                  <a:srgbClr val="1F2933"/>
+                </a:solidFill>
+                <a:latin typeface="Microsoft YaHei"/>
+              </a:rPr>
+              <a:t> </a:t>
+            </a:r>
+            <a:r>
+              <a:rPr sz="819" b="0" dirty="0" err="1">
+                <a:solidFill>
+                  <a:srgbClr val="1F2933"/>
+                </a:solidFill>
+                <a:latin typeface="Microsoft YaHei"/>
+              </a:rPr>
+              <a:t>一旦放开必成环；实测</a:t>
+            </a:r>
+            <a:r>
+              <a:rPr sz="819" b="0" dirty="0">
+                <a:solidFill>
+                  <a:srgbClr val="1F2933"/>
+                </a:solidFill>
+                <a:latin typeface="Microsoft YaHei"/>
+              </a:rPr>
+              <a:t> 48 </a:t>
+            </a:r>
+            <a:r>
+              <a:rPr sz="819" b="0" dirty="0" err="1">
+                <a:solidFill>
+                  <a:srgbClr val="1F2933"/>
+                </a:solidFill>
+                <a:latin typeface="Microsoft YaHei"/>
+              </a:rPr>
+              <a:t>个根</a:t>
+            </a:r>
+            <a:r>
+              <a:rPr sz="819" b="0" dirty="0">
+                <a:solidFill>
+                  <a:srgbClr val="1F2933"/>
+                </a:solidFill>
+                <a:latin typeface="Microsoft YaHei"/>
+              </a:rPr>
+              <a:t> × 3360 </a:t>
+            </a:r>
+            <a:r>
+              <a:rPr sz="819" b="0" dirty="0" err="1">
+                <a:solidFill>
+                  <a:srgbClr val="1F2933"/>
+                </a:solidFill>
+                <a:latin typeface="Microsoft YaHei"/>
+              </a:rPr>
+              <a:t>条禁令逐条测试，可加入</a:t>
+            </a:r>
+            <a:r>
+              <a:rPr sz="819" b="0" dirty="0">
+                <a:solidFill>
+                  <a:srgbClr val="1F2933"/>
+                </a:solidFill>
+                <a:latin typeface="Microsoft YaHei"/>
+              </a:rPr>
+              <a:t> 0 条。</a:t>
             </a:r>
           </a:p>
         </p:txBody>
@@ -48326,7 +49217,7 @@
         <p:spPr>
           <a:xfrm>
             <a:off x="9418320" y="5815583"/>
-            <a:ext cx="2361895" cy="786384"/>
+            <a:ext cx="2361895" cy="468846"/>
           </a:xfrm>
           <a:prstGeom prst="rect">
             <a:avLst/>
@@ -48334,7 +49225,7 @@
           <a:noFill/>
         </p:spPr>
         <p:txBody>
-          <a:bodyPr wrap="square" anchor="t" lIns="0" rIns="0" tIns="0" bIns="0">
+          <a:bodyPr wrap="square" lIns="0" tIns="0" rIns="0" bIns="0" anchor="t">
             <a:spAutoFit/>
           </a:bodyPr>
           <a:lstStyle/>
@@ -48348,7 +49239,7 @@
               </a:spcAft>
             </a:pPr>
             <a:r>
-              <a:rPr sz="940" b="1">
+              <a:rPr sz="940" b="1" dirty="0" err="1">
                 <a:solidFill>
                   <a:srgbClr val="1E7F4F"/>
                 </a:solidFill>
@@ -48356,6 +49247,12 @@
               </a:rPr>
               <a:t>下一页</a:t>
             </a:r>
+            <a:endParaRPr sz="940" b="1" dirty="0">
+              <a:solidFill>
+                <a:srgbClr val="1E7F4F"/>
+              </a:solidFill>
+              <a:latin typeface="Microsoft YaHei"/>
+            </a:endParaRPr>
           </a:p>
           <a:p>
             <a:pPr algn="l">
@@ -48367,13 +49264,58 @@
               </a:spcAft>
             </a:pPr>
             <a:r>
-              <a:rPr sz="819" b="0">
+              <a:rPr sz="819" b="0" dirty="0" err="1">
                 <a:solidFill>
                   <a:srgbClr val="1F2933"/>
                 </a:solidFill>
                 <a:latin typeface="Microsoft YaHei"/>
               </a:rPr>
-              <a:t>两条定理的符号定义与逐步推导（含 Φ 势能沿真实路径的实测校核）见第 3 页；1 VC 的可行边界见第 4 页。</a:t>
+              <a:t>符号定义与逐步推导（含</a:t>
+            </a:r>
+            <a:r>
+              <a:rPr sz="819" b="0" dirty="0">
+                <a:solidFill>
+                  <a:srgbClr val="1F2933"/>
+                </a:solidFill>
+                <a:latin typeface="Microsoft YaHei"/>
+              </a:rPr>
+              <a:t> Φ </a:t>
+            </a:r>
+            <a:r>
+              <a:rPr sz="819" b="0" dirty="0" err="1">
+                <a:solidFill>
+                  <a:srgbClr val="1F2933"/>
+                </a:solidFill>
+                <a:latin typeface="Microsoft YaHei"/>
+              </a:rPr>
+              <a:t>势能沿真实路径的实测校核）见第</a:t>
+            </a:r>
+            <a:r>
+              <a:rPr sz="819" b="0" dirty="0">
+                <a:solidFill>
+                  <a:srgbClr val="1F2933"/>
+                </a:solidFill>
+                <a:latin typeface="Microsoft YaHei"/>
+              </a:rPr>
+              <a:t> 3 页；1 VC </a:t>
+            </a:r>
+            <a:r>
+              <a:rPr sz="819" b="0" dirty="0" err="1">
+                <a:solidFill>
+                  <a:srgbClr val="1F2933"/>
+                </a:solidFill>
+                <a:latin typeface="Microsoft YaHei"/>
+              </a:rPr>
+              <a:t>的可行边界见第</a:t>
+            </a:r>
+            <a:r>
+              <a:rPr sz="819" b="0" dirty="0">
+                <a:solidFill>
+                  <a:srgbClr val="1F2933"/>
+                </a:solidFill>
+                <a:latin typeface="Microsoft YaHei"/>
+              </a:rPr>
+              <a:t> 4 页。</a:t>
             </a:r>
           </a:p>
         </p:txBody>
@@ -48387,7 +49329,7 @@
 </file>
 
 <file path=ppt/slides/slide3.xml><?xml version="1.0" encoding="utf-8"?>
-<p:sld xmlns:a="http://schemas.openxmlformats.org/drawingml/2006/main" xmlns:p="http://schemas.openxmlformats.org/presentationml/2006/main" xmlns:r="http://schemas.openxmlformats.org/officeDocument/2006/relationships">
+<p:sld xmlns:a="http://schemas.openxmlformats.org/drawingml/2006/main" xmlns:r="http://schemas.openxmlformats.org/officeDocument/2006/relationships" xmlns:p="http://schemas.openxmlformats.org/presentationml/2006/main">
   <p:cSld>
     <p:spTree>
       <p:nvGrpSpPr>
@@ -48395,7 +49337,14 @@
         <p:cNvGrpSpPr/>
         <p:nvPr/>
       </p:nvGrpSpPr>
-      <p:grpSpPr/>
+      <p:grpSpPr>
+        <a:xfrm>
+          <a:off x="0" y="0"/>
+          <a:ext cx="0" cy="0"/>
+          <a:chOff x="0" y="0"/>
+          <a:chExt cx="0" cy="0"/>
+        </a:xfrm>
+      </p:grpSpPr>
       <p:sp>
         <p:nvSpPr>
           <p:cNvPr id="2" name="Rectangle 1"/>
@@ -48433,10 +49382,11 @@
           </a:fontRef>
         </p:style>
         <p:txBody>
-          <a:bodyPr rtlCol="0" anchor="ctr" wrap="none"/>
+          <a:bodyPr wrap="none" rtlCol="0" anchor="ctr"/>
           <a:lstStyle/>
           <a:p>
             <a:pPr algn="ctr"/>
+            <a:endParaRPr/>
           </a:p>
         </p:txBody>
       </p:sp>
@@ -48477,10 +49427,11 @@
           </a:fontRef>
         </p:style>
         <p:txBody>
-          <a:bodyPr rtlCol="0" anchor="ctr" wrap="none"/>
+          <a:bodyPr wrap="none" rtlCol="0" anchor="ctr"/>
           <a:lstStyle/>
           <a:p>
             <a:pPr algn="ctr"/>
+            <a:endParaRPr/>
           </a:p>
         </p:txBody>
       </p:sp>
@@ -48521,10 +49472,11 @@
           </a:fontRef>
         </p:style>
         <p:txBody>
-          <a:bodyPr rtlCol="0" anchor="ctr" wrap="none"/>
+          <a:bodyPr wrap="none" rtlCol="0" anchor="ctr"/>
           <a:lstStyle/>
           <a:p>
             <a:pPr algn="ctr"/>
+            <a:endParaRPr/>
           </a:p>
         </p:txBody>
       </p:sp>
@@ -48537,7 +49489,7 @@
         <p:spPr>
           <a:xfrm>
             <a:off x="310896" y="91440"/>
-            <a:ext cx="11521440" cy="402336"/>
+            <a:ext cx="11521440" cy="350096"/>
           </a:xfrm>
           <a:prstGeom prst="rect">
             <a:avLst/>
@@ -48545,7 +49497,7 @@
           <a:noFill/>
         </p:spPr>
         <p:txBody>
-          <a:bodyPr wrap="square" anchor="t" lIns="0" rIns="0" tIns="0" bIns="0">
+          <a:bodyPr wrap="square" lIns="0" tIns="0" rIns="0" bIns="0" anchor="t">
             <a:spAutoFit/>
           </a:bodyPr>
           <a:lstStyle/>
@@ -48559,14 +49511,42 @@
               </a:spcAft>
             </a:pPr>
             <a:r>
-              <a:rPr sz="2100" b="1">
+              <a:rPr lang="zh-CN" altLang="en-US" sz="2100" b="1" dirty="0">
                 <a:solidFill>
                   <a:srgbClr val="FFFFFF"/>
                 </a:solidFill>
-                <a:latin typeface="Microsoft YaHei"/>
+                <a:latin typeface="微软雅黑" panose="020B0503020204020204" pitchFamily="34" charset="-122"/>
+                <a:ea typeface="微软雅黑" panose="020B0503020204020204" pitchFamily="34" charset="-122"/>
               </a:rPr>
-              <a:t>定理 1 / 定理 2 详解：每个符号的定义与逐步推导</a:t>
+              <a:t>可连通图的容错证明与转向集已极大的证明</a:t>
             </a:r>
+            <a:r>
+              <a:rPr sz="2100" b="1" dirty="0">
+                <a:solidFill>
+                  <a:srgbClr val="FFFFFF"/>
+                </a:solidFill>
+                <a:latin typeface="微软雅黑" panose="020B0503020204020204" pitchFamily="34" charset="-122"/>
+                <a:ea typeface="微软雅黑" panose="020B0503020204020204" pitchFamily="34" charset="-122"/>
+              </a:rPr>
+              <a:t>：</a:t>
+            </a:r>
+            <a:r>
+              <a:rPr sz="2100" b="1" dirty="0" err="1">
+                <a:solidFill>
+                  <a:srgbClr val="FFFFFF"/>
+                </a:solidFill>
+                <a:latin typeface="微软雅黑" panose="020B0503020204020204" pitchFamily="34" charset="-122"/>
+                <a:ea typeface="微软雅黑" panose="020B0503020204020204" pitchFamily="34" charset="-122"/>
+              </a:rPr>
+              <a:t>每个符号的定义与逐步推导</a:t>
+            </a:r>
+            <a:endParaRPr sz="2100" b="1" dirty="0">
+              <a:solidFill>
+                <a:srgbClr val="FFFFFF"/>
+              </a:solidFill>
+              <a:latin typeface="微软雅黑" panose="020B0503020204020204" pitchFamily="34" charset="-122"/>
+              <a:ea typeface="微软雅黑" panose="020B0503020204020204" pitchFamily="34" charset="-122"/>
+            </a:endParaRPr>
           </a:p>
         </p:txBody>
       </p:sp>
@@ -48587,7 +49567,7 @@
           <a:noFill/>
         </p:spPr>
         <p:txBody>
-          <a:bodyPr wrap="square" anchor="t" lIns="0" rIns="0" tIns="0" bIns="0">
+          <a:bodyPr wrap="square" lIns="0" tIns="0" rIns="0" bIns="0" anchor="t">
             <a:spAutoFit/>
           </a:bodyPr>
           <a:lstStyle/>
@@ -48653,10 +49633,11 @@
           </a:fontRef>
         </p:style>
         <p:txBody>
-          <a:bodyPr rtlCol="0" anchor="ctr" wrap="none"/>
+          <a:bodyPr wrap="none" rtlCol="0" anchor="ctr"/>
           <a:lstStyle/>
           <a:p>
             <a:pPr algn="ctr"/>
+            <a:endParaRPr/>
           </a:p>
         </p:txBody>
       </p:sp>
@@ -48699,10 +49680,11 @@
           </a:fontRef>
         </p:style>
         <p:txBody>
-          <a:bodyPr rtlCol="0" anchor="ctr" wrap="none"/>
+          <a:bodyPr wrap="none" rtlCol="0" anchor="ctr"/>
           <a:lstStyle/>
           <a:p>
             <a:pPr algn="ctr"/>
+            <a:endParaRPr/>
           </a:p>
         </p:txBody>
       </p:sp>
@@ -48743,10 +49725,11 @@
           </a:fontRef>
         </p:style>
         <p:txBody>
-          <a:bodyPr rtlCol="0" anchor="ctr" wrap="none"/>
+          <a:bodyPr wrap="none" rtlCol="0" anchor="ctr"/>
           <a:lstStyle/>
           <a:p>
             <a:pPr algn="ctr"/>
+            <a:endParaRPr/>
           </a:p>
         </p:txBody>
       </p:sp>
@@ -48767,7 +49750,7 @@
           <a:noFill/>
         </p:spPr>
         <p:txBody>
-          <a:bodyPr wrap="square" anchor="ctr" lIns="0" rIns="0" tIns="0" bIns="0">
+          <a:bodyPr wrap="square" lIns="0" tIns="0" rIns="0" bIns="0" anchor="ctr">
             <a:spAutoFit/>
           </a:bodyPr>
           <a:lstStyle/>
@@ -48809,7 +49792,7 @@
           <a:noFill/>
         </p:spPr>
         <p:txBody>
-          <a:bodyPr wrap="square" anchor="t" lIns="0" rIns="0" tIns="0" bIns="0">
+          <a:bodyPr wrap="square" lIns="0" tIns="0" rIns="0" bIns="0" anchor="t">
             <a:spAutoFit/>
           </a:bodyPr>
           <a:lstStyle/>
@@ -49046,10 +50029,11 @@
           </a:fontRef>
         </p:style>
         <p:txBody>
-          <a:bodyPr rtlCol="0" anchor="ctr" wrap="none"/>
+          <a:bodyPr wrap="none" rtlCol="0" anchor="ctr"/>
           <a:lstStyle/>
           <a:p>
             <a:pPr algn="ctr"/>
+            <a:endParaRPr/>
           </a:p>
         </p:txBody>
       </p:sp>
@@ -49092,10 +50076,11 @@
           </a:fontRef>
         </p:style>
         <p:txBody>
-          <a:bodyPr rtlCol="0" anchor="ctr" wrap="none"/>
+          <a:bodyPr wrap="none" rtlCol="0" anchor="ctr"/>
           <a:lstStyle/>
           <a:p>
             <a:pPr algn="ctr"/>
+            <a:endParaRPr/>
           </a:p>
         </p:txBody>
       </p:sp>
@@ -49136,10 +50121,11 @@
           </a:fontRef>
         </p:style>
         <p:txBody>
-          <a:bodyPr rtlCol="0" anchor="ctr" wrap="none"/>
+          <a:bodyPr wrap="none" rtlCol="0" anchor="ctr"/>
           <a:lstStyle/>
           <a:p>
             <a:pPr algn="ctr"/>
+            <a:endParaRPr/>
           </a:p>
         </p:txBody>
       </p:sp>
@@ -49160,7 +50146,7 @@
           <a:noFill/>
         </p:spPr>
         <p:txBody>
-          <a:bodyPr wrap="square" anchor="ctr" lIns="0" rIns="0" tIns="0" bIns="0">
+          <a:bodyPr wrap="square" lIns="0" tIns="0" rIns="0" bIns="0" anchor="ctr">
             <a:spAutoFit/>
           </a:bodyPr>
           <a:lstStyle/>
@@ -49202,7 +50188,7 @@
           <a:noFill/>
         </p:spPr>
         <p:txBody>
-          <a:bodyPr wrap="square" anchor="t" lIns="0" rIns="0" tIns="0" bIns="0">
+          <a:bodyPr wrap="square" lIns="0" tIns="0" rIns="0" bIns="0" anchor="t">
             <a:spAutoFit/>
           </a:bodyPr>
           <a:lstStyle/>
@@ -49382,10 +50368,11 @@
           </a:fontRef>
         </p:style>
         <p:txBody>
-          <a:bodyPr rtlCol="0" anchor="ctr" wrap="none"/>
+          <a:bodyPr wrap="none" rtlCol="0" anchor="ctr"/>
           <a:lstStyle/>
           <a:p>
             <a:pPr algn="ctr"/>
+            <a:endParaRPr/>
           </a:p>
         </p:txBody>
       </p:sp>
@@ -49428,10 +50415,11 @@
           </a:fontRef>
         </p:style>
         <p:txBody>
-          <a:bodyPr rtlCol="0" anchor="ctr" wrap="none"/>
+          <a:bodyPr wrap="none" rtlCol="0" anchor="ctr"/>
           <a:lstStyle/>
           <a:p>
             <a:pPr algn="ctr"/>
+            <a:endParaRPr/>
           </a:p>
         </p:txBody>
       </p:sp>
@@ -49472,10 +50460,11 @@
           </a:fontRef>
         </p:style>
         <p:txBody>
-          <a:bodyPr rtlCol="0" anchor="ctr" wrap="none"/>
+          <a:bodyPr wrap="none" rtlCol="0" anchor="ctr"/>
           <a:lstStyle/>
           <a:p>
             <a:pPr algn="ctr"/>
+            <a:endParaRPr/>
           </a:p>
         </p:txBody>
       </p:sp>
@@ -49496,7 +50485,7 @@
           <a:noFill/>
         </p:spPr>
         <p:txBody>
-          <a:bodyPr wrap="square" anchor="ctr" lIns="0" rIns="0" tIns="0" bIns="0">
+          <a:bodyPr wrap="square" lIns="0" tIns="0" rIns="0" bIns="0" anchor="ctr">
             <a:spAutoFit/>
           </a:bodyPr>
           <a:lstStyle/>
@@ -49538,7 +50527,7 @@
           <a:noFill/>
         </p:spPr>
         <p:txBody>
-          <a:bodyPr wrap="square" anchor="t" lIns="0" rIns="0" tIns="0" bIns="0">
+          <a:bodyPr wrap="square" lIns="0" tIns="0" rIns="0" bIns="0" anchor="t">
             <a:spAutoFit/>
           </a:bodyPr>
           <a:lstStyle/>
@@ -49718,10 +50707,11 @@
           </a:fontRef>
         </p:style>
         <p:txBody>
-          <a:bodyPr rtlCol="0" anchor="ctr" wrap="none"/>
+          <a:bodyPr wrap="none" rtlCol="0" anchor="ctr"/>
           <a:lstStyle/>
           <a:p>
             <a:pPr algn="ctr"/>
+            <a:endParaRPr/>
           </a:p>
         </p:txBody>
       </p:sp>
@@ -49764,10 +50754,11 @@
           </a:fontRef>
         </p:style>
         <p:txBody>
-          <a:bodyPr rtlCol="0" anchor="ctr" wrap="none"/>
+          <a:bodyPr wrap="none" rtlCol="0" anchor="ctr"/>
           <a:lstStyle/>
           <a:p>
             <a:pPr algn="ctr"/>
+            <a:endParaRPr/>
           </a:p>
         </p:txBody>
       </p:sp>
@@ -49808,10 +50799,11 @@
           </a:fontRef>
         </p:style>
         <p:txBody>
-          <a:bodyPr rtlCol="0" anchor="ctr" wrap="none"/>
+          <a:bodyPr wrap="none" rtlCol="0" anchor="ctr"/>
           <a:lstStyle/>
           <a:p>
             <a:pPr algn="ctr"/>
+            <a:endParaRPr/>
           </a:p>
         </p:txBody>
       </p:sp>
@@ -49832,7 +50824,7 @@
           <a:noFill/>
         </p:spPr>
         <p:txBody>
-          <a:bodyPr wrap="square" anchor="ctr" lIns="0" rIns="0" tIns="0" bIns="0">
+          <a:bodyPr wrap="square" lIns="0" tIns="0" rIns="0" bIns="0" anchor="ctr">
             <a:spAutoFit/>
           </a:bodyPr>
           <a:lstStyle/>
@@ -50152,6 +51144,7 @@
           <a:lstStyle/>
           <a:p>
             <a:pPr algn="ctr"/>
+            <a:endParaRPr/>
           </a:p>
         </p:txBody>
       </p:sp>
@@ -50172,7 +51165,7 @@
           <a:noFill/>
         </p:spPr>
         <p:txBody>
-          <a:bodyPr wrap="square" anchor="t" lIns="0" rIns="0" tIns="0" bIns="0">
+          <a:bodyPr wrap="square" lIns="0" tIns="0" rIns="0" bIns="0" anchor="t">
             <a:spAutoFit/>
           </a:bodyPr>
           <a:lstStyle/>
@@ -50240,6 +51233,7 @@
           <a:lstStyle/>
           <a:p>
             <a:pPr algn="ctr"/>
+            <a:endParaRPr/>
           </a:p>
         </p:txBody>
       </p:sp>
@@ -50260,7 +51254,7 @@
           <a:noFill/>
         </p:spPr>
         <p:txBody>
-          <a:bodyPr wrap="square" anchor="t" lIns="0" rIns="0" tIns="0" bIns="0">
+          <a:bodyPr wrap="square" lIns="0" tIns="0" rIns="0" bIns="0" anchor="t">
             <a:spAutoFit/>
           </a:bodyPr>
           <a:lstStyle/>
@@ -50328,6 +51322,7 @@
           <a:lstStyle/>
           <a:p>
             <a:pPr algn="ctr"/>
+            <a:endParaRPr/>
           </a:p>
         </p:txBody>
       </p:sp>
@@ -50348,7 +51343,7 @@
           <a:noFill/>
         </p:spPr>
         <p:txBody>
-          <a:bodyPr wrap="square" anchor="t" lIns="0" rIns="0" tIns="0" bIns="0">
+          <a:bodyPr wrap="square" lIns="0" tIns="0" rIns="0" bIns="0" anchor="t">
             <a:spAutoFit/>
           </a:bodyPr>
           <a:lstStyle/>
@@ -50416,6 +51411,7 @@
           <a:lstStyle/>
           <a:p>
             <a:pPr algn="ctr"/>
+            <a:endParaRPr/>
           </a:p>
         </p:txBody>
       </p:sp>
@@ -50436,7 +51432,7 @@
           <a:noFill/>
         </p:spPr>
         <p:txBody>
-          <a:bodyPr wrap="square" anchor="t" lIns="0" rIns="0" tIns="0" bIns="0">
+          <a:bodyPr wrap="square" lIns="0" tIns="0" rIns="0" bIns="0" anchor="t">
             <a:spAutoFit/>
           </a:bodyPr>
           <a:lstStyle/>
@@ -50504,6 +51500,7 @@
           <a:lstStyle/>
           <a:p>
             <a:pPr algn="ctr"/>
+            <a:endParaRPr/>
           </a:p>
         </p:txBody>
       </p:sp>
@@ -50524,7 +51521,7 @@
           <a:noFill/>
         </p:spPr>
         <p:txBody>
-          <a:bodyPr wrap="square" anchor="t" lIns="0" rIns="0" tIns="0" bIns="0">
+          <a:bodyPr wrap="square" lIns="0" tIns="0" rIns="0" bIns="0" anchor="t">
             <a:spAutoFit/>
           </a:bodyPr>
           <a:lstStyle/>
@@ -50592,6 +51589,7 @@
           <a:lstStyle/>
           <a:p>
             <a:pPr algn="ctr"/>
+            <a:endParaRPr/>
           </a:p>
         </p:txBody>
       </p:sp>
@@ -50612,7 +51610,7 @@
           <a:noFill/>
         </p:spPr>
         <p:txBody>
-          <a:bodyPr wrap="square" anchor="t" lIns="0" rIns="0" tIns="0" bIns="0">
+          <a:bodyPr wrap="square" lIns="0" tIns="0" rIns="0" bIns="0" anchor="t">
             <a:spAutoFit/>
           </a:bodyPr>
           <a:lstStyle/>
@@ -50680,6 +51678,7 @@
           <a:lstStyle/>
           <a:p>
             <a:pPr algn="ctr"/>
+            <a:endParaRPr/>
           </a:p>
         </p:txBody>
       </p:sp>
@@ -50700,7 +51699,7 @@
           <a:noFill/>
         </p:spPr>
         <p:txBody>
-          <a:bodyPr wrap="square" anchor="t" lIns="0" rIns="0" tIns="0" bIns="0">
+          <a:bodyPr wrap="square" lIns="0" tIns="0" rIns="0" bIns="0" anchor="t">
             <a:spAutoFit/>
           </a:bodyPr>
           <a:lstStyle/>
@@ -50768,6 +51767,7 @@
           <a:lstStyle/>
           <a:p>
             <a:pPr algn="ctr"/>
+            <a:endParaRPr/>
           </a:p>
         </p:txBody>
       </p:sp>
@@ -50788,7 +51788,7 @@
           <a:noFill/>
         </p:spPr>
         <p:txBody>
-          <a:bodyPr wrap="square" anchor="t" lIns="0" rIns="0" tIns="0" bIns="0">
+          <a:bodyPr wrap="square" lIns="0" tIns="0" rIns="0" bIns="0" anchor="t">
             <a:spAutoFit/>
           </a:bodyPr>
           <a:lstStyle/>
@@ -50830,7 +51830,7 @@
           <a:noFill/>
         </p:spPr>
         <p:txBody>
-          <a:bodyPr wrap="square" anchor="t" lIns="0" rIns="0" tIns="0" bIns="0">
+          <a:bodyPr wrap="square" lIns="0" tIns="0" rIns="0" bIns="0" anchor="t">
             <a:spAutoFit/>
           </a:bodyPr>
           <a:lstStyle/>
@@ -50872,7 +51872,7 @@
           <a:noFill/>
         </p:spPr>
         <p:txBody>
-          <a:bodyPr wrap="square" anchor="t" lIns="0" rIns="0" tIns="0" bIns="0">
+          <a:bodyPr wrap="square" lIns="0" tIns="0" rIns="0" bIns="0" anchor="t">
             <a:spAutoFit/>
           </a:bodyPr>
           <a:lstStyle/>
@@ -50934,10 +51934,11 @@
           </a:fontRef>
         </p:style>
         <p:txBody>
-          <a:bodyPr rtlCol="0" anchor="ctr" wrap="none"/>
+          <a:bodyPr wrap="none" rtlCol="0" anchor="ctr"/>
           <a:lstStyle/>
           <a:p>
             <a:pPr algn="ctr"/>
+            <a:endParaRPr/>
           </a:p>
         </p:txBody>
       </p:sp>
@@ -50958,7 +51959,7 @@
           <a:noFill/>
         </p:spPr>
         <p:txBody>
-          <a:bodyPr wrap="square" anchor="ctr" lIns="0" rIns="0" tIns="0" bIns="0">
+          <a:bodyPr wrap="square" lIns="0" tIns="0" rIns="0" bIns="0" anchor="ctr">
             <a:spAutoFit/>
           </a:bodyPr>
           <a:lstStyle/>
@@ -51000,7 +52001,7 @@
           <a:noFill/>
         </p:spPr>
         <p:txBody>
-          <a:bodyPr wrap="square" anchor="ctr" lIns="0" rIns="0" tIns="0" bIns="0">
+          <a:bodyPr wrap="square" lIns="0" tIns="0" rIns="0" bIns="0" anchor="ctr">
             <a:spAutoFit/>
           </a:bodyPr>
           <a:lstStyle/>
@@ -51042,7 +52043,7 @@
           <a:noFill/>
         </p:spPr>
         <p:txBody>
-          <a:bodyPr wrap="square" anchor="ctr" lIns="0" rIns="0" tIns="0" bIns="0">
+          <a:bodyPr wrap="square" lIns="0" tIns="0" rIns="0" bIns="0" anchor="ctr">
             <a:spAutoFit/>
           </a:bodyPr>
           <a:lstStyle/>
@@ -51084,7 +52085,7 @@
           <a:noFill/>
         </p:spPr>
         <p:txBody>
-          <a:bodyPr wrap="square" anchor="ctr" lIns="0" rIns="0" tIns="0" bIns="0">
+          <a:bodyPr wrap="square" lIns="0" tIns="0" rIns="0" bIns="0" anchor="ctr">
             <a:spAutoFit/>
           </a:bodyPr>
           <a:lstStyle/>
@@ -51126,7 +52127,7 @@
           <a:noFill/>
         </p:spPr>
         <p:txBody>
-          <a:bodyPr wrap="square" anchor="ctr" lIns="0" rIns="0" tIns="0" bIns="0">
+          <a:bodyPr wrap="square" lIns="0" tIns="0" rIns="0" bIns="0" anchor="ctr">
             <a:spAutoFit/>
           </a:bodyPr>
           <a:lstStyle/>
@@ -51168,7 +52169,7 @@
           <a:noFill/>
         </p:spPr>
         <p:txBody>
-          <a:bodyPr wrap="square" anchor="ctr" lIns="0" rIns="0" tIns="0" bIns="0">
+          <a:bodyPr wrap="square" lIns="0" tIns="0" rIns="0" bIns="0" anchor="ctr">
             <a:spAutoFit/>
           </a:bodyPr>
           <a:lstStyle/>
@@ -51210,7 +52211,7 @@
           <a:noFill/>
         </p:spPr>
         <p:txBody>
-          <a:bodyPr wrap="square" anchor="ctr" lIns="0" rIns="0" tIns="0" bIns="0">
+          <a:bodyPr wrap="square" lIns="0" tIns="0" rIns="0" bIns="0" anchor="ctr">
             <a:spAutoFit/>
           </a:bodyPr>
           <a:lstStyle/>
@@ -51252,7 +52253,7 @@
           <a:noFill/>
         </p:spPr>
         <p:txBody>
-          <a:bodyPr wrap="square" anchor="ctr" lIns="0" rIns="0" tIns="0" bIns="0">
+          <a:bodyPr wrap="square" lIns="0" tIns="0" rIns="0" bIns="0" anchor="ctr">
             <a:spAutoFit/>
           </a:bodyPr>
           <a:lstStyle/>
@@ -51314,10 +52315,11 @@
           </a:fontRef>
         </p:style>
         <p:txBody>
-          <a:bodyPr rtlCol="0" anchor="ctr" wrap="none"/>
+          <a:bodyPr wrap="none" rtlCol="0" anchor="ctr"/>
           <a:lstStyle/>
           <a:p>
             <a:pPr algn="ctr"/>
+            <a:endParaRPr/>
           </a:p>
         </p:txBody>
       </p:sp>
@@ -51338,7 +52340,7 @@
           <a:noFill/>
         </p:spPr>
         <p:txBody>
-          <a:bodyPr wrap="square" anchor="ctr" lIns="0" rIns="0" tIns="0" bIns="0">
+          <a:bodyPr wrap="square" lIns="0" tIns="0" rIns="0" bIns="0" anchor="ctr">
             <a:spAutoFit/>
           </a:bodyPr>
           <a:lstStyle/>
@@ -51380,7 +52382,7 @@
           <a:noFill/>
         </p:spPr>
         <p:txBody>
-          <a:bodyPr wrap="square" anchor="ctr" lIns="0" rIns="0" tIns="0" bIns="0">
+          <a:bodyPr wrap="square" lIns="0" tIns="0" rIns="0" bIns="0" anchor="ctr">
             <a:spAutoFit/>
           </a:bodyPr>
           <a:lstStyle/>
@@ -51422,7 +52424,7 @@
           <a:noFill/>
         </p:spPr>
         <p:txBody>
-          <a:bodyPr wrap="square" anchor="ctr" lIns="0" rIns="0" tIns="0" bIns="0">
+          <a:bodyPr wrap="square" lIns="0" tIns="0" rIns="0" bIns="0" anchor="ctr">
             <a:spAutoFit/>
           </a:bodyPr>
           <a:lstStyle/>
@@ -51464,7 +52466,7 @@
           <a:noFill/>
         </p:spPr>
         <p:txBody>
-          <a:bodyPr wrap="square" anchor="ctr" lIns="0" rIns="0" tIns="0" bIns="0">
+          <a:bodyPr wrap="square" lIns="0" tIns="0" rIns="0" bIns="0" anchor="ctr">
             <a:spAutoFit/>
           </a:bodyPr>
           <a:lstStyle/>
@@ -51506,7 +52508,7 @@
           <a:noFill/>
         </p:spPr>
         <p:txBody>
-          <a:bodyPr wrap="square" anchor="ctr" lIns="0" rIns="0" tIns="0" bIns="0">
+          <a:bodyPr wrap="square" lIns="0" tIns="0" rIns="0" bIns="0" anchor="ctr">
             <a:spAutoFit/>
           </a:bodyPr>
           <a:lstStyle/>
@@ -51548,7 +52550,7 @@
           <a:noFill/>
         </p:spPr>
         <p:txBody>
-          <a:bodyPr wrap="square" anchor="ctr" lIns="0" rIns="0" tIns="0" bIns="0">
+          <a:bodyPr wrap="square" lIns="0" tIns="0" rIns="0" bIns="0" anchor="ctr">
             <a:spAutoFit/>
           </a:bodyPr>
           <a:lstStyle/>
@@ -51590,7 +52592,7 @@
           <a:noFill/>
         </p:spPr>
         <p:txBody>
-          <a:bodyPr wrap="square" anchor="ctr" lIns="0" rIns="0" tIns="0" bIns="0">
+          <a:bodyPr wrap="square" lIns="0" tIns="0" rIns="0" bIns="0" anchor="ctr">
             <a:spAutoFit/>
           </a:bodyPr>
           <a:lstStyle/>
@@ -51632,7 +52634,7 @@
           <a:noFill/>
         </p:spPr>
         <p:txBody>
-          <a:bodyPr wrap="square" anchor="ctr" lIns="0" rIns="0" tIns="0" bIns="0">
+          <a:bodyPr wrap="square" lIns="0" tIns="0" rIns="0" bIns="0" anchor="ctr">
             <a:spAutoFit/>
           </a:bodyPr>
           <a:lstStyle/>
@@ -51729,10 +52731,11 @@
           </a:fontRef>
         </p:style>
         <p:txBody>
-          <a:bodyPr rtlCol="0" anchor="ctr" wrap="none"/>
+          <a:bodyPr wrap="none" rtlCol="0" anchor="ctr"/>
           <a:lstStyle/>
           <a:p>
             <a:pPr algn="ctr"/>
+            <a:endParaRPr/>
           </a:p>
         </p:txBody>
       </p:sp>
@@ -51753,7 +52756,7 @@
           <a:noFill/>
         </p:spPr>
         <p:txBody>
-          <a:bodyPr wrap="square" anchor="ctr" lIns="0" rIns="0" tIns="0" bIns="0">
+          <a:bodyPr wrap="square" lIns="0" tIns="0" rIns="0" bIns="0" anchor="ctr">
             <a:spAutoFit/>
           </a:bodyPr>
           <a:lstStyle/>
@@ -51795,7 +52798,7 @@
           <a:noFill/>
         </p:spPr>
         <p:txBody>
-          <a:bodyPr wrap="square" anchor="ctr" lIns="0" rIns="0" tIns="0" bIns="0">
+          <a:bodyPr wrap="square" lIns="0" tIns="0" rIns="0" bIns="0" anchor="ctr">
             <a:spAutoFit/>
           </a:bodyPr>
           <a:lstStyle/>
@@ -51837,7 +52840,7 @@
           <a:noFill/>
         </p:spPr>
         <p:txBody>
-          <a:bodyPr wrap="square" anchor="ctr" lIns="0" rIns="0" tIns="0" bIns="0">
+          <a:bodyPr wrap="square" lIns="0" tIns="0" rIns="0" bIns="0" anchor="ctr">
             <a:spAutoFit/>
           </a:bodyPr>
           <a:lstStyle/>
@@ -51879,7 +52882,7 @@
           <a:noFill/>
         </p:spPr>
         <p:txBody>
-          <a:bodyPr wrap="square" anchor="ctr" lIns="0" rIns="0" tIns="0" bIns="0">
+          <a:bodyPr wrap="square" lIns="0" tIns="0" rIns="0" bIns="0" anchor="ctr">
             <a:spAutoFit/>
           </a:bodyPr>
           <a:lstStyle/>
@@ -51921,7 +52924,7 @@
           <a:noFill/>
         </p:spPr>
         <p:txBody>
-          <a:bodyPr wrap="square" anchor="ctr" lIns="0" rIns="0" tIns="0" bIns="0">
+          <a:bodyPr wrap="square" lIns="0" tIns="0" rIns="0" bIns="0" anchor="ctr">
             <a:spAutoFit/>
           </a:bodyPr>
           <a:lstStyle/>
@@ -51963,7 +52966,7 @@
           <a:noFill/>
         </p:spPr>
         <p:txBody>
-          <a:bodyPr wrap="square" anchor="ctr" lIns="0" rIns="0" tIns="0" bIns="0">
+          <a:bodyPr wrap="square" lIns="0" tIns="0" rIns="0" bIns="0" anchor="ctr">
             <a:spAutoFit/>
           </a:bodyPr>
           <a:lstStyle/>
@@ -52005,7 +53008,7 @@
           <a:noFill/>
         </p:spPr>
         <p:txBody>
-          <a:bodyPr wrap="square" anchor="ctr" lIns="0" rIns="0" tIns="0" bIns="0">
+          <a:bodyPr wrap="square" lIns="0" tIns="0" rIns="0" bIns="0" anchor="ctr">
             <a:spAutoFit/>
           </a:bodyPr>
           <a:lstStyle/>
@@ -52047,7 +53050,7 @@
           <a:noFill/>
         </p:spPr>
         <p:txBody>
-          <a:bodyPr wrap="square" anchor="ctr" lIns="0" rIns="0" tIns="0" bIns="0">
+          <a:bodyPr wrap="square" lIns="0" tIns="0" rIns="0" bIns="0" anchor="ctr">
             <a:spAutoFit/>
           </a:bodyPr>
           <a:lstStyle/>
@@ -52144,10 +53147,11 @@
           </a:fontRef>
         </p:style>
         <p:txBody>
-          <a:bodyPr rtlCol="0" anchor="ctr" wrap="none"/>
+          <a:bodyPr wrap="none" rtlCol="0" anchor="ctr"/>
           <a:lstStyle/>
           <a:p>
             <a:pPr algn="ctr"/>
+            <a:endParaRPr/>
           </a:p>
         </p:txBody>
       </p:sp>
@@ -52168,7 +53172,7 @@
           <a:noFill/>
         </p:spPr>
         <p:txBody>
-          <a:bodyPr wrap="square" anchor="ctr" lIns="0" rIns="0" tIns="0" bIns="0">
+          <a:bodyPr wrap="square" lIns="0" tIns="0" rIns="0" bIns="0" anchor="ctr">
             <a:spAutoFit/>
           </a:bodyPr>
           <a:lstStyle/>
@@ -52210,7 +53214,7 @@
           <a:noFill/>
         </p:spPr>
         <p:txBody>
-          <a:bodyPr wrap="square" anchor="ctr" lIns="0" rIns="0" tIns="0" bIns="0">
+          <a:bodyPr wrap="square" lIns="0" tIns="0" rIns="0" bIns="0" anchor="ctr">
             <a:spAutoFit/>
           </a:bodyPr>
           <a:lstStyle/>
@@ -52252,7 +53256,7 @@
           <a:noFill/>
         </p:spPr>
         <p:txBody>
-          <a:bodyPr wrap="square" anchor="ctr" lIns="0" rIns="0" tIns="0" bIns="0">
+          <a:bodyPr wrap="square" lIns="0" tIns="0" rIns="0" bIns="0" anchor="ctr">
             <a:spAutoFit/>
           </a:bodyPr>
           <a:lstStyle/>
@@ -52294,7 +53298,7 @@
           <a:noFill/>
         </p:spPr>
         <p:txBody>
-          <a:bodyPr wrap="square" anchor="ctr" lIns="0" rIns="0" tIns="0" bIns="0">
+          <a:bodyPr wrap="square" lIns="0" tIns="0" rIns="0" bIns="0" anchor="ctr">
             <a:spAutoFit/>
           </a:bodyPr>
           <a:lstStyle/>
@@ -52336,7 +53340,7 @@
           <a:noFill/>
         </p:spPr>
         <p:txBody>
-          <a:bodyPr wrap="square" anchor="ctr" lIns="0" rIns="0" tIns="0" bIns="0">
+          <a:bodyPr wrap="square" lIns="0" tIns="0" rIns="0" bIns="0" anchor="ctr">
             <a:spAutoFit/>
           </a:bodyPr>
           <a:lstStyle/>
@@ -52378,7 +53382,7 @@
           <a:noFill/>
         </p:spPr>
         <p:txBody>
-          <a:bodyPr wrap="square" anchor="ctr" lIns="0" rIns="0" tIns="0" bIns="0">
+          <a:bodyPr wrap="square" lIns="0" tIns="0" rIns="0" bIns="0" anchor="ctr">
             <a:spAutoFit/>
           </a:bodyPr>
           <a:lstStyle/>
@@ -52420,7 +53424,7 @@
           <a:noFill/>
         </p:spPr>
         <p:txBody>
-          <a:bodyPr wrap="square" anchor="ctr" lIns="0" rIns="0" tIns="0" bIns="0">
+          <a:bodyPr wrap="square" lIns="0" tIns="0" rIns="0" bIns="0" anchor="ctr">
             <a:spAutoFit/>
           </a:bodyPr>
           <a:lstStyle/>
@@ -52462,7 +53466,7 @@
           <a:noFill/>
         </p:spPr>
         <p:txBody>
-          <a:bodyPr wrap="square" anchor="ctr" lIns="0" rIns="0" tIns="0" bIns="0">
+          <a:bodyPr wrap="square" lIns="0" tIns="0" rIns="0" bIns="0" anchor="ctr">
             <a:spAutoFit/>
           </a:bodyPr>
           <a:lstStyle/>
@@ -52559,10 +53563,11 @@
           </a:fontRef>
         </p:style>
         <p:txBody>
-          <a:bodyPr rtlCol="0" anchor="ctr" wrap="none"/>
+          <a:bodyPr wrap="none" rtlCol="0" anchor="ctr"/>
           <a:lstStyle/>
           <a:p>
             <a:pPr algn="ctr"/>
+            <a:endParaRPr/>
           </a:p>
         </p:txBody>
       </p:sp>
@@ -52583,7 +53588,7 @@
           <a:noFill/>
         </p:spPr>
         <p:txBody>
-          <a:bodyPr wrap="square" anchor="t" lIns="0" rIns="0" tIns="0" bIns="0">
+          <a:bodyPr wrap="square" lIns="0" tIns="0" rIns="0" bIns="0" anchor="t">
             <a:spAutoFit/>
           </a:bodyPr>
           <a:lstStyle/>
@@ -52649,10 +53654,11 @@
           </a:fontRef>
         </p:style>
         <p:txBody>
-          <a:bodyPr rtlCol="0" anchor="ctr" wrap="none"/>
+          <a:bodyPr wrap="none" rtlCol="0" anchor="ctr"/>
           <a:lstStyle/>
           <a:p>
             <a:pPr algn="ctr"/>
+            <a:endParaRPr/>
           </a:p>
         </p:txBody>
       </p:sp>
@@ -52695,10 +53701,11 @@
           </a:fontRef>
         </p:style>
         <p:txBody>
-          <a:bodyPr rtlCol="0" anchor="ctr" wrap="none"/>
+          <a:bodyPr wrap="none" rtlCol="0" anchor="ctr"/>
           <a:lstStyle/>
           <a:p>
             <a:pPr algn="ctr"/>
+            <a:endParaRPr/>
           </a:p>
         </p:txBody>
       </p:sp>
@@ -52739,10 +53746,11 @@
           </a:fontRef>
         </p:style>
         <p:txBody>
-          <a:bodyPr rtlCol="0" anchor="ctr" wrap="none"/>
+          <a:bodyPr wrap="none" rtlCol="0" anchor="ctr"/>
           <a:lstStyle/>
           <a:p>
             <a:pPr algn="ctr"/>
+            <a:endParaRPr/>
           </a:p>
         </p:txBody>
       </p:sp>
@@ -52763,7 +53771,7 @@
           <a:noFill/>
         </p:spPr>
         <p:txBody>
-          <a:bodyPr wrap="square" anchor="ctr" lIns="0" rIns="0" tIns="0" bIns="0">
+          <a:bodyPr wrap="square" lIns="0" tIns="0" rIns="0" bIns="0" anchor="ctr">
             <a:spAutoFit/>
           </a:bodyPr>
           <a:lstStyle/>
@@ -52805,7 +53813,7 @@
           <a:noFill/>
         </p:spPr>
         <p:txBody>
-          <a:bodyPr wrap="square" anchor="t" lIns="0" rIns="0" tIns="0" bIns="0">
+          <a:bodyPr wrap="square" lIns="0" tIns="0" rIns="0" bIns="0" anchor="t">
             <a:spAutoFit/>
           </a:bodyPr>
           <a:lstStyle/>
@@ -52909,10 +53917,11 @@
           </a:fontRef>
         </p:style>
         <p:txBody>
-          <a:bodyPr rtlCol="0" anchor="ctr" wrap="none"/>
+          <a:bodyPr wrap="none" rtlCol="0" anchor="ctr"/>
           <a:lstStyle/>
           <a:p>
             <a:pPr algn="ctr"/>
+            <a:endParaRPr/>
           </a:p>
         </p:txBody>
       </p:sp>
@@ -52953,10 +53962,11 @@
           </a:fontRef>
         </p:style>
         <p:txBody>
-          <a:bodyPr rtlCol="0" anchor="ctr" wrap="none"/>
+          <a:bodyPr wrap="none" rtlCol="0" anchor="ctr"/>
           <a:lstStyle/>
           <a:p>
             <a:pPr algn="ctr"/>
+            <a:endParaRPr/>
           </a:p>
         </p:txBody>
       </p:sp>
@@ -52977,7 +53987,7 @@
           <a:noFill/>
         </p:spPr>
         <p:txBody>
-          <a:bodyPr wrap="square" anchor="t" lIns="0" rIns="0" tIns="0" bIns="0">
+          <a:bodyPr wrap="square" lIns="0" tIns="0" rIns="0" bIns="0" anchor="t">
             <a:spAutoFit/>
           </a:bodyPr>
           <a:lstStyle/>
@@ -53038,7 +54048,7 @@
           <a:noFill/>
         </p:spPr>
         <p:txBody>
-          <a:bodyPr wrap="square" anchor="t" lIns="0" rIns="0" tIns="0" bIns="0">
+          <a:bodyPr wrap="square" lIns="0" tIns="0" rIns="0" bIns="0" anchor="t">
             <a:spAutoFit/>
           </a:bodyPr>
           <a:lstStyle/>
@@ -53091,7 +54101,7 @@
 </file>
 
 <file path=ppt/slides/slide4.xml><?xml version="1.0" encoding="utf-8"?>
-<p:sld xmlns:a="http://schemas.openxmlformats.org/drawingml/2006/main" xmlns:p="http://schemas.openxmlformats.org/presentationml/2006/main" xmlns:r="http://schemas.openxmlformats.org/officeDocument/2006/relationships">
+<p:sld xmlns:a="http://schemas.openxmlformats.org/drawingml/2006/main" xmlns:r="http://schemas.openxmlformats.org/officeDocument/2006/relationships" xmlns:p="http://schemas.openxmlformats.org/presentationml/2006/main">
   <p:cSld>
     <p:spTree>
       <p:nvGrpSpPr>
@@ -53099,7 +54109,14 @@
         <p:cNvGrpSpPr/>
         <p:nvPr/>
       </p:nvGrpSpPr>
-      <p:grpSpPr/>
+      <p:grpSpPr>
+        <a:xfrm>
+          <a:off x="0" y="0"/>
+          <a:ext cx="0" cy="0"/>
+          <a:chOff x="0" y="0"/>
+          <a:chExt cx="0" cy="0"/>
+        </a:xfrm>
+      </p:grpSpPr>
       <p:sp>
         <p:nvSpPr>
           <p:cNvPr id="2" name="Rectangle 1"/>
@@ -53137,10 +54154,11 @@
           </a:fontRef>
         </p:style>
         <p:txBody>
-          <a:bodyPr rtlCol="0" anchor="ctr" wrap="none"/>
+          <a:bodyPr wrap="none" rtlCol="0" anchor="ctr"/>
           <a:lstStyle/>
           <a:p>
             <a:pPr algn="ctr"/>
+            <a:endParaRPr/>
           </a:p>
         </p:txBody>
       </p:sp>
@@ -53181,10 +54199,11 @@
           </a:fontRef>
         </p:style>
         <p:txBody>
-          <a:bodyPr rtlCol="0" anchor="ctr" wrap="none"/>
+          <a:bodyPr wrap="none" rtlCol="0" anchor="ctr"/>
           <a:lstStyle/>
           <a:p>
             <a:pPr algn="ctr"/>
+            <a:endParaRPr/>
           </a:p>
         </p:txBody>
       </p:sp>
@@ -53225,10 +54244,11 @@
           </a:fontRef>
         </p:style>
         <p:txBody>
-          <a:bodyPr rtlCol="0" anchor="ctr" wrap="none"/>
+          <a:bodyPr wrap="none" rtlCol="0" anchor="ctr"/>
           <a:lstStyle/>
           <a:p>
             <a:pPr algn="ctr"/>
+            <a:endParaRPr/>
           </a:p>
         </p:txBody>
       </p:sp>
@@ -53249,7 +54269,7 @@
           <a:noFill/>
         </p:spPr>
         <p:txBody>
-          <a:bodyPr wrap="square" anchor="t" lIns="0" rIns="0" tIns="0" bIns="0">
+          <a:bodyPr wrap="square" lIns="0" tIns="0" rIns="0" bIns="0" anchor="t">
             <a:spAutoFit/>
           </a:bodyPr>
           <a:lstStyle/>
@@ -53291,7 +54311,7 @@
           <a:noFill/>
         </p:spPr>
         <p:txBody>
-          <a:bodyPr wrap="square" anchor="t" lIns="0" rIns="0" tIns="0" bIns="0">
+          <a:bodyPr wrap="square" lIns="0" tIns="0" rIns="0" bIns="0" anchor="t">
             <a:spAutoFit/>
           </a:bodyPr>
           <a:lstStyle/>
@@ -53357,10 +54377,11 @@
           </a:fontRef>
         </p:style>
         <p:txBody>
-          <a:bodyPr rtlCol="0" anchor="ctr" wrap="none"/>
+          <a:bodyPr wrap="none" rtlCol="0" anchor="ctr"/>
           <a:lstStyle/>
           <a:p>
             <a:pPr algn="ctr"/>
+            <a:endParaRPr/>
           </a:p>
         </p:txBody>
       </p:sp>
@@ -53403,10 +54424,11 @@
           </a:fontRef>
         </p:style>
         <p:txBody>
-          <a:bodyPr rtlCol="0" anchor="ctr" wrap="none"/>
+          <a:bodyPr wrap="none" rtlCol="0" anchor="ctr"/>
           <a:lstStyle/>
           <a:p>
             <a:pPr algn="ctr"/>
+            <a:endParaRPr/>
           </a:p>
         </p:txBody>
       </p:sp>
@@ -53447,10 +54469,11 @@
           </a:fontRef>
         </p:style>
         <p:txBody>
-          <a:bodyPr rtlCol="0" anchor="ctr" wrap="none"/>
+          <a:bodyPr wrap="none" rtlCol="0" anchor="ctr"/>
           <a:lstStyle/>
           <a:p>
             <a:pPr algn="ctr"/>
+            <a:endParaRPr/>
           </a:p>
         </p:txBody>
       </p:sp>
@@ -53471,7 +54494,7 @@
           <a:noFill/>
         </p:spPr>
         <p:txBody>
-          <a:bodyPr wrap="square" anchor="ctr" lIns="0" rIns="0" tIns="0" bIns="0">
+          <a:bodyPr wrap="square" lIns="0" tIns="0" rIns="0" bIns="0" anchor="ctr">
             <a:spAutoFit/>
           </a:bodyPr>
           <a:lstStyle/>
@@ -53533,10 +54556,11 @@
           </a:fontRef>
         </p:style>
         <p:txBody>
-          <a:bodyPr rtlCol="0" anchor="ctr" wrap="none"/>
+          <a:bodyPr wrap="none" rtlCol="0" anchor="ctr"/>
           <a:lstStyle/>
           <a:p>
             <a:pPr algn="ctr"/>
+            <a:endParaRPr/>
           </a:p>
         </p:txBody>
       </p:sp>
@@ -53557,7 +54581,7 @@
           <a:noFill/>
         </p:spPr>
         <p:txBody>
-          <a:bodyPr wrap="square" anchor="ctr" lIns="0" rIns="0" tIns="0" bIns="0">
+          <a:bodyPr wrap="square" lIns="0" tIns="0" rIns="0" bIns="0" anchor="ctr">
             <a:spAutoFit/>
           </a:bodyPr>
           <a:lstStyle/>
@@ -53599,7 +54623,7 @@
           <a:noFill/>
         </p:spPr>
         <p:txBody>
-          <a:bodyPr wrap="square" anchor="ctr" lIns="0" rIns="0" tIns="0" bIns="0">
+          <a:bodyPr wrap="square" lIns="0" tIns="0" rIns="0" bIns="0" anchor="ctr">
             <a:spAutoFit/>
           </a:bodyPr>
           <a:lstStyle/>
@@ -53641,7 +54665,7 @@
           <a:noFill/>
         </p:spPr>
         <p:txBody>
-          <a:bodyPr wrap="square" anchor="ctr" lIns="0" rIns="0" tIns="0" bIns="0">
+          <a:bodyPr wrap="square" lIns="0" tIns="0" rIns="0" bIns="0" anchor="ctr">
             <a:spAutoFit/>
           </a:bodyPr>
           <a:lstStyle/>
@@ -53683,7 +54707,7 @@
           <a:noFill/>
         </p:spPr>
         <p:txBody>
-          <a:bodyPr wrap="square" anchor="ctr" lIns="0" rIns="0" tIns="0" bIns="0">
+          <a:bodyPr wrap="square" lIns="0" tIns="0" rIns="0" bIns="0" anchor="ctr">
             <a:spAutoFit/>
           </a:bodyPr>
           <a:lstStyle/>
@@ -53725,7 +54749,7 @@
           <a:noFill/>
         </p:spPr>
         <p:txBody>
-          <a:bodyPr wrap="square" anchor="ctr" lIns="0" rIns="0" tIns="0" bIns="0">
+          <a:bodyPr wrap="square" lIns="0" tIns="0" rIns="0" bIns="0" anchor="ctr">
             <a:spAutoFit/>
           </a:bodyPr>
           <a:lstStyle/>
@@ -53767,7 +54791,7 @@
           <a:noFill/>
         </p:spPr>
         <p:txBody>
-          <a:bodyPr wrap="square" anchor="ctr" lIns="0" rIns="0" tIns="0" bIns="0">
+          <a:bodyPr wrap="square" lIns="0" tIns="0" rIns="0" bIns="0" anchor="ctr">
             <a:spAutoFit/>
           </a:bodyPr>
           <a:lstStyle/>
@@ -53809,7 +54833,7 @@
           <a:noFill/>
         </p:spPr>
         <p:txBody>
-          <a:bodyPr wrap="square" anchor="ctr" lIns="0" rIns="0" tIns="0" bIns="0">
+          <a:bodyPr wrap="square" lIns="0" tIns="0" rIns="0" bIns="0" anchor="ctr">
             <a:spAutoFit/>
           </a:bodyPr>
           <a:lstStyle/>
@@ -53851,7 +54875,7 @@
           <a:noFill/>
         </p:spPr>
         <p:txBody>
-          <a:bodyPr wrap="square" anchor="ctr" lIns="0" rIns="0" tIns="0" bIns="0">
+          <a:bodyPr wrap="square" lIns="0" tIns="0" rIns="0" bIns="0" anchor="ctr">
             <a:spAutoFit/>
           </a:bodyPr>
           <a:lstStyle/>
@@ -53893,7 +54917,7 @@
           <a:noFill/>
         </p:spPr>
         <p:txBody>
-          <a:bodyPr wrap="square" anchor="ctr" lIns="0" rIns="0" tIns="0" bIns="0">
+          <a:bodyPr wrap="square" lIns="0" tIns="0" rIns="0" bIns="0" anchor="ctr">
             <a:spAutoFit/>
           </a:bodyPr>
           <a:lstStyle/>
@@ -53955,10 +54979,11 @@
           </a:fontRef>
         </p:style>
         <p:txBody>
-          <a:bodyPr rtlCol="0" anchor="ctr" wrap="none"/>
+          <a:bodyPr wrap="none" rtlCol="0" anchor="ctr"/>
           <a:lstStyle/>
           <a:p>
             <a:pPr algn="ctr"/>
+            <a:endParaRPr/>
           </a:p>
         </p:txBody>
       </p:sp>
@@ -53979,7 +55004,7 @@
           <a:noFill/>
         </p:spPr>
         <p:txBody>
-          <a:bodyPr wrap="square" anchor="ctr" lIns="0" rIns="0" tIns="0" bIns="0">
+          <a:bodyPr wrap="square" lIns="0" tIns="0" rIns="0" bIns="0" anchor="ctr">
             <a:spAutoFit/>
           </a:bodyPr>
           <a:lstStyle/>
@@ -54021,7 +55046,7 @@
           <a:noFill/>
         </p:spPr>
         <p:txBody>
-          <a:bodyPr wrap="square" anchor="ctr" lIns="0" rIns="0" tIns="0" bIns="0">
+          <a:bodyPr wrap="square" lIns="0" tIns="0" rIns="0" bIns="0" anchor="ctr">
             <a:spAutoFit/>
           </a:bodyPr>
           <a:lstStyle/>
@@ -54063,7 +55088,7 @@
           <a:noFill/>
         </p:spPr>
         <p:txBody>
-          <a:bodyPr wrap="square" anchor="ctr" lIns="0" rIns="0" tIns="0" bIns="0">
+          <a:bodyPr wrap="square" lIns="0" tIns="0" rIns="0" bIns="0" anchor="ctr">
             <a:spAutoFit/>
           </a:bodyPr>
           <a:lstStyle/>
@@ -54105,7 +55130,7 @@
           <a:noFill/>
         </p:spPr>
         <p:txBody>
-          <a:bodyPr wrap="square" anchor="ctr" lIns="0" rIns="0" tIns="0" bIns="0">
+          <a:bodyPr wrap="square" lIns="0" tIns="0" rIns="0" bIns="0" anchor="ctr">
             <a:spAutoFit/>
           </a:bodyPr>
           <a:lstStyle/>
@@ -54147,7 +55172,7 @@
           <a:noFill/>
         </p:spPr>
         <p:txBody>
-          <a:bodyPr wrap="square" anchor="ctr" lIns="0" rIns="0" tIns="0" bIns="0">
+          <a:bodyPr wrap="square" lIns="0" tIns="0" rIns="0" bIns="0" anchor="ctr">
             <a:spAutoFit/>
           </a:bodyPr>
           <a:lstStyle/>
@@ -54189,7 +55214,7 @@
           <a:noFill/>
         </p:spPr>
         <p:txBody>
-          <a:bodyPr wrap="square" anchor="ctr" lIns="0" rIns="0" tIns="0" bIns="0">
+          <a:bodyPr wrap="square" lIns="0" tIns="0" rIns="0" bIns="0" anchor="ctr">
             <a:spAutoFit/>
           </a:bodyPr>
           <a:lstStyle/>
@@ -54231,7 +55256,7 @@
           <a:noFill/>
         </p:spPr>
         <p:txBody>
-          <a:bodyPr wrap="square" anchor="ctr" lIns="0" rIns="0" tIns="0" bIns="0">
+          <a:bodyPr wrap="square" lIns="0" tIns="0" rIns="0" bIns="0" anchor="ctr">
             <a:spAutoFit/>
           </a:bodyPr>
           <a:lstStyle/>
@@ -54273,7 +55298,7 @@
           <a:noFill/>
         </p:spPr>
         <p:txBody>
-          <a:bodyPr wrap="square" anchor="ctr" lIns="0" rIns="0" tIns="0" bIns="0">
+          <a:bodyPr wrap="square" lIns="0" tIns="0" rIns="0" bIns="0" anchor="ctr">
             <a:spAutoFit/>
           </a:bodyPr>
           <a:lstStyle/>
@@ -54315,7 +55340,7 @@
           <a:noFill/>
         </p:spPr>
         <p:txBody>
-          <a:bodyPr wrap="square" anchor="ctr" lIns="0" rIns="0" tIns="0" bIns="0">
+          <a:bodyPr wrap="square" lIns="0" tIns="0" rIns="0" bIns="0" anchor="ctr">
             <a:spAutoFit/>
           </a:bodyPr>
           <a:lstStyle/>
@@ -54412,10 +55437,11 @@
           </a:fontRef>
         </p:style>
         <p:txBody>
-          <a:bodyPr rtlCol="0" anchor="ctr" wrap="none"/>
+          <a:bodyPr wrap="none" rtlCol="0" anchor="ctr"/>
           <a:lstStyle/>
           <a:p>
             <a:pPr algn="ctr"/>
+            <a:endParaRPr/>
           </a:p>
         </p:txBody>
       </p:sp>
@@ -54436,7 +55462,7 @@
           <a:noFill/>
         </p:spPr>
         <p:txBody>
-          <a:bodyPr wrap="square" anchor="ctr" lIns="0" rIns="0" tIns="0" bIns="0">
+          <a:bodyPr wrap="square" lIns="0" tIns="0" rIns="0" bIns="0" anchor="ctr">
             <a:spAutoFit/>
           </a:bodyPr>
           <a:lstStyle/>
@@ -54478,7 +55504,7 @@
           <a:noFill/>
         </p:spPr>
         <p:txBody>
-          <a:bodyPr wrap="square" anchor="ctr" lIns="0" rIns="0" tIns="0" bIns="0">
+          <a:bodyPr wrap="square" lIns="0" tIns="0" rIns="0" bIns="0" anchor="ctr">
             <a:spAutoFit/>
           </a:bodyPr>
           <a:lstStyle/>
@@ -54520,7 +55546,7 @@
           <a:noFill/>
         </p:spPr>
         <p:txBody>
-          <a:bodyPr wrap="square" anchor="ctr" lIns="0" rIns="0" tIns="0" bIns="0">
+          <a:bodyPr wrap="square" lIns="0" tIns="0" rIns="0" bIns="0" anchor="ctr">
             <a:spAutoFit/>
           </a:bodyPr>
           <a:lstStyle/>
@@ -54562,7 +55588,7 @@
           <a:noFill/>
         </p:spPr>
         <p:txBody>
-          <a:bodyPr wrap="square" anchor="ctr" lIns="0" rIns="0" tIns="0" bIns="0">
+          <a:bodyPr wrap="square" lIns="0" tIns="0" rIns="0" bIns="0" anchor="ctr">
             <a:spAutoFit/>
           </a:bodyPr>
           <a:lstStyle/>
@@ -54604,7 +55630,7 @@
           <a:noFill/>
         </p:spPr>
         <p:txBody>
-          <a:bodyPr wrap="square" anchor="ctr" lIns="0" rIns="0" tIns="0" bIns="0">
+          <a:bodyPr wrap="square" lIns="0" tIns="0" rIns="0" bIns="0" anchor="ctr">
             <a:spAutoFit/>
           </a:bodyPr>
           <a:lstStyle/>
@@ -54646,7 +55672,7 @@
           <a:noFill/>
         </p:spPr>
         <p:txBody>
-          <a:bodyPr wrap="square" anchor="ctr" lIns="0" rIns="0" tIns="0" bIns="0">
+          <a:bodyPr wrap="square" lIns="0" tIns="0" rIns="0" bIns="0" anchor="ctr">
             <a:spAutoFit/>
           </a:bodyPr>
           <a:lstStyle/>
@@ -54688,7 +55714,7 @@
           <a:noFill/>
         </p:spPr>
         <p:txBody>
-          <a:bodyPr wrap="square" anchor="ctr" lIns="0" rIns="0" tIns="0" bIns="0">
+          <a:bodyPr wrap="square" lIns="0" tIns="0" rIns="0" bIns="0" anchor="ctr">
             <a:spAutoFit/>
           </a:bodyPr>
           <a:lstStyle/>
@@ -54730,7 +55756,7 @@
           <a:noFill/>
         </p:spPr>
         <p:txBody>
-          <a:bodyPr wrap="square" anchor="ctr" lIns="0" rIns="0" tIns="0" bIns="0">
+          <a:bodyPr wrap="square" lIns="0" tIns="0" rIns="0" bIns="0" anchor="ctr">
             <a:spAutoFit/>
           </a:bodyPr>
           <a:lstStyle/>
@@ -54772,7 +55798,7 @@
           <a:noFill/>
         </p:spPr>
         <p:txBody>
-          <a:bodyPr wrap="square" anchor="ctr" lIns="0" rIns="0" tIns="0" bIns="0">
+          <a:bodyPr wrap="square" lIns="0" tIns="0" rIns="0" bIns="0" anchor="ctr">
             <a:spAutoFit/>
           </a:bodyPr>
           <a:lstStyle/>
@@ -54869,10 +55895,11 @@
           </a:fontRef>
         </p:style>
         <p:txBody>
-          <a:bodyPr rtlCol="0" anchor="ctr" wrap="none"/>
+          <a:bodyPr wrap="none" rtlCol="0" anchor="ctr"/>
           <a:lstStyle/>
           <a:p>
             <a:pPr algn="ctr"/>
+            <a:endParaRPr/>
           </a:p>
         </p:txBody>
       </p:sp>
@@ -54893,7 +55920,7 @@
           <a:noFill/>
         </p:spPr>
         <p:txBody>
-          <a:bodyPr wrap="square" anchor="ctr" lIns="0" rIns="0" tIns="0" bIns="0">
+          <a:bodyPr wrap="square" lIns="0" tIns="0" rIns="0" bIns="0" anchor="ctr">
             <a:spAutoFit/>
           </a:bodyPr>
           <a:lstStyle/>
@@ -54935,7 +55962,7 @@
           <a:noFill/>
         </p:spPr>
         <p:txBody>
-          <a:bodyPr wrap="square" anchor="ctr" lIns="0" rIns="0" tIns="0" bIns="0">
+          <a:bodyPr wrap="square" lIns="0" tIns="0" rIns="0" bIns="0" anchor="ctr">
             <a:spAutoFit/>
           </a:bodyPr>
           <a:lstStyle/>
@@ -54977,7 +56004,7 @@
           <a:noFill/>
         </p:spPr>
         <p:txBody>
-          <a:bodyPr wrap="square" anchor="ctr" lIns="0" rIns="0" tIns="0" bIns="0">
+          <a:bodyPr wrap="square" lIns="0" tIns="0" rIns="0" bIns="0" anchor="ctr">
             <a:spAutoFit/>
           </a:bodyPr>
           <a:lstStyle/>
@@ -55019,7 +56046,7 @@
           <a:noFill/>
         </p:spPr>
         <p:txBody>
-          <a:bodyPr wrap="square" anchor="ctr" lIns="0" rIns="0" tIns="0" bIns="0">
+          <a:bodyPr wrap="square" lIns="0" tIns="0" rIns="0" bIns="0" anchor="ctr">
             <a:spAutoFit/>
           </a:bodyPr>
           <a:lstStyle/>
@@ -55061,7 +56088,7 @@
           <a:noFill/>
         </p:spPr>
         <p:txBody>
-          <a:bodyPr wrap="square" anchor="ctr" lIns="0" rIns="0" tIns="0" bIns="0">
+          <a:bodyPr wrap="square" lIns="0" tIns="0" rIns="0" bIns="0" anchor="ctr">
             <a:spAutoFit/>
           </a:bodyPr>
           <a:lstStyle/>
@@ -55103,7 +56130,7 @@
           <a:noFill/>
         </p:spPr>
         <p:txBody>
-          <a:bodyPr wrap="square" anchor="ctr" lIns="0" rIns="0" tIns="0" bIns="0">
+          <a:bodyPr wrap="square" lIns="0" tIns="0" rIns="0" bIns="0" anchor="ctr">
             <a:spAutoFit/>
           </a:bodyPr>
           <a:lstStyle/>
@@ -55145,7 +56172,7 @@
           <a:noFill/>
         </p:spPr>
         <p:txBody>
-          <a:bodyPr wrap="square" anchor="ctr" lIns="0" rIns="0" tIns="0" bIns="0">
+          <a:bodyPr wrap="square" lIns="0" tIns="0" rIns="0" bIns="0" anchor="ctr">
             <a:spAutoFit/>
           </a:bodyPr>
           <a:lstStyle/>
@@ -55187,7 +56214,7 @@
           <a:noFill/>
         </p:spPr>
         <p:txBody>
-          <a:bodyPr wrap="square" anchor="ctr" lIns="0" rIns="0" tIns="0" bIns="0">
+          <a:bodyPr wrap="square" lIns="0" tIns="0" rIns="0" bIns="0" anchor="ctr">
             <a:spAutoFit/>
           </a:bodyPr>
           <a:lstStyle/>
@@ -55229,7 +56256,7 @@
           <a:noFill/>
         </p:spPr>
         <p:txBody>
-          <a:bodyPr wrap="square" anchor="ctr" lIns="0" rIns="0" tIns="0" bIns="0">
+          <a:bodyPr wrap="square" lIns="0" tIns="0" rIns="0" bIns="0" anchor="ctr">
             <a:spAutoFit/>
           </a:bodyPr>
           <a:lstStyle/>
@@ -55326,10 +56353,11 @@
           </a:fontRef>
         </p:style>
         <p:txBody>
-          <a:bodyPr rtlCol="0" anchor="ctr" wrap="none"/>
+          <a:bodyPr wrap="none" rtlCol="0" anchor="ctr"/>
           <a:lstStyle/>
           <a:p>
             <a:pPr algn="ctr"/>
+            <a:endParaRPr/>
           </a:p>
         </p:txBody>
       </p:sp>
@@ -55370,10 +56398,11 @@
           </a:fontRef>
         </p:style>
         <p:txBody>
-          <a:bodyPr rtlCol="0" anchor="ctr" wrap="none"/>
+          <a:bodyPr wrap="none" rtlCol="0" anchor="ctr"/>
           <a:lstStyle/>
           <a:p>
             <a:pPr algn="ctr"/>
+            <a:endParaRPr/>
           </a:p>
         </p:txBody>
       </p:sp>
@@ -55394,7 +56423,7 @@
           <a:noFill/>
         </p:spPr>
         <p:txBody>
-          <a:bodyPr wrap="square" anchor="ctr" lIns="0" rIns="0" tIns="0" bIns="0">
+          <a:bodyPr wrap="square" lIns="0" tIns="0" rIns="0" bIns="0" anchor="ctr">
             <a:spAutoFit/>
           </a:bodyPr>
           <a:lstStyle/>
@@ -55436,7 +56465,7 @@
           <a:noFill/>
         </p:spPr>
         <p:txBody>
-          <a:bodyPr wrap="square" anchor="ctr" lIns="0" rIns="0" tIns="0" bIns="0">
+          <a:bodyPr wrap="square" lIns="0" tIns="0" rIns="0" bIns="0" anchor="ctr">
             <a:spAutoFit/>
           </a:bodyPr>
           <a:lstStyle/>
@@ -55478,7 +56507,7 @@
           <a:noFill/>
         </p:spPr>
         <p:txBody>
-          <a:bodyPr wrap="square" anchor="ctr" lIns="0" rIns="0" tIns="0" bIns="0">
+          <a:bodyPr wrap="square" lIns="0" tIns="0" rIns="0" bIns="0" anchor="ctr">
             <a:spAutoFit/>
           </a:bodyPr>
           <a:lstStyle/>
@@ -55520,7 +56549,7 @@
           <a:noFill/>
         </p:spPr>
         <p:txBody>
-          <a:bodyPr wrap="square" anchor="ctr" lIns="0" rIns="0" tIns="0" bIns="0">
+          <a:bodyPr wrap="square" lIns="0" tIns="0" rIns="0" bIns="0" anchor="ctr">
             <a:spAutoFit/>
           </a:bodyPr>
           <a:lstStyle/>
@@ -55562,7 +56591,7 @@
           <a:noFill/>
         </p:spPr>
         <p:txBody>
-          <a:bodyPr wrap="square" anchor="ctr" lIns="0" rIns="0" tIns="0" bIns="0">
+          <a:bodyPr wrap="square" lIns="0" tIns="0" rIns="0" bIns="0" anchor="ctr">
             <a:spAutoFit/>
           </a:bodyPr>
           <a:lstStyle/>
@@ -55604,7 +56633,7 @@
           <a:noFill/>
         </p:spPr>
         <p:txBody>
-          <a:bodyPr wrap="square" anchor="ctr" lIns="0" rIns="0" tIns="0" bIns="0">
+          <a:bodyPr wrap="square" lIns="0" tIns="0" rIns="0" bIns="0" anchor="ctr">
             <a:spAutoFit/>
           </a:bodyPr>
           <a:lstStyle/>
@@ -55646,7 +56675,7 @@
           <a:noFill/>
         </p:spPr>
         <p:txBody>
-          <a:bodyPr wrap="square" anchor="ctr" lIns="0" rIns="0" tIns="0" bIns="0">
+          <a:bodyPr wrap="square" lIns="0" tIns="0" rIns="0" bIns="0" anchor="ctr">
             <a:spAutoFit/>
           </a:bodyPr>
           <a:lstStyle/>
@@ -55688,7 +56717,7 @@
           <a:noFill/>
         </p:spPr>
         <p:txBody>
-          <a:bodyPr wrap="square" anchor="ctr" lIns="0" rIns="0" tIns="0" bIns="0">
+          <a:bodyPr wrap="square" lIns="0" tIns="0" rIns="0" bIns="0" anchor="ctr">
             <a:spAutoFit/>
           </a:bodyPr>
           <a:lstStyle/>
@@ -55730,7 +56759,7 @@
           <a:noFill/>
         </p:spPr>
         <p:txBody>
-          <a:bodyPr wrap="square" anchor="ctr" lIns="0" rIns="0" tIns="0" bIns="0">
+          <a:bodyPr wrap="square" lIns="0" tIns="0" rIns="0" bIns="0" anchor="ctr">
             <a:spAutoFit/>
           </a:bodyPr>
           <a:lstStyle/>
@@ -55827,10 +56856,11 @@
           </a:fontRef>
         </p:style>
         <p:txBody>
-          <a:bodyPr rtlCol="0" anchor="ctr" wrap="none"/>
+          <a:bodyPr wrap="none" rtlCol="0" anchor="ctr"/>
           <a:lstStyle/>
           <a:p>
             <a:pPr algn="ctr"/>
+            <a:endParaRPr/>
           </a:p>
         </p:txBody>
       </p:sp>
@@ -55851,7 +56881,7 @@
           <a:noFill/>
         </p:spPr>
         <p:txBody>
-          <a:bodyPr wrap="square" anchor="ctr" lIns="0" rIns="0" tIns="0" bIns="0">
+          <a:bodyPr wrap="square" lIns="0" tIns="0" rIns="0" bIns="0" anchor="ctr">
             <a:spAutoFit/>
           </a:bodyPr>
           <a:lstStyle/>
@@ -55893,7 +56923,7 @@
           <a:noFill/>
         </p:spPr>
         <p:txBody>
-          <a:bodyPr wrap="square" anchor="ctr" lIns="0" rIns="0" tIns="0" bIns="0">
+          <a:bodyPr wrap="square" lIns="0" tIns="0" rIns="0" bIns="0" anchor="ctr">
             <a:spAutoFit/>
           </a:bodyPr>
           <a:lstStyle/>
@@ -55935,7 +56965,7 @@
           <a:noFill/>
         </p:spPr>
         <p:txBody>
-          <a:bodyPr wrap="square" anchor="ctr" lIns="0" rIns="0" tIns="0" bIns="0">
+          <a:bodyPr wrap="square" lIns="0" tIns="0" rIns="0" bIns="0" anchor="ctr">
             <a:spAutoFit/>
           </a:bodyPr>
           <a:lstStyle/>
@@ -55977,7 +57007,7 @@
           <a:noFill/>
         </p:spPr>
         <p:txBody>
-          <a:bodyPr wrap="square" anchor="ctr" lIns="0" rIns="0" tIns="0" bIns="0">
+          <a:bodyPr wrap="square" lIns="0" tIns="0" rIns="0" bIns="0" anchor="ctr">
             <a:spAutoFit/>
           </a:bodyPr>
           <a:lstStyle/>
@@ -56019,7 +57049,7 @@
           <a:noFill/>
         </p:spPr>
         <p:txBody>
-          <a:bodyPr wrap="square" anchor="ctr" lIns="0" rIns="0" tIns="0" bIns="0">
+          <a:bodyPr wrap="square" lIns="0" tIns="0" rIns="0" bIns="0" anchor="ctr">
             <a:spAutoFit/>
           </a:bodyPr>
           <a:lstStyle/>
@@ -56061,7 +57091,7 @@
           <a:noFill/>
         </p:spPr>
         <p:txBody>
-          <a:bodyPr wrap="square" anchor="ctr" lIns="0" rIns="0" tIns="0" bIns="0">
+          <a:bodyPr wrap="square" lIns="0" tIns="0" rIns="0" bIns="0" anchor="ctr">
             <a:spAutoFit/>
           </a:bodyPr>
           <a:lstStyle/>
@@ -56103,7 +57133,7 @@
           <a:noFill/>
         </p:spPr>
         <p:txBody>
-          <a:bodyPr wrap="square" anchor="ctr" lIns="0" rIns="0" tIns="0" bIns="0">
+          <a:bodyPr wrap="square" lIns="0" tIns="0" rIns="0" bIns="0" anchor="ctr">
             <a:spAutoFit/>
           </a:bodyPr>
           <a:lstStyle/>
@@ -56145,7 +57175,7 @@
           <a:noFill/>
         </p:spPr>
         <p:txBody>
-          <a:bodyPr wrap="square" anchor="ctr" lIns="0" rIns="0" tIns="0" bIns="0">
+          <a:bodyPr wrap="square" lIns="0" tIns="0" rIns="0" bIns="0" anchor="ctr">
             <a:spAutoFit/>
           </a:bodyPr>
           <a:lstStyle/>
@@ -56187,7 +57217,7 @@
           <a:noFill/>
         </p:spPr>
         <p:txBody>
-          <a:bodyPr wrap="square" anchor="ctr" lIns="0" rIns="0" tIns="0" bIns="0">
+          <a:bodyPr wrap="square" lIns="0" tIns="0" rIns="0" bIns="0" anchor="ctr">
             <a:spAutoFit/>
           </a:bodyPr>
           <a:lstStyle/>
@@ -56284,10 +57314,11 @@
           </a:fontRef>
         </p:style>
         <p:txBody>
-          <a:bodyPr rtlCol="0" anchor="ctr" wrap="none"/>
+          <a:bodyPr wrap="none" rtlCol="0" anchor="ctr"/>
           <a:lstStyle/>
           <a:p>
             <a:pPr algn="ctr"/>
+            <a:endParaRPr/>
           </a:p>
         </p:txBody>
       </p:sp>
@@ -56308,7 +57339,7 @@
           <a:noFill/>
         </p:spPr>
         <p:txBody>
-          <a:bodyPr wrap="square" anchor="ctr" lIns="0" rIns="0" tIns="0" bIns="0">
+          <a:bodyPr wrap="square" lIns="0" tIns="0" rIns="0" bIns="0" anchor="ctr">
             <a:spAutoFit/>
           </a:bodyPr>
           <a:lstStyle/>
@@ -56350,7 +57381,7 @@
           <a:noFill/>
         </p:spPr>
         <p:txBody>
-          <a:bodyPr wrap="square" anchor="ctr" lIns="0" rIns="0" tIns="0" bIns="0">
+          <a:bodyPr wrap="square" lIns="0" tIns="0" rIns="0" bIns="0" anchor="ctr">
             <a:spAutoFit/>
           </a:bodyPr>
           <a:lstStyle/>
@@ -56392,7 +57423,7 @@
           <a:noFill/>
         </p:spPr>
         <p:txBody>
-          <a:bodyPr wrap="square" anchor="ctr" lIns="0" rIns="0" tIns="0" bIns="0">
+          <a:bodyPr wrap="square" lIns="0" tIns="0" rIns="0" bIns="0" anchor="ctr">
             <a:spAutoFit/>
           </a:bodyPr>
           <a:lstStyle/>
@@ -56434,7 +57465,7 @@
           <a:noFill/>
         </p:spPr>
         <p:txBody>
-          <a:bodyPr wrap="square" anchor="ctr" lIns="0" rIns="0" tIns="0" bIns="0">
+          <a:bodyPr wrap="square" lIns="0" tIns="0" rIns="0" bIns="0" anchor="ctr">
             <a:spAutoFit/>
           </a:bodyPr>
           <a:lstStyle/>
@@ -56476,7 +57507,7 @@
           <a:noFill/>
         </p:spPr>
         <p:txBody>
-          <a:bodyPr wrap="square" anchor="ctr" lIns="0" rIns="0" tIns="0" bIns="0">
+          <a:bodyPr wrap="square" lIns="0" tIns="0" rIns="0" bIns="0" anchor="ctr">
             <a:spAutoFit/>
           </a:bodyPr>
           <a:lstStyle/>
@@ -56518,7 +57549,7 @@
           <a:noFill/>
         </p:spPr>
         <p:txBody>
-          <a:bodyPr wrap="square" anchor="ctr" lIns="0" rIns="0" tIns="0" bIns="0">
+          <a:bodyPr wrap="square" lIns="0" tIns="0" rIns="0" bIns="0" anchor="ctr">
             <a:spAutoFit/>
           </a:bodyPr>
           <a:lstStyle/>
@@ -56560,7 +57591,7 @@
           <a:noFill/>
         </p:spPr>
         <p:txBody>
-          <a:bodyPr wrap="square" anchor="ctr" lIns="0" rIns="0" tIns="0" bIns="0">
+          <a:bodyPr wrap="square" lIns="0" tIns="0" rIns="0" bIns="0" anchor="ctr">
             <a:spAutoFit/>
           </a:bodyPr>
           <a:lstStyle/>
@@ -56602,7 +57633,7 @@
           <a:noFill/>
         </p:spPr>
         <p:txBody>
-          <a:bodyPr wrap="square" anchor="ctr" lIns="0" rIns="0" tIns="0" bIns="0">
+          <a:bodyPr wrap="square" lIns="0" tIns="0" rIns="0" bIns="0" anchor="ctr">
             <a:spAutoFit/>
           </a:bodyPr>
           <a:lstStyle/>
@@ -56644,7 +57675,7 @@
           <a:noFill/>
         </p:spPr>
         <p:txBody>
-          <a:bodyPr wrap="square" anchor="ctr" lIns="0" rIns="0" tIns="0" bIns="0">
+          <a:bodyPr wrap="square" lIns="0" tIns="0" rIns="0" bIns="0" anchor="ctr">
             <a:spAutoFit/>
           </a:bodyPr>
           <a:lstStyle/>
@@ -56741,10 +57772,11 @@
           </a:fontRef>
         </p:style>
         <p:txBody>
-          <a:bodyPr rtlCol="0" anchor="ctr" wrap="none"/>
+          <a:bodyPr wrap="none" rtlCol="0" anchor="ctr"/>
           <a:lstStyle/>
           <a:p>
             <a:pPr algn="ctr"/>
+            <a:endParaRPr/>
           </a:p>
         </p:txBody>
       </p:sp>
@@ -56789,10 +57821,11 @@
           </a:fontRef>
         </p:style>
         <p:txBody>
-          <a:bodyPr rtlCol="0" anchor="ctr" wrap="none"/>
+          <a:bodyPr wrap="none" rtlCol="0" anchor="ctr"/>
           <a:lstStyle/>
           <a:p>
             <a:pPr algn="ctr"/>
+            <a:endParaRPr/>
           </a:p>
         </p:txBody>
       </p:sp>
@@ -56835,10 +57868,11 @@
           </a:fontRef>
         </p:style>
         <p:txBody>
-          <a:bodyPr rtlCol="0" anchor="ctr" wrap="none"/>
+          <a:bodyPr wrap="none" rtlCol="0" anchor="ctr"/>
           <a:lstStyle/>
           <a:p>
             <a:pPr algn="ctr"/>
+            <a:endParaRPr/>
           </a:p>
         </p:txBody>
       </p:sp>
@@ -56879,10 +57913,11 @@
           </a:fontRef>
         </p:style>
         <p:txBody>
-          <a:bodyPr rtlCol="0" anchor="ctr" wrap="none"/>
+          <a:bodyPr wrap="none" rtlCol="0" anchor="ctr"/>
           <a:lstStyle/>
           <a:p>
             <a:pPr algn="ctr"/>
+            <a:endParaRPr/>
           </a:p>
         </p:txBody>
       </p:sp>
@@ -56903,7 +57938,7 @@
           <a:noFill/>
         </p:spPr>
         <p:txBody>
-          <a:bodyPr wrap="square" anchor="ctr" lIns="0" rIns="0" tIns="0" bIns="0">
+          <a:bodyPr wrap="square" lIns="0" tIns="0" rIns="0" bIns="0" anchor="ctr">
             <a:spAutoFit/>
           </a:bodyPr>
           <a:lstStyle/>
@@ -57116,6 +58151,7 @@
           <a:lstStyle/>
           <a:p>
             <a:pPr algn="ctr"/>
+            <a:endParaRPr/>
           </a:p>
         </p:txBody>
       </p:sp>
@@ -57136,7 +58172,7 @@
           <a:noFill/>
         </p:spPr>
         <p:txBody>
-          <a:bodyPr wrap="square" anchor="t" lIns="0" rIns="0" tIns="0" bIns="0">
+          <a:bodyPr wrap="square" lIns="0" tIns="0" rIns="0" bIns="0" anchor="t">
             <a:spAutoFit/>
           </a:bodyPr>
           <a:lstStyle/>
@@ -57204,6 +58240,7 @@
           <a:lstStyle/>
           <a:p>
             <a:pPr algn="ctr"/>
+            <a:endParaRPr/>
           </a:p>
         </p:txBody>
       </p:sp>
@@ -57224,7 +58261,7 @@
           <a:noFill/>
         </p:spPr>
         <p:txBody>
-          <a:bodyPr wrap="square" anchor="t" lIns="0" rIns="0" tIns="0" bIns="0">
+          <a:bodyPr wrap="square" lIns="0" tIns="0" rIns="0" bIns="0" anchor="t">
             <a:spAutoFit/>
           </a:bodyPr>
           <a:lstStyle/>
@@ -57292,6 +58329,7 @@
           <a:lstStyle/>
           <a:p>
             <a:pPr algn="ctr"/>
+            <a:endParaRPr/>
           </a:p>
         </p:txBody>
       </p:sp>
@@ -57312,7 +58350,7 @@
           <a:noFill/>
         </p:spPr>
         <p:txBody>
-          <a:bodyPr wrap="square" anchor="t" lIns="0" rIns="0" tIns="0" bIns="0">
+          <a:bodyPr wrap="square" lIns="0" tIns="0" rIns="0" bIns="0" anchor="t">
             <a:spAutoFit/>
           </a:bodyPr>
           <a:lstStyle/>
@@ -57380,6 +58418,7 @@
           <a:lstStyle/>
           <a:p>
             <a:pPr algn="ctr"/>
+            <a:endParaRPr/>
           </a:p>
         </p:txBody>
       </p:sp>
@@ -57400,7 +58439,7 @@
           <a:noFill/>
         </p:spPr>
         <p:txBody>
-          <a:bodyPr wrap="square" anchor="t" lIns="0" rIns="0" tIns="0" bIns="0">
+          <a:bodyPr wrap="square" lIns="0" tIns="0" rIns="0" bIns="0" anchor="t">
             <a:spAutoFit/>
           </a:bodyPr>
           <a:lstStyle/>
@@ -57512,7 +58551,7 @@
           <a:noFill/>
         </p:spPr>
         <p:txBody>
-          <a:bodyPr wrap="square" anchor="t" lIns="0" rIns="0" tIns="0" bIns="0">
+          <a:bodyPr wrap="square" lIns="0" tIns="0" rIns="0" bIns="0" anchor="t">
             <a:spAutoFit/>
           </a:bodyPr>
           <a:lstStyle/>
@@ -57554,7 +58593,7 @@
           <a:noFill/>
         </p:spPr>
         <p:txBody>
-          <a:bodyPr wrap="square" anchor="t" lIns="0" rIns="0" tIns="0" bIns="0">
+          <a:bodyPr wrap="square" lIns="0" tIns="0" rIns="0" bIns="0" anchor="t">
             <a:spAutoFit/>
           </a:bodyPr>
           <a:lstStyle/>
@@ -57677,10 +58716,11 @@
           </a:fontRef>
         </p:style>
         <p:txBody>
-          <a:bodyPr rtlCol="0" anchor="ctr" wrap="none"/>
+          <a:bodyPr wrap="none" rtlCol="0" anchor="ctr"/>
           <a:lstStyle/>
           <a:p>
             <a:pPr algn="ctr"/>
+            <a:endParaRPr/>
           </a:p>
         </p:txBody>
       </p:sp>
@@ -57723,10 +58763,11 @@
           </a:fontRef>
         </p:style>
         <p:txBody>
-          <a:bodyPr rtlCol="0" anchor="ctr" wrap="none"/>
+          <a:bodyPr wrap="none" rtlCol="0" anchor="ctr"/>
           <a:lstStyle/>
           <a:p>
             <a:pPr algn="ctr"/>
+            <a:endParaRPr/>
           </a:p>
         </p:txBody>
       </p:sp>
@@ -57767,10 +58808,11 @@
           </a:fontRef>
         </p:style>
         <p:txBody>
-          <a:bodyPr rtlCol="0" anchor="ctr" wrap="none"/>
+          <a:bodyPr wrap="none" rtlCol="0" anchor="ctr"/>
           <a:lstStyle/>
           <a:p>
             <a:pPr algn="ctr"/>
+            <a:endParaRPr/>
           </a:p>
         </p:txBody>
       </p:sp>
@@ -57791,7 +58833,7 @@
           <a:noFill/>
         </p:spPr>
         <p:txBody>
-          <a:bodyPr wrap="square" anchor="ctr" lIns="0" rIns="0" tIns="0" bIns="0">
+          <a:bodyPr wrap="square" lIns="0" tIns="0" rIns="0" bIns="0" anchor="ctr">
             <a:spAutoFit/>
           </a:bodyPr>
           <a:lstStyle/>
@@ -57833,7 +58875,7 @@
           <a:noFill/>
         </p:spPr>
         <p:txBody>
-          <a:bodyPr wrap="square" anchor="t" lIns="0" rIns="0" tIns="0" bIns="0">
+          <a:bodyPr wrap="square" lIns="0" tIns="0" rIns="0" bIns="0" anchor="t">
             <a:spAutoFit/>
           </a:bodyPr>
           <a:lstStyle/>
@@ -57956,10 +58998,11 @@
           </a:fontRef>
         </p:style>
         <p:txBody>
-          <a:bodyPr rtlCol="0" anchor="ctr" wrap="none"/>
+          <a:bodyPr wrap="none" rtlCol="0" anchor="ctr"/>
           <a:lstStyle/>
           <a:p>
             <a:pPr algn="ctr"/>
+            <a:endParaRPr/>
           </a:p>
         </p:txBody>
       </p:sp>
@@ -58002,10 +59045,11 @@
           </a:fontRef>
         </p:style>
         <p:txBody>
-          <a:bodyPr rtlCol="0" anchor="ctr" wrap="none"/>
+          <a:bodyPr wrap="none" rtlCol="0" anchor="ctr"/>
           <a:lstStyle/>
           <a:p>
             <a:pPr algn="ctr"/>
+            <a:endParaRPr/>
           </a:p>
         </p:txBody>
       </p:sp>
@@ -58046,10 +59090,11 @@
           </a:fontRef>
         </p:style>
         <p:txBody>
-          <a:bodyPr rtlCol="0" anchor="ctr" wrap="none"/>
+          <a:bodyPr wrap="none" rtlCol="0" anchor="ctr"/>
           <a:lstStyle/>
           <a:p>
             <a:pPr algn="ctr"/>
+            <a:endParaRPr/>
           </a:p>
         </p:txBody>
       </p:sp>
@@ -58070,7 +59115,7 @@
           <a:noFill/>
         </p:spPr>
         <p:txBody>
-          <a:bodyPr wrap="square" anchor="ctr" lIns="0" rIns="0" tIns="0" bIns="0">
+          <a:bodyPr wrap="square" lIns="0" tIns="0" rIns="0" bIns="0" anchor="ctr">
             <a:spAutoFit/>
           </a:bodyPr>
           <a:lstStyle/>
@@ -58112,7 +59157,7 @@
           <a:noFill/>
         </p:spPr>
         <p:txBody>
-          <a:bodyPr wrap="square" anchor="t" lIns="0" rIns="0" tIns="0" bIns="0">
+          <a:bodyPr wrap="square" lIns="0" tIns="0" rIns="0" bIns="0" anchor="t">
             <a:spAutoFit/>
           </a:bodyPr>
           <a:lstStyle/>
@@ -58235,10 +59280,11 @@
           </a:fontRef>
         </p:style>
         <p:txBody>
-          <a:bodyPr rtlCol="0" anchor="ctr" wrap="none"/>
+          <a:bodyPr wrap="none" rtlCol="0" anchor="ctr"/>
           <a:lstStyle/>
           <a:p>
             <a:pPr algn="ctr"/>
+            <a:endParaRPr/>
           </a:p>
         </p:txBody>
       </p:sp>
@@ -58281,10 +59327,11 @@
           </a:fontRef>
         </p:style>
         <p:txBody>
-          <a:bodyPr rtlCol="0" anchor="ctr" wrap="none"/>
+          <a:bodyPr wrap="none" rtlCol="0" anchor="ctr"/>
           <a:lstStyle/>
           <a:p>
             <a:pPr algn="ctr"/>
+            <a:endParaRPr/>
           </a:p>
         </p:txBody>
       </p:sp>
@@ -58325,10 +59372,11 @@
           </a:fontRef>
         </p:style>
         <p:txBody>
-          <a:bodyPr rtlCol="0" anchor="ctr" wrap="none"/>
+          <a:bodyPr wrap="none" rtlCol="0" anchor="ctr"/>
           <a:lstStyle/>
           <a:p>
             <a:pPr algn="ctr"/>
+            <a:endParaRPr/>
           </a:p>
         </p:txBody>
       </p:sp>
@@ -58349,7 +59397,7 @@
           <a:noFill/>
         </p:spPr>
         <p:txBody>
-          <a:bodyPr wrap="square" anchor="ctr" lIns="0" rIns="0" tIns="0" bIns="0">
+          <a:bodyPr wrap="square" lIns="0" tIns="0" rIns="0" bIns="0" anchor="ctr">
             <a:spAutoFit/>
           </a:bodyPr>
           <a:lstStyle/>
@@ -58391,7 +59439,7 @@
           <a:noFill/>
         </p:spPr>
         <p:txBody>
-          <a:bodyPr wrap="square" anchor="t" lIns="0" rIns="0" tIns="0" bIns="0">
+          <a:bodyPr wrap="square" lIns="0" tIns="0" rIns="0" bIns="0" anchor="t">
             <a:spAutoFit/>
           </a:bodyPr>
           <a:lstStyle/>
@@ -58495,10 +59543,11 @@
           </a:fontRef>
         </p:style>
         <p:txBody>
-          <a:bodyPr rtlCol="0" anchor="ctr" wrap="none"/>
+          <a:bodyPr wrap="none" rtlCol="0" anchor="ctr"/>
           <a:lstStyle/>
           <a:p>
             <a:pPr algn="ctr"/>
+            <a:endParaRPr/>
           </a:p>
         </p:txBody>
       </p:sp>
@@ -58541,10 +59590,11 @@
           </a:fontRef>
         </p:style>
         <p:txBody>
-          <a:bodyPr rtlCol="0" anchor="ctr" wrap="none"/>
+          <a:bodyPr wrap="none" rtlCol="0" anchor="ctr"/>
           <a:lstStyle/>
           <a:p>
             <a:pPr algn="ctr"/>
+            <a:endParaRPr/>
           </a:p>
         </p:txBody>
       </p:sp>
@@ -58585,10 +59635,11 @@
           </a:fontRef>
         </p:style>
         <p:txBody>
-          <a:bodyPr rtlCol="0" anchor="ctr" wrap="none"/>
+          <a:bodyPr wrap="none" rtlCol="0" anchor="ctr"/>
           <a:lstStyle/>
           <a:p>
             <a:pPr algn="ctr"/>
+            <a:endParaRPr/>
           </a:p>
         </p:txBody>
       </p:sp>
@@ -58609,7 +59660,7 @@
           <a:noFill/>
         </p:spPr>
         <p:txBody>
-          <a:bodyPr wrap="square" anchor="ctr" lIns="0" rIns="0" tIns="0" bIns="0">
+          <a:bodyPr wrap="square" lIns="0" tIns="0" rIns="0" bIns="0" anchor="ctr">
             <a:spAutoFit/>
           </a:bodyPr>
           <a:lstStyle/>
@@ -58651,7 +59702,7 @@
           <a:noFill/>
         </p:spPr>
         <p:txBody>
-          <a:bodyPr wrap="square" anchor="t" lIns="0" rIns="0" tIns="0" bIns="0">
+          <a:bodyPr wrap="square" lIns="0" tIns="0" rIns="0" bIns="0" anchor="t">
             <a:spAutoFit/>
           </a:bodyPr>
           <a:lstStyle/>

--- a/results/pg_m3p_updown_slide.pptx
+++ b/results/pg_m3p_updown_slide.pptx
@@ -22138,22 +22138,13 @@
               <a:t> 293 bit/router </a:t>
             </a:r>
             <a:r>
-              <a:rPr sz="1000" b="0">
-                <a:solidFill>
-                  <a:srgbClr val="C3CBD4"/>
-                </a:solidFill>
-                <a:latin typeface="Microsoft YaHei"/>
-              </a:rPr>
-              <a:t>的表</a:t>
-            </a:r>
-            <a:r>
               <a:rPr sz="1000" b="0" dirty="0" err="1">
                 <a:solidFill>
                   <a:srgbClr val="C3CBD4"/>
                 </a:solidFill>
                 <a:latin typeface="Microsoft YaHei"/>
               </a:rPr>
-              <a:t>（每节点存储的</a:t>
+              <a:t>的表（每节点存储的</a:t>
             </a:r>
             <a:r>
               <a:rPr sz="1000" b="0" dirty="0">
